--- a/decks/headwinds-and-tailwinds-lesson-v2.pptx
+++ b/decks/headwinds-and-tailwinds-lesson-v2.pptx
@@ -862,7 +862,7 @@
           <a:lstStyle/>
           <a:p>
             <a:r>
-              <a:t>4 MINUTES. This is the heart of the lesson; say it calmly and plainly. Give two or three everyday examples: being followed less in stores, seeing people who look like you in books and in charge, a name read the same way on a job application (resumes with white-sounding names got about 50 percent more callbacks in one well-known study). Say: "Many white people never notice, because nobody notices a wind they don't feel." Then say clearly: "A white student whose family is struggling has real headwinds. Race and money are different winds." Don't ask students of color to confirm or add examples.</a:t>
+              <a:t>OPTIONAL CLIP: before the slide, show a minute or two of pack racing from Rapha Gone Racing - Tulsa Tough (youtube.com/watch?v=5nP8J0D0ynA, about 25 minutes, unrated; preview it first). L39ION of Los Angeles is a Black-owned pro team started by brothers Justin and Cory Williams, who grew up on 39th Street in South Los Angeles. Justin started racing at 13, and the team mentors young Black and Latino riders. Watch how the riders tuck in behind each other. In Tulsa they wore a Greenwood Ave. patch honoring the 1921 Tulsa Race Massacre. If you show the clip, trim the talk below to fit. 4 MINUTES. This is the heart of the lesson; say it calmly and plainly. Give two or three everyday examples: being followed less in stores, seeing people who look like you in books and in charge, a name read the same way on a job application (resumes with white-sounding names got about 50 percent more callbacks in one well-known study). Say: "Many white people never notice, because nobody notices a wind they don't feel." Then say clearly: "A white student whose family is struggling has real headwinds. Race and money are different winds." Don't ask students of color to confirm or add examples.</a:t>
             </a:r>
           </a:p>
         </p:txBody>
@@ -4307,6 +4307,22 @@
                 </a:solidFill>
                 <a:latin typeface="Source Serif 4"/>
               </a:rPr>
+              <a:t>Optional: a minute or two of race footage from Rapha's film on L39ION of Los Angeles at Tulsa Tough (youtube.com/watch?v=5nP8J0D0ynA). Preview it first and cue up a stretch of pack racing.</a:t>
+            </a:r>
+          </a:p>
+          <a:p>
+            <a:pPr algn="l">
+              <a:spcAft>
+                <a:spcPts val="675"/>
+              </a:spcAft>
+            </a:pPr>
+            <a:r>
+              <a:rPr sz="1500" b="0" i="0">
+                <a:solidFill>
+                  <a:srgbClr val="1C1B19"/>
+                </a:solidFill>
+                <a:latin typeface="Source Serif 4"/>
+              </a:rPr>
               <a:t>The student page link (last slide) to share after advisory</a:t>
             </a:r>
           </a:p>
@@ -6509,6 +6525,54 @@
                 <a:latin typeface="Source Serif 4"/>
               </a:rPr>
               <a:t>Money, citizenship, English at home, ability, gender, being straight or cisgender, parents who went to college. Name several so the idea is clear, then name race directly so it doesn't get lost.</a:t>
+            </a:r>
+          </a:p>
+          <a:p>
+            <a:pPr algn="l">
+              <a:spcAft>
+                <a:spcPts val="585"/>
+              </a:spcAft>
+            </a:pPr>
+            <a:r>
+              <a:rPr sz="1300" b="0" i="0">
+                <a:solidFill>
+                  <a:srgbClr val="1C1B19"/>
+                </a:solidFill>
+                <a:latin typeface="Source Serif 4"/>
+              </a:rPr>
+              <a:t/>
+            </a:r>
+          </a:p>
+          <a:p>
+            <a:pPr algn="l">
+              <a:spcAft>
+                <a:spcPts val="585"/>
+              </a:spcAft>
+            </a:pPr>
+            <a:r>
+              <a:rPr sz="1500" b="1" i="0">
+                <a:solidFill>
+                  <a:srgbClr val="1C1B19"/>
+                </a:solidFill>
+                <a:latin typeface="Source Serif 4"/>
+              </a:rPr>
+              <a:t>Show who rides at the front.</a:t>
+            </a:r>
+          </a:p>
+          <a:p>
+            <a:pPr algn="l">
+              <a:spcAft>
+                <a:spcPts val="585"/>
+              </a:spcAft>
+            </a:pPr>
+            <a:r>
+              <a:rPr sz="1300" b="0" i="0">
+                <a:solidFill>
+                  <a:srgbClr val="1C1B19"/>
+                </a:solidFill>
+                <a:latin typeface="Source Serif 4"/>
+              </a:rPr>
+              <a:t>If you use the L39ION clip, let it stand as a team at the top of its sport, not as a lesson about hardship. Justin Williams built it to widen who gets to see themselves in cycling.</a:t>
             </a:r>
           </a:p>
           <a:p>

--- a/decks/headwinds-and-tailwinds-lesson-v2.pptx
+++ b/decks/headwinds-and-tailwinds-lesson-v2.pptx
@@ -16,6 +16,7 @@
     <p:sldId id="264" r:id="rId16"/>
     <p:sldId id="265" r:id="rId17"/>
     <p:sldId id="266" r:id="rId18"/>
+    <p:sldId id="267" r:id="rId19"/>
   </p:sldIdLst>
   <p:sldSz cx="12192000" cy="6858000" type="screen4x3"/>
   <p:notesSz cx="6858000" cy="9144000"/>
@@ -652,7 +653,7 @@
           <a:lstStyle/>
           <a:p>
             <a:r>
-              <a:t>3 MINUTES. If you ride, tell the story: into a headwind you feel every pedal stroke; turn around and you fly, and you think you're just strong today. Ask a few students for their version. Land on: we feel the headwind every second, and barely notice the tailwind.</a:t>
+              <a:t>2 MINUTES. If you ride, tell the story: into a headwind you feel every pedal stroke; turn around and you fly, and you think you're just strong today. Ask a few students for their version. Land on: we feel the headwind every second, and barely notice the tailwind.</a:t>
             </a:r>
           </a:p>
         </p:txBody>
@@ -722,7 +723,7 @@
           <a:lstStyle/>
           <a:p>
             <a:r>
-              <a:t>3 MINUTES. Keep it light. Ask: "Whose team got the hardest schedule this year?" Everyone's did. That's the point: we all do this, so noticing tailwinds is a skill, not a confession.</a:t>
+              <a:t>2 MINUTES. Keep it light. Ask: "Whose team got the hardest schedule this year?" Everyone's did. That's the point: we all do this, so noticing tailwinds is a skill, not a confession.</a:t>
             </a:r>
           </a:p>
         </p:txBody>
@@ -792,7 +793,7 @@
           <a:lstStyle/>
           <a:p>
             <a:r>
-              <a:t>4 MINUTES. Private tally marks on the card. Don't collect or ask anyone to share. Then: "Hands up if you made at least one mark." Most hands go up. Say: "Everyone has some tailwinds. Most people have some headwinds too. Both are true at once."</a:t>
+              <a:t>3 MINUTES. Private tally marks on the card. Don't collect or ask anyone to share. Then: "Hands up if you made at least one mark." Most hands go up. Say: "Everyone has some tailwinds. Most people have some headwinds too. Both are true at once."</a:t>
             </a:r>
           </a:p>
         </p:txBody>
@@ -862,7 +863,7 @@
           <a:lstStyle/>
           <a:p>
             <a:r>
-              <a:t>OPTIONAL CLIP: before the slide, show a minute or two of pack racing from Rapha Gone Racing - Tulsa Tough (youtube.com/watch?v=5nP8J0D0ynA, about 25 minutes, unrated; preview it first). L39ION of Los Angeles is a Black-owned pro team started by brothers Justin and Cory Williams, who grew up on 39th Street in South Los Angeles. Justin started racing at 13, and the team mentors young Black and Latino riders. Watch how the riders tuck in behind each other. In Tulsa they wore a Greenwood Ave. patch honoring the 1921 Tulsa Race Massacre. If you show the clip, trim the talk below to fit. 4 MINUTES. This is the heart of the lesson; say it calmly and plainly. Give two or three everyday examples: being followed less in stores, seeing people who look like you in books and in charge, a name read the same way on a job application (resumes with white-sounding names got about 50 percent more callbacks in one well-known study). Say: "Many white people never notice, because nobody notices a wind they don't feel." Then say clearly: "A white student whose family is struggling has real headwinds. Race and money are different winds." Don't ask students of color to confirm or add examples.</a:t>
+              <a:t>5 MINUTES. The clip plays four stretches of the film back to back (about 4.5 minutes). Click Play; it opens full screen and moves through the parts on its own. Close it or press Esc to come back. Before: "Watch where the riders sit, and who's working hardest." L39ION of Los Angeles is a pro team started by brothers Justin and Cory Williams, who grew up on 39th Street in South Los Angeles. Justin started racing at 13, and the team mentors young Black and Latino riders. In Tulsa they wore a Greenwood Ave. patch honoring the 1921 Tulsa Race Massacre. After the clip, give it a few seconds of quiet before you move on. If the clip won't play, the four times are on the slide in the PowerPoint, or open the film on YouTube: 2:35 to 4:54, 7:00 to 7:41, 12:47 to 14:04, 21:29 to 21:47.</a:t>
             </a:r>
           </a:p>
         </p:txBody>
@@ -932,7 +933,7 @@
           <a:lstStyle/>
           <a:p>
             <a:r>
-              <a:t>3 MINUTES. Say: "You didn't make the wind. You aren't to blame for where you started. What you do with your tailwind is up to you." If a student says "but I had it hard too", agree that their headwinds are real, and that headwinds and tailwinds can both be true.</a:t>
+              <a:t>3 MINUTES. This is the heart of the lesson; say it calmly and plainly. Give two or three everyday examples: being followed less in stores, seeing people who look like you in books and in charge, a name read the same way on a job application (resumes with white-sounding names got about 50 percent more callbacks in one well-known study). Say: "Many white people never notice, because nobody notices a wind they don't feel." Then say clearly: "A white student whose family is struggling has real headwinds. Race and money are different winds." Don't ask students of color to confirm or add examples.</a:t>
             </a:r>
           </a:p>
         </p:txBody>
@@ -958,6 +959,76 @@
 </file>
 
 <file path=ppt/notesSlides/notesSlide8.xml><?xml version="1.0" encoding="utf-8"?>
+<p:notes xmlns:a="http://schemas.openxmlformats.org/drawingml/2006/main" xmlns:p="http://schemas.openxmlformats.org/presentationml/2006/main" xmlns:r="http://schemas.openxmlformats.org/officeDocument/2006/relationships">
+  <p:cSld>
+    <p:spTree>
+      <p:nvGrpSpPr>
+        <p:cNvPr id="1" name=""/>
+        <p:cNvGrpSpPr/>
+        <p:nvPr/>
+      </p:nvGrpSpPr>
+      <p:grpSpPr>
+        <a:xfrm>
+          <a:off x="0" y="0"/>
+          <a:ext cx="0" cy="0"/>
+          <a:chOff x="0" y="0"/>
+          <a:chExt cx="0" cy="0"/>
+        </a:xfrm>
+      </p:grpSpPr>
+      <p:sp>
+        <p:nvSpPr>
+          <p:cNvPr id="2" name="Slide Image Placeholder 1"/>
+          <p:cNvSpPr>
+            <a:spLocks noGrp="1"/>
+          </p:cNvSpPr>
+          <p:nvPr>
+            <p:ph type="sldImg" idx="2"/>
+          </p:nvPr>
+        </p:nvSpPr>
+        <p:spPr/>
+      </p:sp>
+      <p:sp>
+        <p:nvSpPr>
+          <p:cNvPr id="3" name="Notes Placeholder 2"/>
+          <p:cNvSpPr>
+            <a:spLocks noGrp="1"/>
+          </p:cNvSpPr>
+          <p:nvPr>
+            <p:ph type="body" idx="3" sz="quarter"/>
+          </p:nvPr>
+        </p:nvSpPr>
+        <p:spPr/>
+        <p:txBody>
+          <a:bodyPr/>
+          <a:lstStyle/>
+          <a:p>
+            <a:r>
+              <a:t>2 MINUTES. Say: "You didn't make the wind. You aren't to blame for where you started. What you do with your tailwind is up to you." If a student says "but I had it hard too", agree that their headwinds are real, and that headwinds and tailwinds can both be true.</a:t>
+            </a:r>
+          </a:p>
+        </p:txBody>
+      </p:sp>
+      <p:sp>
+        <p:nvSpPr>
+          <p:cNvPr id="4" name="Slide Number Placeholder 3"/>
+          <p:cNvSpPr>
+            <a:spLocks noGrp="1"/>
+          </p:cNvSpPr>
+          <p:nvPr>
+            <p:ph type="sldNum" idx="5" sz="quarter"/>
+          </p:nvPr>
+        </p:nvSpPr>
+        <p:spPr/>
+      </p:sp>
+    </p:spTree>
+  </p:cSld>
+  <p:clrMapOvr>
+    <a:masterClrMapping/>
+  </p:clrMapOvr>
+</p:notes>
+</file>
+
+<file path=ppt/notesSlides/notesSlide9.xml><?xml version="1.0" encoding="utf-8"?>
 <p:notes xmlns:a="http://schemas.openxmlformats.org/drawingml/2006/main" xmlns:p="http://schemas.openxmlformats.org/presentationml/2006/main" xmlns:r="http://schemas.openxmlformats.org/officeDocument/2006/relationships">
   <p:cSld>
     <p:spTree>
@@ -4307,7 +4378,7 @@
                 </a:solidFill>
                 <a:latin typeface="Source Serif 4"/>
               </a:rPr>
-              <a:t>Optional: a minute or two of race footage from Rapha's film on L39ION of Los Angeles at Tulsa Tough (youtube.com/watch?v=5nP8J0D0ynA). Preview it first and cue up a stretch of pack racing.</a:t>
+              <a:t>Speakers or a sound system for a 4-minute clip (slide 5). Test it before class: the clip plays from YouTube, so it needs internet and YouTube can't be blocked on your network.</a:t>
             </a:r>
           </a:p>
           <a:p>
@@ -4378,6 +4449,56 @@
                 </a:solidFill>
                 <a:latin typeface="Inter Tight"/>
               </a:rPr>
+              <a:t>2 min   </a:t>
+            </a:r>
+            <a:r>
+              <a:rPr sz="1400" b="0" i="0">
+                <a:solidFill>
+                  <a:srgbClr val="1C1B19"/>
+                </a:solidFill>
+                <a:latin typeface="Source Serif 4"/>
+              </a:rPr>
+              <a:t>Riding into the wind: when has wind helped or fought you?</a:t>
+            </a:r>
+          </a:p>
+          <a:p>
+            <a:pPr algn="l">
+              <a:spcAft>
+                <a:spcPts val="630"/>
+              </a:spcAft>
+            </a:pPr>
+            <a:r>
+              <a:rPr sz="1300" b="1" i="0">
+                <a:solidFill>
+                  <a:srgbClr val="F47B20"/>
+                </a:solidFill>
+                <a:latin typeface="Inter Tight"/>
+              </a:rPr>
+              <a:t>2 min   </a:t>
+            </a:r>
+            <a:r>
+              <a:rPr sz="1400" b="0" i="0">
+                <a:solidFill>
+                  <a:srgbClr val="1C1B19"/>
+                </a:solidFill>
+                <a:latin typeface="Source Serif 4"/>
+              </a:rPr>
+              <a:t>Why we notice headwinds more</a:t>
+            </a:r>
+          </a:p>
+          <a:p>
+            <a:pPr algn="l">
+              <a:spcAft>
+                <a:spcPts val="630"/>
+              </a:spcAft>
+            </a:pPr>
+            <a:r>
+              <a:rPr sz="1300" b="1" i="0">
+                <a:solidFill>
+                  <a:srgbClr val="F47B20"/>
+                </a:solidFill>
+                <a:latin typeface="Inter Tight"/>
+              </a:rPr>
               <a:t>3 min   </a:t>
             </a:r>
             <a:r>
@@ -4387,7 +4508,7 @@
                 </a:solidFill>
                 <a:latin typeface="Source Serif 4"/>
               </a:rPr>
-              <a:t>Riding into the wind: when has wind helped or fought you?</a:t>
+              <a:t>Everyday tailwinds (private tally)</a:t>
             </a:r>
           </a:p>
           <a:p>
@@ -4403,6 +4524,31 @@
                 </a:solidFill>
                 <a:latin typeface="Inter Tight"/>
               </a:rPr>
+              <a:t>5 min   </a:t>
+            </a:r>
+            <a:r>
+              <a:rPr sz="1400" b="0" i="0">
+                <a:solidFill>
+                  <a:srgbClr val="1C1B19"/>
+                </a:solidFill>
+                <a:latin typeface="Source Serif 4"/>
+              </a:rPr>
+              <a:t>Watch: L39ION racing in the pack (4:35 clip)</a:t>
+            </a:r>
+          </a:p>
+          <a:p>
+            <a:pPr algn="l">
+              <a:spcAft>
+                <a:spcPts val="630"/>
+              </a:spcAft>
+            </a:pPr>
+            <a:r>
+              <a:rPr sz="1300" b="1" i="0">
+                <a:solidFill>
+                  <a:srgbClr val="F47B20"/>
+                </a:solidFill>
+                <a:latin typeface="Inter Tight"/>
+              </a:rPr>
               <a:t>3 min   </a:t>
             </a:r>
             <a:r>
@@ -4412,7 +4558,7 @@
                 </a:solidFill>
                 <a:latin typeface="Source Serif 4"/>
               </a:rPr>
-              <a:t>Why we notice headwinds more</a:t>
+              <a:t>Drafting in the pack: race is one of the winds</a:t>
             </a:r>
           </a:p>
           <a:p>
@@ -4428,7 +4574,7 @@
                 </a:solidFill>
                 <a:latin typeface="Inter Tight"/>
               </a:rPr>
-              <a:t>4 min   </a:t>
+              <a:t>2 min   </a:t>
             </a:r>
             <a:r>
               <a:rPr sz="1400" b="0" i="0">
@@ -4437,7 +4583,7 @@
                 </a:solidFill>
                 <a:latin typeface="Source Serif 4"/>
               </a:rPr>
-              <a:t>Everyday tailwinds (private tally)</a:t>
+              <a:t>Blame and responsibility aren't the same</a:t>
             </a:r>
           </a:p>
           <a:p>
@@ -4453,7 +4599,7 @@
                 </a:solidFill>
                 <a:latin typeface="Inter Tight"/>
               </a:rPr>
-              <a:t>4 min   </a:t>
+              <a:t>3 min   </a:t>
             </a:r>
             <a:r>
               <a:rPr sz="1400" b="0" i="0">
@@ -4462,7 +4608,7 @@
                 </a:solidFill>
                 <a:latin typeface="Source Serif 4"/>
               </a:rPr>
-              <a:t>Drafting in the pack: race is one of the winds</a:t>
+              <a:t>Take a turn at the front, privately, and the student page link</a:t>
             </a:r>
           </a:p>
           <a:p>
@@ -4472,14 +4618,37 @@
               </a:spcAft>
             </a:pPr>
             <a:r>
-              <a:rPr sz="1300" b="1" i="0">
-                <a:solidFill>
-                  <a:srgbClr val="F47B20"/>
+              <a:rPr sz="1400" b="0" i="0">
+                <a:solidFill>
+                  <a:srgbClr val="1C1B19"/>
+                </a:solidFill>
+                <a:latin typeface="Source Serif 4"/>
+              </a:rPr>
+              <a:t/>
+            </a:r>
+          </a:p>
+          <a:p>
+            <a:pPr algn="l">
+              <a:spcAft>
+                <a:spcPts val="630"/>
+              </a:spcAft>
+            </a:pPr>
+            <a:r>
+              <a:rPr sz="1100" b="1" i="0">
+                <a:solidFill>
+                  <a:srgbClr val="0B2D5B"/>
                 </a:solidFill>
                 <a:latin typeface="Inter Tight"/>
               </a:rPr>
-              <a:t>3 min   </a:t>
-            </a:r>
+              <a:t>SHORT ON TIME (10-MINUTE CHECK-IN)</a:t>
+            </a:r>
+          </a:p>
+          <a:p>
+            <a:pPr algn="l">
+              <a:spcAft>
+                <a:spcPts val="630"/>
+              </a:spcAft>
+            </a:pPr>
             <a:r>
               <a:rPr sz="1400" b="0" i="0">
                 <a:solidFill>
@@ -4487,80 +4656,7 @@
                 </a:solidFill>
                 <a:latin typeface="Source Serif 4"/>
               </a:rPr>
-              <a:t>Blame and responsibility aren't the same</a:t>
-            </a:r>
-          </a:p>
-          <a:p>
-            <a:pPr algn="l">
-              <a:spcAft>
-                <a:spcPts val="630"/>
-              </a:spcAft>
-            </a:pPr>
-            <a:r>
-              <a:rPr sz="1300" b="1" i="0">
-                <a:solidFill>
-                  <a:srgbClr val="F47B20"/>
-                </a:solidFill>
-                <a:latin typeface="Inter Tight"/>
-              </a:rPr>
-              <a:t>3 min   </a:t>
-            </a:r>
-            <a:r>
-              <a:rPr sz="1400" b="0" i="0">
-                <a:solidFill>
-                  <a:srgbClr val="1C1B19"/>
-                </a:solidFill>
-                <a:latin typeface="Source Serif 4"/>
-              </a:rPr>
-              <a:t>Take a turn at the front, privately, and the student page link</a:t>
-            </a:r>
-          </a:p>
-          <a:p>
-            <a:pPr algn="l">
-              <a:spcAft>
-                <a:spcPts val="630"/>
-              </a:spcAft>
-            </a:pPr>
-            <a:r>
-              <a:rPr sz="1400" b="0" i="0">
-                <a:solidFill>
-                  <a:srgbClr val="1C1B19"/>
-                </a:solidFill>
-                <a:latin typeface="Source Serif 4"/>
-              </a:rPr>
-              <a:t/>
-            </a:r>
-          </a:p>
-          <a:p>
-            <a:pPr algn="l">
-              <a:spcAft>
-                <a:spcPts val="630"/>
-              </a:spcAft>
-            </a:pPr>
-            <a:r>
-              <a:rPr sz="1100" b="1" i="0">
-                <a:solidFill>
-                  <a:srgbClr val="0B2D5B"/>
-                </a:solidFill>
-                <a:latin typeface="Inter Tight"/>
-              </a:rPr>
-              <a:t>SHORT ON TIME (10-MINUTE CHECK-IN)</a:t>
-            </a:r>
-          </a:p>
-          <a:p>
-            <a:pPr algn="l">
-              <a:spcAft>
-                <a:spcPts val="630"/>
-              </a:spcAft>
-            </a:pPr>
-            <a:r>
-              <a:rPr sz="1400" b="0" i="0">
-                <a:solidFill>
-                  <a:srgbClr val="1C1B19"/>
-                </a:solidFill>
-                <a:latin typeface="Source Serif 4"/>
-              </a:rPr>
-              <a:t>Riding into the wind (2), drafting in the pack (4), take a turn at the front, privately (3), share the link (1).</a:t>
+              <a:t>Riding into the wind (2), drafting in the pack (4), take a turn at the front, privately (3), share the link (1). Skip the clip, or send it to students afterward.</a:t>
             </a:r>
           </a:p>
         </p:txBody>
@@ -4669,7 +4765,7 @@
                 </a:solidFill>
                 <a:latin typeface="Inter Tight"/>
               </a:rPr>
-              <a:t>TWO WORDS</a:t>
+              <a:t>DRAFTING IN THE PACK</a:t>
             </a:r>
           </a:p>
         </p:txBody>
@@ -4721,8 +4817,8 @@
         </p:nvSpPr>
         <p:spPr>
           <a:xfrm>
-            <a:off x="822960" y="1005840"/>
-            <a:ext cx="10515600" cy="914400"/>
+            <a:off x="822960" y="1463040"/>
+            <a:ext cx="10515600" cy="3291840"/>
           </a:xfrm>
           <a:prstGeom prst="rect">
             <a:avLst/>
@@ -4730,84 +4826,38 @@
           <a:noFill/>
         </p:spPr>
         <p:txBody>
-          <a:bodyPr wrap="square" anchor="t" lIns="0" rIns="0" tIns="0" bIns="0">
+          <a:bodyPr wrap="square" anchor="ctr" lIns="0" rIns="0" tIns="0" bIns="0">
             <a:spAutoFit/>
           </a:bodyPr>
           <a:lstStyle/>
           <a:p>
             <a:pPr algn="l">
               <a:spcAft>
-                <a:spcPts val="1530"/>
-              </a:spcAft>
-            </a:pPr>
-            <a:r>
-              <a:rPr sz="3400" b="1" i="0">
+                <a:spcPts val="2070"/>
+              </a:spcAft>
+            </a:pPr>
+            <a:r>
+              <a:rPr sz="4600" b="1" i="0">
                 <a:solidFill>
                   <a:srgbClr val="1C1B19"/>
                 </a:solidFill>
                 <a:latin typeface="Source Serif 4"/>
               </a:rPr>
-              <a:t>Blame and responsibility aren't the same.</a:t>
-            </a:r>
-          </a:p>
-        </p:txBody>
-      </p:sp>
-      <p:sp>
-        <p:nvSpPr>
-          <p:cNvPr id="6" name="Rectangle 5"/>
-          <p:cNvSpPr/>
-          <p:nvPr/>
-        </p:nvSpPr>
-        <p:spPr>
-          <a:xfrm>
-            <a:off x="822960" y="2103120"/>
-            <a:ext cx="5120640" cy="3931920"/>
-          </a:xfrm>
-          <a:prstGeom prst="rect">
-            <a:avLst/>
-          </a:prstGeom>
-          <a:solidFill>
-            <a:srgbClr val="FFFFFF"/>
-          </a:solidFill>
-          <a:ln w="15875">
-            <a:solidFill>
-              <a:srgbClr val="D8D2C6"/>
-            </a:solidFill>
-          </a:ln>
-          <a:effectLst/>
-        </p:spPr>
-        <p:style>
-          <a:lnRef idx="1">
-            <a:schemeClr val="accent1"/>
-          </a:lnRef>
-          <a:fillRef idx="3">
-            <a:schemeClr val="accent1"/>
-          </a:fillRef>
-          <a:effectRef idx="2">
-            <a:schemeClr val="accent1"/>
-          </a:effectRef>
-          <a:fontRef idx="minor">
-            <a:schemeClr val="lt1"/>
-          </a:fontRef>
-        </p:style>
-        <p:txBody>
-          <a:bodyPr rtlCol="0" anchor="ctr"/>
-          <a:lstStyle/>
-          <a:p>
-            <a:pPr algn="ctr"/>
-          </a:p>
-        </p:txBody>
-      </p:sp>
-      <p:sp>
-        <p:nvSpPr>
-          <p:cNvPr id="7" name="TextBox 6"/>
+              <a:t>Ride close behind someone and you use about a third less effort. Deep in the pack, you barely feel the wind.</a:t>
+            </a:r>
+          </a:p>
+        </p:txBody>
+      </p:sp>
+      <p:sp>
+        <p:nvSpPr>
+          <p:cNvPr id="6" name="TextBox 5"/>
           <p:cNvSpPr txBox="1"/>
           <p:nvPr/>
         </p:nvSpPr>
         <p:spPr>
           <a:xfrm>
-            <a:off x="1097280" y="2286000"/>
-            <a:ext cx="4572000" cy="457200"/>
+            <a:off x="822960" y="4846320"/>
+            <a:ext cx="10515600" cy="1097280"/>
           </a:xfrm>
           <a:prstGeom prst="rect">
             <a:avLst/>
@@ -4822,276 +4872,17 @@
           <a:p>
             <a:pPr algn="l">
               <a:spcAft>
-                <a:spcPts val="585"/>
-              </a:spcAft>
-            </a:pPr>
-            <a:r>
-              <a:rPr sz="1300" b="1" i="0">
-                <a:solidFill>
-                  <a:srgbClr val="0B2D5B"/>
-                </a:solidFill>
-                <a:latin typeface="Inter Tight"/>
-              </a:rPr>
-              <a:t>BLAME</a:t>
-            </a:r>
-          </a:p>
-        </p:txBody>
-      </p:sp>
-      <p:sp>
-        <p:nvSpPr>
-          <p:cNvPr id="8" name="TextBox 7"/>
-          <p:cNvSpPr txBox="1"/>
-          <p:nvPr/>
-        </p:nvSpPr>
-        <p:spPr>
-          <a:xfrm>
-            <a:off x="1097280" y="2788920"/>
-            <a:ext cx="4572000" cy="3108960"/>
-          </a:xfrm>
-          <a:prstGeom prst="rect">
-            <a:avLst/>
-          </a:prstGeom>
-          <a:noFill/>
-        </p:spPr>
-        <p:txBody>
-          <a:bodyPr wrap="square" anchor="t" lIns="0" rIns="0" tIns="0" bIns="0">
-            <a:spAutoFit/>
-          </a:bodyPr>
-          <a:lstStyle/>
-          <a:p>
-            <a:pPr algn="l">
-              <a:spcAft>
-                <a:spcPts val="855"/>
-              </a:spcAft>
-            </a:pPr>
-            <a:r>
-              <a:rPr sz="1900" b="0" i="0">
-                <a:solidFill>
-                  <a:srgbClr val="1C1B19"/>
-                </a:solidFill>
-                <a:latin typeface="Source Serif 4"/>
-              </a:rPr>
-              <a:t>About the past</a:t>
-            </a:r>
-          </a:p>
-          <a:p>
-            <a:pPr algn="l">
-              <a:spcAft>
-                <a:spcPts val="855"/>
-              </a:spcAft>
-            </a:pPr>
-            <a:r>
-              <a:rPr sz="1900" b="0" i="0">
-                <a:solidFill>
-                  <a:srgbClr val="1C1B19"/>
-                </a:solidFill>
-                <a:latin typeface="Source Serif 4"/>
-              </a:rPr>
-              <a:t>Something you did wrong</a:t>
-            </a:r>
-          </a:p>
-          <a:p>
-            <a:pPr algn="l">
-              <a:spcAft>
-                <a:spcPts val="855"/>
-              </a:spcAft>
-            </a:pPr>
-            <a:r>
-              <a:rPr sz="1900" b="0" i="0">
-                <a:solidFill>
-                  <a:srgbClr val="1C1B19"/>
-                </a:solidFill>
-                <a:latin typeface="Source Serif 4"/>
-              </a:rPr>
-              <a:t>Leads to guilt or defending yourself</a:t>
-            </a:r>
-          </a:p>
-          <a:p>
-            <a:pPr algn="l">
-              <a:spcAft>
-                <a:spcPts val="855"/>
-              </a:spcAft>
-            </a:pPr>
-            <a:r>
-              <a:rPr sz="1900" b="0" i="0">
-                <a:solidFill>
-                  <a:srgbClr val="1C1B19"/>
-                </a:solidFill>
-                <a:latin typeface="Source Serif 4"/>
-              </a:rPr>
-              <a:t>Nobody here is asking for it</a:t>
-            </a:r>
-          </a:p>
-        </p:txBody>
-      </p:sp>
-      <p:sp>
-        <p:nvSpPr>
-          <p:cNvPr id="9" name="Rectangle 8"/>
-          <p:cNvSpPr/>
-          <p:nvPr/>
-        </p:nvSpPr>
-        <p:spPr>
-          <a:xfrm>
-            <a:off x="6309360" y="2103120"/>
-            <a:ext cx="5120640" cy="3931920"/>
-          </a:xfrm>
-          <a:prstGeom prst="rect">
-            <a:avLst/>
-          </a:prstGeom>
-          <a:solidFill>
-            <a:srgbClr val="FFFFFF"/>
-          </a:solidFill>
-          <a:ln w="15875">
-            <a:solidFill>
-              <a:srgbClr val="D8D2C6"/>
-            </a:solidFill>
-          </a:ln>
-          <a:effectLst/>
-        </p:spPr>
-        <p:style>
-          <a:lnRef idx="1">
-            <a:schemeClr val="accent1"/>
-          </a:lnRef>
-          <a:fillRef idx="3">
-            <a:schemeClr val="accent1"/>
-          </a:fillRef>
-          <a:effectRef idx="2">
-            <a:schemeClr val="accent1"/>
-          </a:effectRef>
-          <a:fontRef idx="minor">
-            <a:schemeClr val="lt1"/>
-          </a:fontRef>
-        </p:style>
-        <p:txBody>
-          <a:bodyPr rtlCol="0" anchor="ctr"/>
-          <a:lstStyle/>
-          <a:p>
-            <a:pPr algn="ctr"/>
-          </a:p>
-        </p:txBody>
-      </p:sp>
-      <p:sp>
-        <p:nvSpPr>
-          <p:cNvPr id="10" name="TextBox 9"/>
-          <p:cNvSpPr txBox="1"/>
-          <p:nvPr/>
-        </p:nvSpPr>
-        <p:spPr>
-          <a:xfrm>
-            <a:off x="6583680" y="2286000"/>
-            <a:ext cx="4572000" cy="457200"/>
-          </a:xfrm>
-          <a:prstGeom prst="rect">
-            <a:avLst/>
-          </a:prstGeom>
-          <a:noFill/>
-        </p:spPr>
-        <p:txBody>
-          <a:bodyPr wrap="square" anchor="t" lIns="0" rIns="0" tIns="0" bIns="0">
-            <a:spAutoFit/>
-          </a:bodyPr>
-          <a:lstStyle/>
-          <a:p>
-            <a:pPr algn="l">
-              <a:spcAft>
-                <a:spcPts val="585"/>
-              </a:spcAft>
-            </a:pPr>
-            <a:r>
-              <a:rPr sz="1300" b="1" i="0">
-                <a:solidFill>
-                  <a:srgbClr val="0B2D5B"/>
-                </a:solidFill>
-                <a:latin typeface="Inter Tight"/>
-              </a:rPr>
-              <a:t>RESPONSIBILITY</a:t>
-            </a:r>
-          </a:p>
-        </p:txBody>
-      </p:sp>
-      <p:sp>
-        <p:nvSpPr>
-          <p:cNvPr id="11" name="TextBox 10"/>
-          <p:cNvSpPr txBox="1"/>
-          <p:nvPr/>
-        </p:nvSpPr>
-        <p:spPr>
-          <a:xfrm>
-            <a:off x="6583680" y="2788920"/>
-            <a:ext cx="4572000" cy="3108960"/>
-          </a:xfrm>
-          <a:prstGeom prst="rect">
-            <a:avLst/>
-          </a:prstGeom>
-          <a:noFill/>
-        </p:spPr>
-        <p:txBody>
-          <a:bodyPr wrap="square" anchor="t" lIns="0" rIns="0" tIns="0" bIns="0">
-            <a:spAutoFit/>
-          </a:bodyPr>
-          <a:lstStyle/>
-          <a:p>
-            <a:pPr algn="l">
-              <a:spcAft>
-                <a:spcPts val="855"/>
-              </a:spcAft>
-            </a:pPr>
-            <a:r>
-              <a:rPr sz="1900" b="0" i="0">
-                <a:solidFill>
-                  <a:srgbClr val="1C1B19"/>
-                </a:solidFill>
-                <a:latin typeface="Source Serif 4"/>
-              </a:rPr>
-              <a:t>About what's next</a:t>
-            </a:r>
-          </a:p>
-          <a:p>
-            <a:pPr algn="l">
-              <a:spcAft>
-                <a:spcPts val="855"/>
-              </a:spcAft>
-            </a:pPr>
-            <a:r>
-              <a:rPr sz="1900" b="0" i="0">
-                <a:solidFill>
-                  <a:srgbClr val="1C1B19"/>
-                </a:solidFill>
-                <a:latin typeface="Source Serif 4"/>
-              </a:rPr>
-              <a:t>Something you choose</a:t>
-            </a:r>
-          </a:p>
-          <a:p>
-            <a:pPr algn="l">
-              <a:spcAft>
-                <a:spcPts val="855"/>
-              </a:spcAft>
-            </a:pPr>
-            <a:r>
-              <a:rPr sz="1900" b="0" i="0">
-                <a:solidFill>
-                  <a:srgbClr val="1C1B19"/>
-                </a:solidFill>
-                <a:latin typeface="Source Serif 4"/>
-              </a:rPr>
-              <a:t>Leads to action</a:t>
-            </a:r>
-          </a:p>
-          <a:p>
-            <a:pPr algn="l">
-              <a:spcAft>
-                <a:spcPts val="855"/>
-              </a:spcAft>
-            </a:pPr>
-            <a:r>
-              <a:rPr sz="1900" b="0" i="0">
-                <a:solidFill>
-                  <a:srgbClr val="1C1B19"/>
-                </a:solidFill>
-                <a:latin typeface="Source Serif 4"/>
-              </a:rPr>
-              <a:t>Yours to decide</a:t>
+                <a:spcPts val="990"/>
+              </a:spcAft>
+            </a:pPr>
+            <a:r>
+              <a:rPr sz="2200" b="0" i="1">
+                <a:solidFill>
+                  <a:srgbClr val="5D5A54"/>
+                </a:solidFill>
+                <a:latin typeface="Source Serif 4"/>
+              </a:rPr>
+              <a:t>In the U.S., being white often works like riding in the pack. It doesn't make life easy. It means your skin isn't one of the things making it harder.</a:t>
             </a:r>
           </a:p>
         </p:txBody>
@@ -5200,6 +4991,537 @@
                 </a:solidFill>
                 <a:latin typeface="Inter Tight"/>
               </a:rPr>
+              <a:t>TWO WORDS</a:t>
+            </a:r>
+          </a:p>
+        </p:txBody>
+      </p:sp>
+      <p:sp>
+        <p:nvSpPr>
+          <p:cNvPr id="4" name="TextBox 3"/>
+          <p:cNvSpPr txBox="1"/>
+          <p:nvPr/>
+        </p:nvSpPr>
+        <p:spPr>
+          <a:xfrm>
+            <a:off x="8229600" y="6400800"/>
+            <a:ext cx="3410712" cy="274320"/>
+          </a:xfrm>
+          <a:prstGeom prst="rect">
+            <a:avLst/>
+          </a:prstGeom>
+          <a:noFill/>
+        </p:spPr>
+        <p:txBody>
+          <a:bodyPr wrap="square" anchor="t" lIns="0" rIns="0" tIns="0" bIns="0">
+            <a:spAutoFit/>
+          </a:bodyPr>
+          <a:lstStyle/>
+          <a:p>
+            <a:pPr algn="r">
+              <a:spcAft>
+                <a:spcPts val="450"/>
+              </a:spcAft>
+            </a:pPr>
+            <a:r>
+              <a:rPr sz="1000" b="0" i="0">
+                <a:solidFill>
+                  <a:srgbClr val="5D5A54"/>
+                </a:solidFill>
+                <a:latin typeface="Inter Tight"/>
+              </a:rPr>
+              <a:t>Beaver Counseling</a:t>
+            </a:r>
+          </a:p>
+        </p:txBody>
+      </p:sp>
+      <p:sp>
+        <p:nvSpPr>
+          <p:cNvPr id="5" name="TextBox 4"/>
+          <p:cNvSpPr txBox="1"/>
+          <p:nvPr/>
+        </p:nvSpPr>
+        <p:spPr>
+          <a:xfrm>
+            <a:off x="822960" y="1005840"/>
+            <a:ext cx="10515600" cy="914400"/>
+          </a:xfrm>
+          <a:prstGeom prst="rect">
+            <a:avLst/>
+          </a:prstGeom>
+          <a:noFill/>
+        </p:spPr>
+        <p:txBody>
+          <a:bodyPr wrap="square" anchor="t" lIns="0" rIns="0" tIns="0" bIns="0">
+            <a:spAutoFit/>
+          </a:bodyPr>
+          <a:lstStyle/>
+          <a:p>
+            <a:pPr algn="l">
+              <a:spcAft>
+                <a:spcPts val="1530"/>
+              </a:spcAft>
+            </a:pPr>
+            <a:r>
+              <a:rPr sz="3400" b="1" i="0">
+                <a:solidFill>
+                  <a:srgbClr val="1C1B19"/>
+                </a:solidFill>
+                <a:latin typeface="Source Serif 4"/>
+              </a:rPr>
+              <a:t>Blame and responsibility aren't the same.</a:t>
+            </a:r>
+          </a:p>
+        </p:txBody>
+      </p:sp>
+      <p:sp>
+        <p:nvSpPr>
+          <p:cNvPr id="6" name="Rectangle 5"/>
+          <p:cNvSpPr/>
+          <p:nvPr/>
+        </p:nvSpPr>
+        <p:spPr>
+          <a:xfrm>
+            <a:off x="822960" y="2103120"/>
+            <a:ext cx="5120640" cy="3931920"/>
+          </a:xfrm>
+          <a:prstGeom prst="rect">
+            <a:avLst/>
+          </a:prstGeom>
+          <a:solidFill>
+            <a:srgbClr val="FFFFFF"/>
+          </a:solidFill>
+          <a:ln w="15875">
+            <a:solidFill>
+              <a:srgbClr val="D8D2C6"/>
+            </a:solidFill>
+          </a:ln>
+          <a:effectLst/>
+        </p:spPr>
+        <p:style>
+          <a:lnRef idx="1">
+            <a:schemeClr val="accent1"/>
+          </a:lnRef>
+          <a:fillRef idx="3">
+            <a:schemeClr val="accent1"/>
+          </a:fillRef>
+          <a:effectRef idx="2">
+            <a:schemeClr val="accent1"/>
+          </a:effectRef>
+          <a:fontRef idx="minor">
+            <a:schemeClr val="lt1"/>
+          </a:fontRef>
+        </p:style>
+        <p:txBody>
+          <a:bodyPr rtlCol="0" anchor="ctr"/>
+          <a:lstStyle/>
+          <a:p>
+            <a:pPr algn="ctr"/>
+          </a:p>
+        </p:txBody>
+      </p:sp>
+      <p:sp>
+        <p:nvSpPr>
+          <p:cNvPr id="7" name="TextBox 6"/>
+          <p:cNvSpPr txBox="1"/>
+          <p:nvPr/>
+        </p:nvSpPr>
+        <p:spPr>
+          <a:xfrm>
+            <a:off x="1097280" y="2286000"/>
+            <a:ext cx="4572000" cy="457200"/>
+          </a:xfrm>
+          <a:prstGeom prst="rect">
+            <a:avLst/>
+          </a:prstGeom>
+          <a:noFill/>
+        </p:spPr>
+        <p:txBody>
+          <a:bodyPr wrap="square" anchor="t" lIns="0" rIns="0" tIns="0" bIns="0">
+            <a:spAutoFit/>
+          </a:bodyPr>
+          <a:lstStyle/>
+          <a:p>
+            <a:pPr algn="l">
+              <a:spcAft>
+                <a:spcPts val="585"/>
+              </a:spcAft>
+            </a:pPr>
+            <a:r>
+              <a:rPr sz="1300" b="1" i="0">
+                <a:solidFill>
+                  <a:srgbClr val="0B2D5B"/>
+                </a:solidFill>
+                <a:latin typeface="Inter Tight"/>
+              </a:rPr>
+              <a:t>BLAME</a:t>
+            </a:r>
+          </a:p>
+        </p:txBody>
+      </p:sp>
+      <p:sp>
+        <p:nvSpPr>
+          <p:cNvPr id="8" name="TextBox 7"/>
+          <p:cNvSpPr txBox="1"/>
+          <p:nvPr/>
+        </p:nvSpPr>
+        <p:spPr>
+          <a:xfrm>
+            <a:off x="1097280" y="2788920"/>
+            <a:ext cx="4572000" cy="3108960"/>
+          </a:xfrm>
+          <a:prstGeom prst="rect">
+            <a:avLst/>
+          </a:prstGeom>
+          <a:noFill/>
+        </p:spPr>
+        <p:txBody>
+          <a:bodyPr wrap="square" anchor="t" lIns="0" rIns="0" tIns="0" bIns="0">
+            <a:spAutoFit/>
+          </a:bodyPr>
+          <a:lstStyle/>
+          <a:p>
+            <a:pPr algn="l">
+              <a:spcAft>
+                <a:spcPts val="855"/>
+              </a:spcAft>
+            </a:pPr>
+            <a:r>
+              <a:rPr sz="1900" b="0" i="0">
+                <a:solidFill>
+                  <a:srgbClr val="1C1B19"/>
+                </a:solidFill>
+                <a:latin typeface="Source Serif 4"/>
+              </a:rPr>
+              <a:t>About the past</a:t>
+            </a:r>
+          </a:p>
+          <a:p>
+            <a:pPr algn="l">
+              <a:spcAft>
+                <a:spcPts val="855"/>
+              </a:spcAft>
+            </a:pPr>
+            <a:r>
+              <a:rPr sz="1900" b="0" i="0">
+                <a:solidFill>
+                  <a:srgbClr val="1C1B19"/>
+                </a:solidFill>
+                <a:latin typeface="Source Serif 4"/>
+              </a:rPr>
+              <a:t>Something you did wrong</a:t>
+            </a:r>
+          </a:p>
+          <a:p>
+            <a:pPr algn="l">
+              <a:spcAft>
+                <a:spcPts val="855"/>
+              </a:spcAft>
+            </a:pPr>
+            <a:r>
+              <a:rPr sz="1900" b="0" i="0">
+                <a:solidFill>
+                  <a:srgbClr val="1C1B19"/>
+                </a:solidFill>
+                <a:latin typeface="Source Serif 4"/>
+              </a:rPr>
+              <a:t>Leads to guilt or defending yourself</a:t>
+            </a:r>
+          </a:p>
+          <a:p>
+            <a:pPr algn="l">
+              <a:spcAft>
+                <a:spcPts val="855"/>
+              </a:spcAft>
+            </a:pPr>
+            <a:r>
+              <a:rPr sz="1900" b="0" i="0">
+                <a:solidFill>
+                  <a:srgbClr val="1C1B19"/>
+                </a:solidFill>
+                <a:latin typeface="Source Serif 4"/>
+              </a:rPr>
+              <a:t>Nobody here is asking for it</a:t>
+            </a:r>
+          </a:p>
+        </p:txBody>
+      </p:sp>
+      <p:sp>
+        <p:nvSpPr>
+          <p:cNvPr id="9" name="Rectangle 8"/>
+          <p:cNvSpPr/>
+          <p:nvPr/>
+        </p:nvSpPr>
+        <p:spPr>
+          <a:xfrm>
+            <a:off x="6309360" y="2103120"/>
+            <a:ext cx="5120640" cy="3931920"/>
+          </a:xfrm>
+          <a:prstGeom prst="rect">
+            <a:avLst/>
+          </a:prstGeom>
+          <a:solidFill>
+            <a:srgbClr val="FFFFFF"/>
+          </a:solidFill>
+          <a:ln w="15875">
+            <a:solidFill>
+              <a:srgbClr val="D8D2C6"/>
+            </a:solidFill>
+          </a:ln>
+          <a:effectLst/>
+        </p:spPr>
+        <p:style>
+          <a:lnRef idx="1">
+            <a:schemeClr val="accent1"/>
+          </a:lnRef>
+          <a:fillRef idx="3">
+            <a:schemeClr val="accent1"/>
+          </a:fillRef>
+          <a:effectRef idx="2">
+            <a:schemeClr val="accent1"/>
+          </a:effectRef>
+          <a:fontRef idx="minor">
+            <a:schemeClr val="lt1"/>
+          </a:fontRef>
+        </p:style>
+        <p:txBody>
+          <a:bodyPr rtlCol="0" anchor="ctr"/>
+          <a:lstStyle/>
+          <a:p>
+            <a:pPr algn="ctr"/>
+          </a:p>
+        </p:txBody>
+      </p:sp>
+      <p:sp>
+        <p:nvSpPr>
+          <p:cNvPr id="10" name="TextBox 9"/>
+          <p:cNvSpPr txBox="1"/>
+          <p:nvPr/>
+        </p:nvSpPr>
+        <p:spPr>
+          <a:xfrm>
+            <a:off x="6583680" y="2286000"/>
+            <a:ext cx="4572000" cy="457200"/>
+          </a:xfrm>
+          <a:prstGeom prst="rect">
+            <a:avLst/>
+          </a:prstGeom>
+          <a:noFill/>
+        </p:spPr>
+        <p:txBody>
+          <a:bodyPr wrap="square" anchor="t" lIns="0" rIns="0" tIns="0" bIns="0">
+            <a:spAutoFit/>
+          </a:bodyPr>
+          <a:lstStyle/>
+          <a:p>
+            <a:pPr algn="l">
+              <a:spcAft>
+                <a:spcPts val="585"/>
+              </a:spcAft>
+            </a:pPr>
+            <a:r>
+              <a:rPr sz="1300" b="1" i="0">
+                <a:solidFill>
+                  <a:srgbClr val="0B2D5B"/>
+                </a:solidFill>
+                <a:latin typeface="Inter Tight"/>
+              </a:rPr>
+              <a:t>RESPONSIBILITY</a:t>
+            </a:r>
+          </a:p>
+        </p:txBody>
+      </p:sp>
+      <p:sp>
+        <p:nvSpPr>
+          <p:cNvPr id="11" name="TextBox 10"/>
+          <p:cNvSpPr txBox="1"/>
+          <p:nvPr/>
+        </p:nvSpPr>
+        <p:spPr>
+          <a:xfrm>
+            <a:off x="6583680" y="2788920"/>
+            <a:ext cx="4572000" cy="3108960"/>
+          </a:xfrm>
+          <a:prstGeom prst="rect">
+            <a:avLst/>
+          </a:prstGeom>
+          <a:noFill/>
+        </p:spPr>
+        <p:txBody>
+          <a:bodyPr wrap="square" anchor="t" lIns="0" rIns="0" tIns="0" bIns="0">
+            <a:spAutoFit/>
+          </a:bodyPr>
+          <a:lstStyle/>
+          <a:p>
+            <a:pPr algn="l">
+              <a:spcAft>
+                <a:spcPts val="855"/>
+              </a:spcAft>
+            </a:pPr>
+            <a:r>
+              <a:rPr sz="1900" b="0" i="0">
+                <a:solidFill>
+                  <a:srgbClr val="1C1B19"/>
+                </a:solidFill>
+                <a:latin typeface="Source Serif 4"/>
+              </a:rPr>
+              <a:t>About what's next</a:t>
+            </a:r>
+          </a:p>
+          <a:p>
+            <a:pPr algn="l">
+              <a:spcAft>
+                <a:spcPts val="855"/>
+              </a:spcAft>
+            </a:pPr>
+            <a:r>
+              <a:rPr sz="1900" b="0" i="0">
+                <a:solidFill>
+                  <a:srgbClr val="1C1B19"/>
+                </a:solidFill>
+                <a:latin typeface="Source Serif 4"/>
+              </a:rPr>
+              <a:t>Something you choose</a:t>
+            </a:r>
+          </a:p>
+          <a:p>
+            <a:pPr algn="l">
+              <a:spcAft>
+                <a:spcPts val="855"/>
+              </a:spcAft>
+            </a:pPr>
+            <a:r>
+              <a:rPr sz="1900" b="0" i="0">
+                <a:solidFill>
+                  <a:srgbClr val="1C1B19"/>
+                </a:solidFill>
+                <a:latin typeface="Source Serif 4"/>
+              </a:rPr>
+              <a:t>Leads to action</a:t>
+            </a:r>
+          </a:p>
+          <a:p>
+            <a:pPr algn="l">
+              <a:spcAft>
+                <a:spcPts val="855"/>
+              </a:spcAft>
+            </a:pPr>
+            <a:r>
+              <a:rPr sz="1900" b="0" i="0">
+                <a:solidFill>
+                  <a:srgbClr val="1C1B19"/>
+                </a:solidFill>
+                <a:latin typeface="Source Serif 4"/>
+              </a:rPr>
+              <a:t>Yours to decide</a:t>
+            </a:r>
+          </a:p>
+        </p:txBody>
+      </p:sp>
+    </p:spTree>
+  </p:cSld>
+  <p:clrMapOvr>
+    <a:masterClrMapping/>
+  </p:clrMapOvr>
+</p:sld>
+</file>
+
+<file path=ppt/slides/slide12.xml><?xml version="1.0" encoding="utf-8"?>
+<p:sld xmlns:a="http://schemas.openxmlformats.org/drawingml/2006/main" xmlns:p="http://schemas.openxmlformats.org/presentationml/2006/main" xmlns:r="http://schemas.openxmlformats.org/officeDocument/2006/relationships">
+  <p:cSld>
+    <p:bg>
+      <p:bgPr>
+        <a:solidFill>
+          <a:srgbClr val="F7F4EE"/>
+        </a:solidFill>
+        <a:effectLst/>
+      </p:bgPr>
+    </p:bg>
+    <p:spTree>
+      <p:nvGrpSpPr>
+        <p:cNvPr id="1" name=""/>
+        <p:cNvGrpSpPr/>
+        <p:nvPr/>
+      </p:nvGrpSpPr>
+      <p:grpSpPr/>
+      <p:sp>
+        <p:nvSpPr>
+          <p:cNvPr id="2" name="Rectangle 1"/>
+          <p:cNvSpPr/>
+          <p:nvPr/>
+        </p:nvSpPr>
+        <p:spPr>
+          <a:xfrm>
+            <a:off x="548640" y="502920"/>
+            <a:ext cx="457200" cy="54864"/>
+          </a:xfrm>
+          <a:prstGeom prst="rect">
+            <a:avLst/>
+          </a:prstGeom>
+          <a:solidFill>
+            <a:srgbClr val="F47B20"/>
+          </a:solidFill>
+          <a:ln>
+            <a:noFill/>
+          </a:ln>
+          <a:effectLst/>
+        </p:spPr>
+        <p:style>
+          <a:lnRef idx="1">
+            <a:schemeClr val="accent1"/>
+          </a:lnRef>
+          <a:fillRef idx="3">
+            <a:schemeClr val="accent1"/>
+          </a:fillRef>
+          <a:effectRef idx="2">
+            <a:schemeClr val="accent1"/>
+          </a:effectRef>
+          <a:fontRef idx="minor">
+            <a:schemeClr val="lt1"/>
+          </a:fontRef>
+        </p:style>
+        <p:txBody>
+          <a:bodyPr rtlCol="0" anchor="ctr"/>
+          <a:lstStyle/>
+          <a:p>
+            <a:pPr algn="ctr"/>
+          </a:p>
+        </p:txBody>
+      </p:sp>
+      <p:sp>
+        <p:nvSpPr>
+          <p:cNvPr id="3" name="TextBox 2"/>
+          <p:cNvSpPr txBox="1"/>
+          <p:nvPr/>
+        </p:nvSpPr>
+        <p:spPr>
+          <a:xfrm>
+            <a:off x="1143000" y="393192"/>
+            <a:ext cx="8229600" cy="274320"/>
+          </a:xfrm>
+          <a:prstGeom prst="rect">
+            <a:avLst/>
+          </a:prstGeom>
+          <a:noFill/>
+        </p:spPr>
+        <p:txBody>
+          <a:bodyPr wrap="square" anchor="t" lIns="0" rIns="0" tIns="0" bIns="0">
+            <a:spAutoFit/>
+          </a:bodyPr>
+          <a:lstStyle/>
+          <a:p>
+            <a:pPr algn="l">
+              <a:spcAft>
+                <a:spcPts val="540"/>
+              </a:spcAft>
+            </a:pPr>
+            <a:r>
+              <a:rPr sz="1200" b="1" i="0">
+                <a:solidFill>
+                  <a:srgbClr val="5D5A54"/>
+                </a:solidFill>
+                <a:latin typeface="Inter Tight"/>
+              </a:rPr>
               <a:t>BEFORE YOU GO</a:t>
             </a:r>
           </a:p>
@@ -8669,7 +8991,7 @@
                 </a:solidFill>
                 <a:latin typeface="Inter Tight"/>
               </a:rPr>
-              <a:t>DRAFTING IN THE PACK</a:t>
+              <a:t>WATCH</a:t>
             </a:r>
           </a:p>
         </p:txBody>
@@ -8721,8 +9043,8 @@
         </p:nvSpPr>
         <p:spPr>
           <a:xfrm>
-            <a:off x="822960" y="1463040"/>
-            <a:ext cx="10515600" cy="3291840"/>
+            <a:off x="822960" y="914400"/>
+            <a:ext cx="10515600" cy="822960"/>
           </a:xfrm>
           <a:prstGeom prst="rect">
             <a:avLst/>
@@ -8730,38 +9052,69 @@
           <a:noFill/>
         </p:spPr>
         <p:txBody>
-          <a:bodyPr wrap="square" anchor="ctr" lIns="0" rIns="0" tIns="0" bIns="0">
+          <a:bodyPr wrap="square" anchor="t" lIns="0" rIns="0" tIns="0" bIns="0">
             <a:spAutoFit/>
           </a:bodyPr>
           <a:lstStyle/>
           <a:p>
             <a:pPr algn="l">
               <a:spcAft>
-                <a:spcPts val="2070"/>
-              </a:spcAft>
-            </a:pPr>
-            <a:r>
-              <a:rPr sz="4600" b="1" i="0">
+                <a:spcPts val="1350"/>
+              </a:spcAft>
+            </a:pPr>
+            <a:r>
+              <a:rPr sz="3000" b="1" i="0">
                 <a:solidFill>
                   <a:srgbClr val="1C1B19"/>
                 </a:solidFill>
                 <a:latin typeface="Source Serif 4"/>
               </a:rPr>
-              <a:t>Ride close behind someone and you use about a third less effort. Deep in the pack, you barely feel the wind.</a:t>
-            </a:r>
-          </a:p>
-        </p:txBody>
-      </p:sp>
-      <p:sp>
-        <p:nvSpPr>
-          <p:cNvPr id="6" name="TextBox 5"/>
+              <a:t>Riding in the pack</a:t>
+            </a:r>
+          </a:p>
+        </p:txBody>
+      </p:sp>
+      <p:pic>
+        <p:nvPicPr>
+          <p:cNvPr id="6" name="Picture 5" descr="tulsa-tough.jpg">
+            <a:hlinkClick r:id="rId3"/>
+          </p:cNvPr>
+          <p:cNvPicPr>
+            <a:picLocks noChangeAspect="1"/>
+          </p:cNvPicPr>
+          <p:nvPr/>
+        </p:nvPicPr>
+        <p:blipFill>
+          <a:blip r:embed="rId2"/>
+          <a:stretch>
+            <a:fillRect/>
+          </a:stretch>
+        </p:blipFill>
+        <p:spPr>
+          <a:xfrm>
+            <a:off x="822960" y="1828800"/>
+            <a:ext cx="6990080" cy="3931920"/>
+          </a:xfrm>
+          <a:prstGeom prst="rect">
+            <a:avLst/>
+          </a:prstGeom>
+          <a:ln>
+            <a:solidFill>
+              <a:srgbClr val="D8D2C6"/>
+            </a:solidFill>
+          </a:ln>
+        </p:spPr>
+      </p:pic>
+      <p:sp>
+        <p:nvSpPr>
+          <p:cNvPr id="7" name="TextBox 6"/>
           <p:cNvSpPr txBox="1"/>
           <p:nvPr/>
         </p:nvSpPr>
         <p:spPr>
           <a:xfrm>
-            <a:off x="822960" y="4846320"/>
-            <a:ext cx="10515600" cy="1097280"/>
+            <a:off x="8178800" y="1828800"/>
+            <a:ext cx="3281375" cy="457200"/>
           </a:xfrm>
           <a:prstGeom prst="rect">
             <a:avLst/>
@@ -8776,17 +9129,125 @@
           <a:p>
             <a:pPr algn="l">
               <a:spcAft>
-                <a:spcPts val="990"/>
-              </a:spcAft>
-            </a:pPr>
-            <a:r>
-              <a:rPr sz="2200" b="0" i="1">
-                <a:solidFill>
-                  <a:srgbClr val="5D5A54"/>
-                </a:solidFill>
-                <a:latin typeface="Source Serif 4"/>
-              </a:rPr>
-              <a:t>In the U.S., being white often works like riding in the pack. It doesn't make life easy. It means your skin isn't one of the things making it harder.</a:t>
+                <a:spcPts val="810"/>
+              </a:spcAft>
+            </a:pPr>
+            <a:r>
+              <a:rPr sz="1800" b="1" i="0">
+                <a:solidFill>
+                  <a:srgbClr val="0B2D5B"/>
+                </a:solidFill>
+                <a:latin typeface="Inter Tight"/>
+              </a:rPr>
+              <a:t/>
+            </a:r>
+            <a:r>
+              <a:rPr sz="2000" b="1">
+                <a:solidFill>
+                  <a:srgbClr val="0B2D5B"/>
+                </a:solidFill>
+                <a:latin typeface="Inter Tight"/>
+                <a:hlinkClick r:id="rId3"/>
+              </a:rPr>
+              <a:t>▶  Play the whole clip</a:t>
+            </a:r>
+          </a:p>
+          <a:p>
+            <a:r>
+              <a:rPr sz="1200">
+                <a:solidFill>
+                  <a:srgbClr val="1C1B19"/>
+                </a:solidFill>
+                <a:latin typeface="Inter Tight"/>
+              </a:rPr>
+              <a:t>Opens the web lesson and plays all four parts, each starting and stopping on time. Backup, one part at a time on YouTube:</a:t>
+            </a:r>
+          </a:p>
+          <a:p>
+            <a:r>
+              <a:rPr sz="1600" b="1">
+                <a:solidFill>
+                  <a:srgbClr val="0B2D5B"/>
+                </a:solidFill>
+                <a:latin typeface="Inter Tight"/>
+                <a:hlinkClick r:id="rId4"/>
+              </a:rPr>
+              <a:t>Part 1:  2:35 to 4:54</a:t>
+            </a:r>
+          </a:p>
+          <a:p>
+            <a:r>
+              <a:rPr sz="1600" b="1">
+                <a:solidFill>
+                  <a:srgbClr val="0B2D5B"/>
+                </a:solidFill>
+                <a:latin typeface="Inter Tight"/>
+                <a:hlinkClick r:id="rId5"/>
+              </a:rPr>
+              <a:t>Part 2:  7:00 to 7:41</a:t>
+            </a:r>
+          </a:p>
+          <a:p>
+            <a:r>
+              <a:rPr sz="1600" b="1">
+                <a:solidFill>
+                  <a:srgbClr val="0B2D5B"/>
+                </a:solidFill>
+                <a:latin typeface="Inter Tight"/>
+                <a:hlinkClick r:id="rId6"/>
+              </a:rPr>
+              <a:t>Part 3:  12:47 to 14:04</a:t>
+            </a:r>
+          </a:p>
+          <a:p>
+            <a:r>
+              <a:rPr sz="1600" b="1">
+                <a:solidFill>
+                  <a:srgbClr val="0B2D5B"/>
+                </a:solidFill>
+                <a:latin typeface="Inter Tight"/>
+                <a:hlinkClick r:id="rId7"/>
+              </a:rPr>
+              <a:t>Part 4:  21:29 to 21:47</a:t>
+            </a:r>
+          </a:p>
+        </p:txBody>
+      </p:sp>
+      <p:sp>
+        <p:nvSpPr>
+          <p:cNvPr id="8" name="TextBox 7"/>
+          <p:cNvSpPr txBox="1"/>
+          <p:nvPr/>
+        </p:nvSpPr>
+        <p:spPr>
+          <a:xfrm>
+            <a:off x="8178800" y="4846320"/>
+            <a:ext cx="3281375" cy="914400"/>
+          </a:xfrm>
+          <a:prstGeom prst="rect">
+            <a:avLst/>
+          </a:prstGeom>
+          <a:noFill/>
+        </p:spPr>
+        <p:txBody>
+          <a:bodyPr wrap="square" anchor="t" lIns="0" rIns="0" tIns="0" bIns="0">
+            <a:spAutoFit/>
+          </a:bodyPr>
+          <a:lstStyle/>
+          <a:p>
+            <a:pPr algn="l">
+              <a:spcAft>
+                <a:spcPts val="540"/>
+              </a:spcAft>
+            </a:pPr>
+            <a:r>
+              <a:rPr sz="1200" b="0" i="0">
+                <a:solidFill>
+                  <a:srgbClr val="1C1B19"/>
+                </a:solidFill>
+                <a:latin typeface="Inter Tight"/>
+              </a:rPr>
+              <a:t>From Rapha Gone Racing: Tulsa Tough (Rapha Films, 2021), four parts played back to back.</a:t>
             </a:r>
           </a:p>
         </p:txBody>

--- a/decks/headwinds-and-tailwinds-lesson-v2.pptx
+++ b/decks/headwinds-and-tailwinds-lesson-v2.pptx
@@ -17,6 +17,7 @@
     <p:sldId id="265" r:id="rId17"/>
     <p:sldId id="266" r:id="rId18"/>
     <p:sldId id="267" r:id="rId19"/>
+    <p:sldId id="268" r:id="rId20"/>
   </p:sldIdLst>
   <p:sldSz cx="12192000" cy="6858000" type="screen4x3"/>
   <p:notesSz cx="6858000" cy="9144000"/>
@@ -513,7 +514,77 @@
           <a:lstStyle/>
           <a:p>
             <a:r>
-              <a:t>This page and the next three are hidden. They stay in the deck for you and are skipped when you present.</a:t>
+              <a:t>This page is hidden and skipped when you present. The full plan, care notes and research are on the hidden pages at the end of the deck, if you want them.</a:t>
+            </a:r>
+          </a:p>
+        </p:txBody>
+      </p:sp>
+      <p:sp>
+        <p:nvSpPr>
+          <p:cNvPr id="4" name="Slide Number Placeholder 3"/>
+          <p:cNvSpPr>
+            <a:spLocks noGrp="1"/>
+          </p:cNvSpPr>
+          <p:nvPr>
+            <p:ph type="sldNum" idx="5" sz="quarter"/>
+          </p:nvPr>
+        </p:nvSpPr>
+        <p:spPr/>
+      </p:sp>
+    </p:spTree>
+  </p:cSld>
+  <p:clrMapOvr>
+    <a:masterClrMapping/>
+  </p:clrMapOvr>
+</p:notes>
+</file>
+
+<file path=ppt/notesSlides/notesSlide10.xml><?xml version="1.0" encoding="utf-8"?>
+<p:notes xmlns:a="http://schemas.openxmlformats.org/drawingml/2006/main" xmlns:p="http://schemas.openxmlformats.org/presentationml/2006/main" xmlns:r="http://schemas.openxmlformats.org/officeDocument/2006/relationships">
+  <p:cSld>
+    <p:spTree>
+      <p:nvGrpSpPr>
+        <p:cNvPr id="1" name=""/>
+        <p:cNvGrpSpPr/>
+        <p:nvPr/>
+      </p:nvGrpSpPr>
+      <p:grpSpPr>
+        <a:xfrm>
+          <a:off x="0" y="0"/>
+          <a:ext cx="0" cy="0"/>
+          <a:chOff x="0" y="0"/>
+          <a:chExt cx="0" cy="0"/>
+        </a:xfrm>
+      </p:grpSpPr>
+      <p:sp>
+        <p:nvSpPr>
+          <p:cNvPr id="2" name="Slide Image Placeholder 1"/>
+          <p:cNvSpPr>
+            <a:spLocks noGrp="1"/>
+          </p:cNvSpPr>
+          <p:nvPr>
+            <p:ph type="sldImg" idx="2"/>
+          </p:nvPr>
+        </p:nvSpPr>
+        <p:spPr/>
+      </p:sp>
+      <p:sp>
+        <p:nvSpPr>
+          <p:cNvPr id="3" name="Notes Placeholder 2"/>
+          <p:cNvSpPr>
+            <a:spLocks noGrp="1"/>
+          </p:cNvSpPr>
+          <p:nvPr>
+            <p:ph type="body" idx="3" sz="quarter"/>
+          </p:nvPr>
+        </p:nvSpPr>
+        <p:spPr/>
+        <p:txBody>
+          <a:bodyPr/>
+          <a:lstStyle/>
+          <a:p>
+            <a:r>
+              <a:t>If you want more: this page and the next three are hidden and skipped when you present.</a:t>
             </a:r>
           </a:p>
         </p:txBody>
@@ -4165,7 +4236,7 @@
                 </a:solidFill>
                 <a:latin typeface="Inter Tight"/>
               </a:rPr>
-              <a:t>TEACHER PAGE  ·  skipped when you present  ·  Lesson plan</a:t>
+              <a:t>TEACHER PAGE  ·  skipped when you present  ·  Before you start</a:t>
             </a:r>
           </a:p>
         </p:txBody>
@@ -4256,8 +4327,8 @@
         </p:nvSpPr>
         <p:spPr>
           <a:xfrm>
-            <a:off x="548640" y="1828800"/>
-            <a:ext cx="5120640" cy="4389120"/>
+            <a:off x="548640" y="2011680"/>
+            <a:ext cx="11064240" cy="4206240"/>
           </a:xfrm>
           <a:prstGeom prst="rect">
             <a:avLst/>
@@ -4272,43 +4343,43 @@
           <a:p>
             <a:pPr algn="l">
               <a:spcAft>
-                <a:spcPts val="675"/>
-              </a:spcAft>
-            </a:pPr>
-            <a:r>
-              <a:rPr sz="1100" b="1" i="0">
+                <a:spcPts val="900"/>
+              </a:spcAft>
+            </a:pPr>
+            <a:r>
+              <a:rPr sz="1200" b="1" i="0">
                 <a:solidFill>
                   <a:srgbClr val="0B2D5B"/>
                 </a:solidFill>
                 <a:latin typeface="Inter Tight"/>
               </a:rPr>
-              <a:t>GOAL</a:t>
-            </a:r>
-          </a:p>
-          <a:p>
-            <a:pPr algn="l">
-              <a:spcAft>
-                <a:spcPts val="675"/>
-              </a:spcAft>
-            </a:pPr>
-            <a:r>
-              <a:rPr sz="1500" b="0" i="0">
+              <a:t>BEFORE YOU START</a:t>
+            </a:r>
+          </a:p>
+          <a:p>
+            <a:pPr algn="l">
+              <a:spcAft>
+                <a:spcPts val="900"/>
+              </a:spcAft>
+            </a:pPr>
+            <a:r>
+              <a:rPr sz="2000" b="0" i="0">
                 <a:solidFill>
                   <a:srgbClr val="1C1B19"/>
                 </a:solidFill>
                 <a:latin typeface="Source Serif 4"/>
               </a:rPr>
-              <a:t>Students can explain why advantages are harder to notice than obstacles, name a few tailwinds of their own privately, describe race as one of the winds in American life, and choose one way to use a tailwind well. The lesson separates blame from responsibility on purpose: nobody is asked to feel guilty, and nobody is asked to share their own headwinds.</a:t>
-            </a:r>
-          </a:p>
-          <a:p>
-            <a:pPr algn="l">
-              <a:spcAft>
-                <a:spcPts val="675"/>
-              </a:spcAft>
-            </a:pPr>
-            <a:r>
-              <a:rPr sz="1500" b="0" i="0">
+              <a:t>Students learn why advantages are harder to notice than obstacles, name a few of their own tailwinds privately, and choose one way to use one well. Let your division head know you're teaching it, test the video clip beforehand, and say "not your fault" more than once.</a:t>
+            </a:r>
+          </a:p>
+          <a:p>
+            <a:pPr algn="l">
+              <a:spcAft>
+                <a:spcPts val="900"/>
+              </a:spcAft>
+            </a:pPr>
+            <a:r>
+              <a:rPr sz="2000" b="0" i="0">
                 <a:solidFill>
                   <a:srgbClr val="1C1B19"/>
                 </a:solidFill>
@@ -4320,343 +4391,33 @@
           <a:p>
             <a:pPr algn="l">
               <a:spcAft>
-                <a:spcPts val="675"/>
-              </a:spcAft>
-            </a:pPr>
-            <a:r>
-              <a:rPr sz="1100" b="1" i="0">
+                <a:spcPts val="900"/>
+              </a:spcAft>
+            </a:pPr>
+            <a:r>
+              <a:rPr sz="1200" b="1" i="0">
                 <a:solidFill>
                   <a:srgbClr val="0B2D5B"/>
                 </a:solidFill>
                 <a:latin typeface="Inter Tight"/>
               </a:rPr>
-              <a:t>MATERIALS</a:t>
-            </a:r>
-          </a:p>
-          <a:p>
-            <a:pPr algn="l">
-              <a:spcAft>
-                <a:spcPts val="675"/>
-              </a:spcAft>
-            </a:pPr>
-            <a:r>
-              <a:rPr sz="1500" b="0" i="0">
+              <a:t>EVERY STUDENT IN THE ROOM</a:t>
+            </a:r>
+          </a:p>
+          <a:p>
+            <a:pPr algn="l">
+              <a:spcAft>
+                <a:spcPts val="900"/>
+              </a:spcAft>
+            </a:pPr>
+            <a:r>
+              <a:rPr sz="2000" b="0" i="0">
                 <a:solidFill>
                   <a:srgbClr val="1C1B19"/>
                 </a:solidFill>
                 <a:latin typeface="Source Serif 4"/>
               </a:rPr>
-              <a:t>Index cards, one per student</a:t>
-            </a:r>
-          </a:p>
-          <a:p>
-            <a:pPr algn="l">
-              <a:spcAft>
-                <a:spcPts val="675"/>
-              </a:spcAft>
-            </a:pPr>
-            <a:r>
-              <a:rPr sz="1500" b="0" i="0">
-                <a:solidFill>
-                  <a:srgbClr val="1C1B19"/>
-                </a:solidFill>
-                <a:latin typeface="Source Serif 4"/>
-              </a:rPr>
-              <a:t>A board or chart paper</a:t>
-            </a:r>
-          </a:p>
-          <a:p>
-            <a:pPr algn="l">
-              <a:spcAft>
-                <a:spcPts val="675"/>
-              </a:spcAft>
-            </a:pPr>
-            <a:r>
-              <a:rPr sz="1500" b="0" i="0">
-                <a:solidFill>
-                  <a:srgbClr val="1C1B19"/>
-                </a:solidFill>
-                <a:latin typeface="Source Serif 4"/>
-              </a:rPr>
-              <a:t>Speakers or a sound system for a 4-minute clip (slide 5). Test it before class: the clip plays from YouTube, so it needs internet and YouTube can't be blocked on your network.</a:t>
-            </a:r>
-          </a:p>
-          <a:p>
-            <a:pPr algn="l">
-              <a:spcAft>
-                <a:spcPts val="675"/>
-              </a:spcAft>
-            </a:pPr>
-            <a:r>
-              <a:rPr sz="1500" b="0" i="0">
-                <a:solidFill>
-                  <a:srgbClr val="1C1B19"/>
-                </a:solidFill>
-                <a:latin typeface="Source Serif 4"/>
-              </a:rPr>
-              <a:t>The student page link (last slide) to share after advisory</a:t>
-            </a:r>
-          </a:p>
-        </p:txBody>
-      </p:sp>
-      <p:sp>
-        <p:nvSpPr>
-          <p:cNvPr id="7" name="TextBox 6"/>
-          <p:cNvSpPr txBox="1"/>
-          <p:nvPr/>
-        </p:nvSpPr>
-        <p:spPr>
-          <a:xfrm>
-            <a:off x="6126480" y="1828800"/>
-            <a:ext cx="5486400" cy="4389120"/>
-          </a:xfrm>
-          <a:prstGeom prst="rect">
-            <a:avLst/>
-          </a:prstGeom>
-          <a:noFill/>
-        </p:spPr>
-        <p:txBody>
-          <a:bodyPr wrap="square" anchor="t" lIns="0" rIns="0" tIns="0" bIns="0">
-            <a:spAutoFit/>
-          </a:bodyPr>
-          <a:lstStyle/>
-          <a:p>
-            <a:pPr algn="l">
-              <a:spcAft>
-                <a:spcPts val="630"/>
-              </a:spcAft>
-            </a:pPr>
-            <a:r>
-              <a:rPr sz="1100" b="1" i="0">
-                <a:solidFill>
-                  <a:srgbClr val="0B2D5B"/>
-                </a:solidFill>
-                <a:latin typeface="Inter Tight"/>
-              </a:rPr>
-              <a:t>FLOW</a:t>
-            </a:r>
-          </a:p>
-          <a:p>
-            <a:pPr algn="l">
-              <a:spcAft>
-                <a:spcPts val="630"/>
-              </a:spcAft>
-            </a:pPr>
-            <a:r>
-              <a:rPr sz="1300" b="1" i="0">
-                <a:solidFill>
-                  <a:srgbClr val="F47B20"/>
-                </a:solidFill>
-                <a:latin typeface="Inter Tight"/>
-              </a:rPr>
-              <a:t>2 min   </a:t>
-            </a:r>
-            <a:r>
-              <a:rPr sz="1400" b="0" i="0">
-                <a:solidFill>
-                  <a:srgbClr val="1C1B19"/>
-                </a:solidFill>
-                <a:latin typeface="Source Serif 4"/>
-              </a:rPr>
-              <a:t>Riding into the wind: when has wind helped or fought you?</a:t>
-            </a:r>
-          </a:p>
-          <a:p>
-            <a:pPr algn="l">
-              <a:spcAft>
-                <a:spcPts val="630"/>
-              </a:spcAft>
-            </a:pPr>
-            <a:r>
-              <a:rPr sz="1300" b="1" i="0">
-                <a:solidFill>
-                  <a:srgbClr val="F47B20"/>
-                </a:solidFill>
-                <a:latin typeface="Inter Tight"/>
-              </a:rPr>
-              <a:t>2 min   </a:t>
-            </a:r>
-            <a:r>
-              <a:rPr sz="1400" b="0" i="0">
-                <a:solidFill>
-                  <a:srgbClr val="1C1B19"/>
-                </a:solidFill>
-                <a:latin typeface="Source Serif 4"/>
-              </a:rPr>
-              <a:t>Why we notice headwinds more</a:t>
-            </a:r>
-          </a:p>
-          <a:p>
-            <a:pPr algn="l">
-              <a:spcAft>
-                <a:spcPts val="630"/>
-              </a:spcAft>
-            </a:pPr>
-            <a:r>
-              <a:rPr sz="1300" b="1" i="0">
-                <a:solidFill>
-                  <a:srgbClr val="F47B20"/>
-                </a:solidFill>
-                <a:latin typeface="Inter Tight"/>
-              </a:rPr>
-              <a:t>3 min   </a:t>
-            </a:r>
-            <a:r>
-              <a:rPr sz="1400" b="0" i="0">
-                <a:solidFill>
-                  <a:srgbClr val="1C1B19"/>
-                </a:solidFill>
-                <a:latin typeface="Source Serif 4"/>
-              </a:rPr>
-              <a:t>Everyday tailwinds (private tally)</a:t>
-            </a:r>
-          </a:p>
-          <a:p>
-            <a:pPr algn="l">
-              <a:spcAft>
-                <a:spcPts val="630"/>
-              </a:spcAft>
-            </a:pPr>
-            <a:r>
-              <a:rPr sz="1300" b="1" i="0">
-                <a:solidFill>
-                  <a:srgbClr val="F47B20"/>
-                </a:solidFill>
-                <a:latin typeface="Inter Tight"/>
-              </a:rPr>
-              <a:t>5 min   </a:t>
-            </a:r>
-            <a:r>
-              <a:rPr sz="1400" b="0" i="0">
-                <a:solidFill>
-                  <a:srgbClr val="1C1B19"/>
-                </a:solidFill>
-                <a:latin typeface="Source Serif 4"/>
-              </a:rPr>
-              <a:t>Watch: L39ION racing in the pack (4:35 clip)</a:t>
-            </a:r>
-          </a:p>
-          <a:p>
-            <a:pPr algn="l">
-              <a:spcAft>
-                <a:spcPts val="630"/>
-              </a:spcAft>
-            </a:pPr>
-            <a:r>
-              <a:rPr sz="1300" b="1" i="0">
-                <a:solidFill>
-                  <a:srgbClr val="F47B20"/>
-                </a:solidFill>
-                <a:latin typeface="Inter Tight"/>
-              </a:rPr>
-              <a:t>3 min   </a:t>
-            </a:r>
-            <a:r>
-              <a:rPr sz="1400" b="0" i="0">
-                <a:solidFill>
-                  <a:srgbClr val="1C1B19"/>
-                </a:solidFill>
-                <a:latin typeface="Source Serif 4"/>
-              </a:rPr>
-              <a:t>Drafting in the pack: race is one of the winds</a:t>
-            </a:r>
-          </a:p>
-          <a:p>
-            <a:pPr algn="l">
-              <a:spcAft>
-                <a:spcPts val="630"/>
-              </a:spcAft>
-            </a:pPr>
-            <a:r>
-              <a:rPr sz="1300" b="1" i="0">
-                <a:solidFill>
-                  <a:srgbClr val="F47B20"/>
-                </a:solidFill>
-                <a:latin typeface="Inter Tight"/>
-              </a:rPr>
-              <a:t>2 min   </a:t>
-            </a:r>
-            <a:r>
-              <a:rPr sz="1400" b="0" i="0">
-                <a:solidFill>
-                  <a:srgbClr val="1C1B19"/>
-                </a:solidFill>
-                <a:latin typeface="Source Serif 4"/>
-              </a:rPr>
-              <a:t>Blame and responsibility aren't the same</a:t>
-            </a:r>
-          </a:p>
-          <a:p>
-            <a:pPr algn="l">
-              <a:spcAft>
-                <a:spcPts val="630"/>
-              </a:spcAft>
-            </a:pPr>
-            <a:r>
-              <a:rPr sz="1300" b="1" i="0">
-                <a:solidFill>
-                  <a:srgbClr val="F47B20"/>
-                </a:solidFill>
-                <a:latin typeface="Inter Tight"/>
-              </a:rPr>
-              <a:t>3 min   </a:t>
-            </a:r>
-            <a:r>
-              <a:rPr sz="1400" b="0" i="0">
-                <a:solidFill>
-                  <a:srgbClr val="1C1B19"/>
-                </a:solidFill>
-                <a:latin typeface="Source Serif 4"/>
-              </a:rPr>
-              <a:t>Take a turn at the front, privately, and the student page link</a:t>
-            </a:r>
-          </a:p>
-          <a:p>
-            <a:pPr algn="l">
-              <a:spcAft>
-                <a:spcPts val="630"/>
-              </a:spcAft>
-            </a:pPr>
-            <a:r>
-              <a:rPr sz="1400" b="0" i="0">
-                <a:solidFill>
-                  <a:srgbClr val="1C1B19"/>
-                </a:solidFill>
-                <a:latin typeface="Source Serif 4"/>
-              </a:rPr>
-              <a:t/>
-            </a:r>
-          </a:p>
-          <a:p>
-            <a:pPr algn="l">
-              <a:spcAft>
-                <a:spcPts val="630"/>
-              </a:spcAft>
-            </a:pPr>
-            <a:r>
-              <a:rPr sz="1100" b="1" i="0">
-                <a:solidFill>
-                  <a:srgbClr val="0B2D5B"/>
-                </a:solidFill>
-                <a:latin typeface="Inter Tight"/>
-              </a:rPr>
-              <a:t>SHORT ON TIME (10-MINUTE CHECK-IN)</a:t>
-            </a:r>
-          </a:p>
-          <a:p>
-            <a:pPr algn="l">
-              <a:spcAft>
-                <a:spcPts val="630"/>
-              </a:spcAft>
-            </a:pPr>
-            <a:r>
-              <a:rPr sz="1400" b="0" i="0">
-                <a:solidFill>
-                  <a:srgbClr val="1C1B19"/>
-                </a:solidFill>
-                <a:latin typeface="Source Serif 4"/>
-              </a:rPr>
-              <a:t>Riding into the wind (2), drafting in the pack (4), take a turn at the front, privately (3), share the link (1). Skip the clip, or send it to students afterward.</a:t>
+              <a:t>Never ask a student of color to describe their headwinds, take a white student's real hardships seriously alongside race, and keep every tally private.</a:t>
             </a:r>
           </a:p>
         </p:txBody>
@@ -4670,6 +4431,2404 @@
 </file>
 
 <file path=ppt/slides/slide10.xml><?xml version="1.0" encoding="utf-8"?>
+<p:sld xmlns:a="http://schemas.openxmlformats.org/drawingml/2006/main" xmlns:p="http://schemas.openxmlformats.org/presentationml/2006/main" xmlns:r="http://schemas.openxmlformats.org/officeDocument/2006/relationships" show="0">
+  <p:cSld>
+    <p:bg>
+      <p:bgPr>
+        <a:solidFill>
+          <a:srgbClr val="EEEBE4"/>
+        </a:solidFill>
+        <a:effectLst/>
+      </p:bgPr>
+    </p:bg>
+    <p:spTree>
+      <p:nvGrpSpPr>
+        <p:cNvPr id="1" name=""/>
+        <p:cNvGrpSpPr/>
+        <p:nvPr/>
+      </p:nvGrpSpPr>
+      <p:grpSpPr/>
+      <p:sp>
+        <p:nvSpPr>
+          <p:cNvPr id="2" name="Rectangle 1"/>
+          <p:cNvSpPr/>
+          <p:nvPr/>
+        </p:nvSpPr>
+        <p:spPr>
+          <a:xfrm>
+            <a:off x="0" y="0"/>
+            <a:ext cx="12191695" cy="384048"/>
+          </a:xfrm>
+          <a:prstGeom prst="rect">
+            <a:avLst/>
+          </a:prstGeom>
+          <a:solidFill>
+            <a:srgbClr val="0B2D5B"/>
+          </a:solidFill>
+          <a:ln>
+            <a:noFill/>
+          </a:ln>
+          <a:effectLst/>
+        </p:spPr>
+        <p:style>
+          <a:lnRef idx="1">
+            <a:schemeClr val="accent1"/>
+          </a:lnRef>
+          <a:fillRef idx="3">
+            <a:schemeClr val="accent1"/>
+          </a:fillRef>
+          <a:effectRef idx="2">
+            <a:schemeClr val="accent1"/>
+          </a:effectRef>
+          <a:fontRef idx="minor">
+            <a:schemeClr val="lt1"/>
+          </a:fontRef>
+        </p:style>
+        <p:txBody>
+          <a:bodyPr rtlCol="0" anchor="ctr"/>
+          <a:lstStyle/>
+          <a:p>
+            <a:pPr algn="ctr"/>
+          </a:p>
+        </p:txBody>
+      </p:sp>
+      <p:sp>
+        <p:nvSpPr>
+          <p:cNvPr id="3" name="TextBox 2"/>
+          <p:cNvSpPr txBox="1"/>
+          <p:nvPr/>
+        </p:nvSpPr>
+        <p:spPr>
+          <a:xfrm>
+            <a:off x="548640" y="100584"/>
+            <a:ext cx="10972800" cy="274320"/>
+          </a:xfrm>
+          <a:prstGeom prst="rect">
+            <a:avLst/>
+          </a:prstGeom>
+          <a:noFill/>
+        </p:spPr>
+        <p:txBody>
+          <a:bodyPr wrap="square" anchor="t" lIns="0" rIns="0" tIns="0" bIns="0">
+            <a:spAutoFit/>
+          </a:bodyPr>
+          <a:lstStyle/>
+          <a:p>
+            <a:pPr algn="l">
+              <a:spcAft>
+                <a:spcPts val="495"/>
+              </a:spcAft>
+            </a:pPr>
+            <a:r>
+              <a:rPr sz="1100" b="1" i="0">
+                <a:solidFill>
+                  <a:srgbClr val="FFFFFF"/>
+                </a:solidFill>
+                <a:latin typeface="Inter Tight"/>
+              </a:rPr>
+              <a:t>TEACHER PAGE  ·  skipped when you present  ·  Lesson plan</a:t>
+            </a:r>
+          </a:p>
+        </p:txBody>
+      </p:sp>
+      <p:sp>
+        <p:nvSpPr>
+          <p:cNvPr id="4" name="TextBox 3"/>
+          <p:cNvSpPr txBox="1"/>
+          <p:nvPr/>
+        </p:nvSpPr>
+        <p:spPr>
+          <a:xfrm>
+            <a:off x="548640" y="685800"/>
+            <a:ext cx="10972800" cy="731520"/>
+          </a:xfrm>
+          <a:prstGeom prst="rect">
+            <a:avLst/>
+          </a:prstGeom>
+          <a:noFill/>
+        </p:spPr>
+        <p:txBody>
+          <a:bodyPr wrap="square" anchor="t" lIns="0" rIns="0" tIns="0" bIns="0">
+            <a:spAutoFit/>
+          </a:bodyPr>
+          <a:lstStyle/>
+          <a:p>
+            <a:pPr algn="l">
+              <a:spcAft>
+                <a:spcPts val="1530"/>
+              </a:spcAft>
+            </a:pPr>
+            <a:r>
+              <a:rPr sz="3400" b="1" i="0">
+                <a:solidFill>
+                  <a:srgbClr val="1C1B19"/>
+                </a:solidFill>
+                <a:latin typeface="Source Serif 4"/>
+              </a:rPr>
+              <a:t>Headwinds and Tailwinds</a:t>
+            </a:r>
+          </a:p>
+        </p:txBody>
+      </p:sp>
+      <p:sp>
+        <p:nvSpPr>
+          <p:cNvPr id="5" name="TextBox 4"/>
+          <p:cNvSpPr txBox="1"/>
+          <p:nvPr/>
+        </p:nvSpPr>
+        <p:spPr>
+          <a:xfrm>
+            <a:off x="548640" y="1325880"/>
+            <a:ext cx="10972800" cy="365760"/>
+          </a:xfrm>
+          <a:prstGeom prst="rect">
+            <a:avLst/>
+          </a:prstGeom>
+          <a:noFill/>
+        </p:spPr>
+        <p:txBody>
+          <a:bodyPr wrap="square" anchor="t" lIns="0" rIns="0" tIns="0" bIns="0">
+            <a:spAutoFit/>
+          </a:bodyPr>
+          <a:lstStyle/>
+          <a:p>
+            <a:pPr algn="l">
+              <a:spcAft>
+                <a:spcPts val="630"/>
+              </a:spcAft>
+            </a:pPr>
+            <a:r>
+              <a:rPr sz="1400" b="0" i="0">
+                <a:solidFill>
+                  <a:srgbClr val="5D5A54"/>
+                </a:solidFill>
+                <a:latin typeface="Inter Tight"/>
+              </a:rPr>
+              <a:t>Upper School  ·  20 minutes (fits a 30-minute advisory, with time for your opening check-in; 10-minute version below)  ·  Best for grades 10 to 12</a:t>
+            </a:r>
+          </a:p>
+        </p:txBody>
+      </p:sp>
+      <p:sp>
+        <p:nvSpPr>
+          <p:cNvPr id="6" name="TextBox 5"/>
+          <p:cNvSpPr txBox="1"/>
+          <p:nvPr/>
+        </p:nvSpPr>
+        <p:spPr>
+          <a:xfrm>
+            <a:off x="548640" y="1828800"/>
+            <a:ext cx="5120640" cy="4389120"/>
+          </a:xfrm>
+          <a:prstGeom prst="rect">
+            <a:avLst/>
+          </a:prstGeom>
+          <a:noFill/>
+        </p:spPr>
+        <p:txBody>
+          <a:bodyPr wrap="square" anchor="t" lIns="0" rIns="0" tIns="0" bIns="0">
+            <a:spAutoFit/>
+          </a:bodyPr>
+          <a:lstStyle/>
+          <a:p>
+            <a:pPr algn="l">
+              <a:spcAft>
+                <a:spcPts val="675"/>
+              </a:spcAft>
+            </a:pPr>
+            <a:r>
+              <a:rPr sz="1100" b="1" i="0">
+                <a:solidFill>
+                  <a:srgbClr val="0B2D5B"/>
+                </a:solidFill>
+                <a:latin typeface="Inter Tight"/>
+              </a:rPr>
+              <a:t>GOAL</a:t>
+            </a:r>
+          </a:p>
+          <a:p>
+            <a:pPr algn="l">
+              <a:spcAft>
+                <a:spcPts val="675"/>
+              </a:spcAft>
+            </a:pPr>
+            <a:r>
+              <a:rPr sz="1500" b="0" i="0">
+                <a:solidFill>
+                  <a:srgbClr val="1C1B19"/>
+                </a:solidFill>
+                <a:latin typeface="Source Serif 4"/>
+              </a:rPr>
+              <a:t>Students can explain why advantages are harder to notice than obstacles, name a few tailwinds of their own privately, describe race as one of the winds in American life, and choose one way to use a tailwind well. The lesson separates blame from responsibility on purpose: nobody is asked to feel guilty, and nobody is asked to share their own headwinds.</a:t>
+            </a:r>
+          </a:p>
+          <a:p>
+            <a:pPr algn="l">
+              <a:spcAft>
+                <a:spcPts val="675"/>
+              </a:spcAft>
+            </a:pPr>
+            <a:r>
+              <a:rPr sz="1500" b="0" i="0">
+                <a:solidFill>
+                  <a:srgbClr val="1C1B19"/>
+                </a:solidFill>
+                <a:latin typeface="Source Serif 4"/>
+              </a:rPr>
+              <a:t/>
+            </a:r>
+          </a:p>
+          <a:p>
+            <a:pPr algn="l">
+              <a:spcAft>
+                <a:spcPts val="675"/>
+              </a:spcAft>
+            </a:pPr>
+            <a:r>
+              <a:rPr sz="1100" b="1" i="0">
+                <a:solidFill>
+                  <a:srgbClr val="0B2D5B"/>
+                </a:solidFill>
+                <a:latin typeface="Inter Tight"/>
+              </a:rPr>
+              <a:t>MATERIALS</a:t>
+            </a:r>
+          </a:p>
+          <a:p>
+            <a:pPr algn="l">
+              <a:spcAft>
+                <a:spcPts val="675"/>
+              </a:spcAft>
+            </a:pPr>
+            <a:r>
+              <a:rPr sz="1500" b="0" i="0">
+                <a:solidFill>
+                  <a:srgbClr val="1C1B19"/>
+                </a:solidFill>
+                <a:latin typeface="Source Serif 4"/>
+              </a:rPr>
+              <a:t>Index cards, one per student</a:t>
+            </a:r>
+          </a:p>
+          <a:p>
+            <a:pPr algn="l">
+              <a:spcAft>
+                <a:spcPts val="675"/>
+              </a:spcAft>
+            </a:pPr>
+            <a:r>
+              <a:rPr sz="1500" b="0" i="0">
+                <a:solidFill>
+                  <a:srgbClr val="1C1B19"/>
+                </a:solidFill>
+                <a:latin typeface="Source Serif 4"/>
+              </a:rPr>
+              <a:t>A board or chart paper</a:t>
+            </a:r>
+          </a:p>
+          <a:p>
+            <a:pPr algn="l">
+              <a:spcAft>
+                <a:spcPts val="675"/>
+              </a:spcAft>
+            </a:pPr>
+            <a:r>
+              <a:rPr sz="1500" b="0" i="0">
+                <a:solidFill>
+                  <a:srgbClr val="1C1B19"/>
+                </a:solidFill>
+                <a:latin typeface="Source Serif 4"/>
+              </a:rPr>
+              <a:t>Speakers or a sound system for a 4-minute clip (slide 5). Test it before class: the clip plays from YouTube, so it needs internet and YouTube can't be blocked on your network.</a:t>
+            </a:r>
+          </a:p>
+          <a:p>
+            <a:pPr algn="l">
+              <a:spcAft>
+                <a:spcPts val="675"/>
+              </a:spcAft>
+            </a:pPr>
+            <a:r>
+              <a:rPr sz="1500" b="0" i="0">
+                <a:solidFill>
+                  <a:srgbClr val="1C1B19"/>
+                </a:solidFill>
+                <a:latin typeface="Source Serif 4"/>
+              </a:rPr>
+              <a:t>The student page link (last slide) to share after advisory</a:t>
+            </a:r>
+          </a:p>
+        </p:txBody>
+      </p:sp>
+      <p:sp>
+        <p:nvSpPr>
+          <p:cNvPr id="7" name="TextBox 6"/>
+          <p:cNvSpPr txBox="1"/>
+          <p:nvPr/>
+        </p:nvSpPr>
+        <p:spPr>
+          <a:xfrm>
+            <a:off x="6126480" y="1828800"/>
+            <a:ext cx="5486400" cy="4389120"/>
+          </a:xfrm>
+          <a:prstGeom prst="rect">
+            <a:avLst/>
+          </a:prstGeom>
+          <a:noFill/>
+        </p:spPr>
+        <p:txBody>
+          <a:bodyPr wrap="square" anchor="t" lIns="0" rIns="0" tIns="0" bIns="0">
+            <a:spAutoFit/>
+          </a:bodyPr>
+          <a:lstStyle/>
+          <a:p>
+            <a:pPr algn="l">
+              <a:spcAft>
+                <a:spcPts val="630"/>
+              </a:spcAft>
+            </a:pPr>
+            <a:r>
+              <a:rPr sz="1100" b="1" i="0">
+                <a:solidFill>
+                  <a:srgbClr val="0B2D5B"/>
+                </a:solidFill>
+                <a:latin typeface="Inter Tight"/>
+              </a:rPr>
+              <a:t>FLOW</a:t>
+            </a:r>
+          </a:p>
+          <a:p>
+            <a:pPr algn="l">
+              <a:spcAft>
+                <a:spcPts val="630"/>
+              </a:spcAft>
+            </a:pPr>
+            <a:r>
+              <a:rPr sz="1300" b="1" i="0">
+                <a:solidFill>
+                  <a:srgbClr val="F47B20"/>
+                </a:solidFill>
+                <a:latin typeface="Inter Tight"/>
+              </a:rPr>
+              <a:t>2 min   </a:t>
+            </a:r>
+            <a:r>
+              <a:rPr sz="1400" b="0" i="0">
+                <a:solidFill>
+                  <a:srgbClr val="1C1B19"/>
+                </a:solidFill>
+                <a:latin typeface="Source Serif 4"/>
+              </a:rPr>
+              <a:t>Riding into the wind: when has wind helped or fought you?</a:t>
+            </a:r>
+          </a:p>
+          <a:p>
+            <a:pPr algn="l">
+              <a:spcAft>
+                <a:spcPts val="630"/>
+              </a:spcAft>
+            </a:pPr>
+            <a:r>
+              <a:rPr sz="1300" b="1" i="0">
+                <a:solidFill>
+                  <a:srgbClr val="F47B20"/>
+                </a:solidFill>
+                <a:latin typeface="Inter Tight"/>
+              </a:rPr>
+              <a:t>2 min   </a:t>
+            </a:r>
+            <a:r>
+              <a:rPr sz="1400" b="0" i="0">
+                <a:solidFill>
+                  <a:srgbClr val="1C1B19"/>
+                </a:solidFill>
+                <a:latin typeface="Source Serif 4"/>
+              </a:rPr>
+              <a:t>Why we notice headwinds more</a:t>
+            </a:r>
+          </a:p>
+          <a:p>
+            <a:pPr algn="l">
+              <a:spcAft>
+                <a:spcPts val="630"/>
+              </a:spcAft>
+            </a:pPr>
+            <a:r>
+              <a:rPr sz="1300" b="1" i="0">
+                <a:solidFill>
+                  <a:srgbClr val="F47B20"/>
+                </a:solidFill>
+                <a:latin typeface="Inter Tight"/>
+              </a:rPr>
+              <a:t>3 min   </a:t>
+            </a:r>
+            <a:r>
+              <a:rPr sz="1400" b="0" i="0">
+                <a:solidFill>
+                  <a:srgbClr val="1C1B19"/>
+                </a:solidFill>
+                <a:latin typeface="Source Serif 4"/>
+              </a:rPr>
+              <a:t>Everyday tailwinds (private tally)</a:t>
+            </a:r>
+          </a:p>
+          <a:p>
+            <a:pPr algn="l">
+              <a:spcAft>
+                <a:spcPts val="630"/>
+              </a:spcAft>
+            </a:pPr>
+            <a:r>
+              <a:rPr sz="1300" b="1" i="0">
+                <a:solidFill>
+                  <a:srgbClr val="F47B20"/>
+                </a:solidFill>
+                <a:latin typeface="Inter Tight"/>
+              </a:rPr>
+              <a:t>5 min   </a:t>
+            </a:r>
+            <a:r>
+              <a:rPr sz="1400" b="0" i="0">
+                <a:solidFill>
+                  <a:srgbClr val="1C1B19"/>
+                </a:solidFill>
+                <a:latin typeface="Source Serif 4"/>
+              </a:rPr>
+              <a:t>Watch: L39ION racing in the pack (4:35 clip)</a:t>
+            </a:r>
+          </a:p>
+          <a:p>
+            <a:pPr algn="l">
+              <a:spcAft>
+                <a:spcPts val="630"/>
+              </a:spcAft>
+            </a:pPr>
+            <a:r>
+              <a:rPr sz="1300" b="1" i="0">
+                <a:solidFill>
+                  <a:srgbClr val="F47B20"/>
+                </a:solidFill>
+                <a:latin typeface="Inter Tight"/>
+              </a:rPr>
+              <a:t>3 min   </a:t>
+            </a:r>
+            <a:r>
+              <a:rPr sz="1400" b="0" i="0">
+                <a:solidFill>
+                  <a:srgbClr val="1C1B19"/>
+                </a:solidFill>
+                <a:latin typeface="Source Serif 4"/>
+              </a:rPr>
+              <a:t>Drafting in the pack: race is one of the winds</a:t>
+            </a:r>
+          </a:p>
+          <a:p>
+            <a:pPr algn="l">
+              <a:spcAft>
+                <a:spcPts val="630"/>
+              </a:spcAft>
+            </a:pPr>
+            <a:r>
+              <a:rPr sz="1300" b="1" i="0">
+                <a:solidFill>
+                  <a:srgbClr val="F47B20"/>
+                </a:solidFill>
+                <a:latin typeface="Inter Tight"/>
+              </a:rPr>
+              <a:t>2 min   </a:t>
+            </a:r>
+            <a:r>
+              <a:rPr sz="1400" b="0" i="0">
+                <a:solidFill>
+                  <a:srgbClr val="1C1B19"/>
+                </a:solidFill>
+                <a:latin typeface="Source Serif 4"/>
+              </a:rPr>
+              <a:t>Blame and responsibility aren't the same</a:t>
+            </a:r>
+          </a:p>
+          <a:p>
+            <a:pPr algn="l">
+              <a:spcAft>
+                <a:spcPts val="630"/>
+              </a:spcAft>
+            </a:pPr>
+            <a:r>
+              <a:rPr sz="1300" b="1" i="0">
+                <a:solidFill>
+                  <a:srgbClr val="F47B20"/>
+                </a:solidFill>
+                <a:latin typeface="Inter Tight"/>
+              </a:rPr>
+              <a:t>3 min   </a:t>
+            </a:r>
+            <a:r>
+              <a:rPr sz="1400" b="0" i="0">
+                <a:solidFill>
+                  <a:srgbClr val="1C1B19"/>
+                </a:solidFill>
+                <a:latin typeface="Source Serif 4"/>
+              </a:rPr>
+              <a:t>Take a turn at the front, privately, and the student page link</a:t>
+            </a:r>
+          </a:p>
+          <a:p>
+            <a:pPr algn="l">
+              <a:spcAft>
+                <a:spcPts val="630"/>
+              </a:spcAft>
+            </a:pPr>
+            <a:r>
+              <a:rPr sz="1400" b="0" i="0">
+                <a:solidFill>
+                  <a:srgbClr val="1C1B19"/>
+                </a:solidFill>
+                <a:latin typeface="Source Serif 4"/>
+              </a:rPr>
+              <a:t/>
+            </a:r>
+          </a:p>
+          <a:p>
+            <a:pPr algn="l">
+              <a:spcAft>
+                <a:spcPts val="630"/>
+              </a:spcAft>
+            </a:pPr>
+            <a:r>
+              <a:rPr sz="1100" b="1" i="0">
+                <a:solidFill>
+                  <a:srgbClr val="0B2D5B"/>
+                </a:solidFill>
+                <a:latin typeface="Inter Tight"/>
+              </a:rPr>
+              <a:t>SHORT ON TIME (10-MINUTE CHECK-IN)</a:t>
+            </a:r>
+          </a:p>
+          <a:p>
+            <a:pPr algn="l">
+              <a:spcAft>
+                <a:spcPts val="630"/>
+              </a:spcAft>
+            </a:pPr>
+            <a:r>
+              <a:rPr sz="1400" b="0" i="0">
+                <a:solidFill>
+                  <a:srgbClr val="1C1B19"/>
+                </a:solidFill>
+                <a:latin typeface="Source Serif 4"/>
+              </a:rPr>
+              <a:t>Riding into the wind (2), drafting in the pack (4), take a turn at the front, privately (3), share the link (1). Skip the clip, or send it to students afterward.</a:t>
+            </a:r>
+          </a:p>
+        </p:txBody>
+      </p:sp>
+    </p:spTree>
+  </p:cSld>
+  <p:clrMapOvr>
+    <a:masterClrMapping/>
+  </p:clrMapOvr>
+</p:sld>
+</file>
+
+<file path=ppt/slides/slide11.xml><?xml version="1.0" encoding="utf-8"?>
+<p:sld xmlns:a="http://schemas.openxmlformats.org/drawingml/2006/main" xmlns:p="http://schemas.openxmlformats.org/presentationml/2006/main" xmlns:r="http://schemas.openxmlformats.org/officeDocument/2006/relationships" show="0">
+  <p:cSld>
+    <p:bg>
+      <p:bgPr>
+        <a:solidFill>
+          <a:srgbClr val="EEEBE4"/>
+        </a:solidFill>
+        <a:effectLst/>
+      </p:bgPr>
+    </p:bg>
+    <p:spTree>
+      <p:nvGrpSpPr>
+        <p:cNvPr id="1" name=""/>
+        <p:cNvGrpSpPr/>
+        <p:nvPr/>
+      </p:nvGrpSpPr>
+      <p:grpSpPr/>
+      <p:sp>
+        <p:nvSpPr>
+          <p:cNvPr id="2" name="Rectangle 1"/>
+          <p:cNvSpPr/>
+          <p:nvPr/>
+        </p:nvSpPr>
+        <p:spPr>
+          <a:xfrm>
+            <a:off x="0" y="0"/>
+            <a:ext cx="12191695" cy="384048"/>
+          </a:xfrm>
+          <a:prstGeom prst="rect">
+            <a:avLst/>
+          </a:prstGeom>
+          <a:solidFill>
+            <a:srgbClr val="0B2D5B"/>
+          </a:solidFill>
+          <a:ln>
+            <a:noFill/>
+          </a:ln>
+          <a:effectLst/>
+        </p:spPr>
+        <p:style>
+          <a:lnRef idx="1">
+            <a:schemeClr val="accent1"/>
+          </a:lnRef>
+          <a:fillRef idx="3">
+            <a:schemeClr val="accent1"/>
+          </a:fillRef>
+          <a:effectRef idx="2">
+            <a:schemeClr val="accent1"/>
+          </a:effectRef>
+          <a:fontRef idx="minor">
+            <a:schemeClr val="lt1"/>
+          </a:fontRef>
+        </p:style>
+        <p:txBody>
+          <a:bodyPr rtlCol="0" anchor="ctr"/>
+          <a:lstStyle/>
+          <a:p>
+            <a:pPr algn="ctr"/>
+          </a:p>
+        </p:txBody>
+      </p:sp>
+      <p:sp>
+        <p:nvSpPr>
+          <p:cNvPr id="3" name="TextBox 2"/>
+          <p:cNvSpPr txBox="1"/>
+          <p:nvPr/>
+        </p:nvSpPr>
+        <p:spPr>
+          <a:xfrm>
+            <a:off x="548640" y="100584"/>
+            <a:ext cx="10972800" cy="274320"/>
+          </a:xfrm>
+          <a:prstGeom prst="rect">
+            <a:avLst/>
+          </a:prstGeom>
+          <a:noFill/>
+        </p:spPr>
+        <p:txBody>
+          <a:bodyPr wrap="square" anchor="t" lIns="0" rIns="0" tIns="0" bIns="0">
+            <a:spAutoFit/>
+          </a:bodyPr>
+          <a:lstStyle/>
+          <a:p>
+            <a:pPr algn="l">
+              <a:spcAft>
+                <a:spcPts val="495"/>
+              </a:spcAft>
+            </a:pPr>
+            <a:r>
+              <a:rPr sz="1100" b="1" i="0">
+                <a:solidFill>
+                  <a:srgbClr val="FFFFFF"/>
+                </a:solidFill>
+                <a:latin typeface="Inter Tight"/>
+              </a:rPr>
+              <a:t>TEACHER PAGE  ·  skipped when you present  ·  Before you teach</a:t>
+            </a:r>
+          </a:p>
+        </p:txBody>
+      </p:sp>
+      <p:sp>
+        <p:nvSpPr>
+          <p:cNvPr id="4" name="TextBox 3"/>
+          <p:cNvSpPr txBox="1"/>
+          <p:nvPr/>
+        </p:nvSpPr>
+        <p:spPr>
+          <a:xfrm>
+            <a:off x="548640" y="685800"/>
+            <a:ext cx="10972800" cy="640080"/>
+          </a:xfrm>
+          <a:prstGeom prst="rect">
+            <a:avLst/>
+          </a:prstGeom>
+          <a:noFill/>
+        </p:spPr>
+        <p:txBody>
+          <a:bodyPr wrap="square" anchor="t" lIns="0" rIns="0" tIns="0" bIns="0">
+            <a:spAutoFit/>
+          </a:bodyPr>
+          <a:lstStyle/>
+          <a:p>
+            <a:pPr algn="l">
+              <a:spcAft>
+                <a:spcPts val="1350"/>
+              </a:spcAft>
+            </a:pPr>
+            <a:r>
+              <a:rPr sz="3000" b="1" i="0">
+                <a:solidFill>
+                  <a:srgbClr val="1C1B19"/>
+                </a:solidFill>
+                <a:latin typeface="Source Serif 4"/>
+              </a:rPr>
+              <a:t>Before you teach</a:t>
+            </a:r>
+          </a:p>
+        </p:txBody>
+      </p:sp>
+      <p:sp>
+        <p:nvSpPr>
+          <p:cNvPr id="5" name="TextBox 4"/>
+          <p:cNvSpPr txBox="1"/>
+          <p:nvPr/>
+        </p:nvSpPr>
+        <p:spPr>
+          <a:xfrm>
+            <a:off x="548640" y="1463040"/>
+            <a:ext cx="5394960" cy="4937760"/>
+          </a:xfrm>
+          <a:prstGeom prst="rect">
+            <a:avLst/>
+          </a:prstGeom>
+          <a:noFill/>
+        </p:spPr>
+        <p:txBody>
+          <a:bodyPr wrap="square" anchor="t" lIns="0" rIns="0" tIns="0" bIns="0">
+            <a:spAutoFit/>
+          </a:bodyPr>
+          <a:lstStyle/>
+          <a:p>
+            <a:pPr algn="l">
+              <a:spcAft>
+                <a:spcPts val="585"/>
+              </a:spcAft>
+            </a:pPr>
+            <a:r>
+              <a:rPr sz="1500" b="1" i="0">
+                <a:solidFill>
+                  <a:srgbClr val="1C1B19"/>
+                </a:solidFill>
+                <a:latin typeface="Source Serif 4"/>
+              </a:rPr>
+              <a:t>Let leadership know before you teach it.</a:t>
+            </a:r>
+          </a:p>
+          <a:p>
+            <a:pPr algn="l">
+              <a:spcAft>
+                <a:spcPts val="585"/>
+              </a:spcAft>
+            </a:pPr>
+            <a:r>
+              <a:rPr sz="1300" b="0" i="0">
+                <a:solidFill>
+                  <a:srgbClr val="1C1B19"/>
+                </a:solidFill>
+                <a:latin typeface="Source Serif 4"/>
+              </a:rPr>
+              <a:t>This is the topic most likely to bring a call from a family. Tell your division head or diversity lead you're teaching it, and when. It helps them answer questions, and it helps you if one comes.</a:t>
+            </a:r>
+          </a:p>
+          <a:p>
+            <a:pPr algn="l">
+              <a:spcAft>
+                <a:spcPts val="585"/>
+              </a:spcAft>
+            </a:pPr>
+            <a:r>
+              <a:rPr sz="1300" b="0" i="0">
+                <a:solidFill>
+                  <a:srgbClr val="1C1B19"/>
+                </a:solidFill>
+                <a:latin typeface="Source Serif 4"/>
+              </a:rPr>
+              <a:t/>
+            </a:r>
+          </a:p>
+          <a:p>
+            <a:pPr algn="l">
+              <a:spcAft>
+                <a:spcPts val="585"/>
+              </a:spcAft>
+            </a:pPr>
+            <a:r>
+              <a:rPr sz="1500" b="1" i="0">
+                <a:solidFill>
+                  <a:srgbClr val="1C1B19"/>
+                </a:solidFill>
+                <a:latin typeface="Source Serif 4"/>
+              </a:rPr>
+              <a:t>Go first, with one of your own tailwinds.</a:t>
+            </a:r>
+          </a:p>
+          <a:p>
+            <a:pPr algn="l">
+              <a:spcAft>
+                <a:spcPts val="585"/>
+              </a:spcAft>
+            </a:pPr>
+            <a:r>
+              <a:rPr sz="1300" b="0" i="0">
+                <a:solidFill>
+                  <a:srgbClr val="1C1B19"/>
+                </a:solidFill>
+                <a:latin typeface="Source Serif 4"/>
+              </a:rPr>
+              <a:t>Something real and low-stakes: a parent who could help with homework, a car at sixteen, never being asked where you're really from. When the adult names a tailwind calmly, students learn it's something you can say out loud without falling apart.</a:t>
+            </a:r>
+          </a:p>
+          <a:p>
+            <a:pPr algn="l">
+              <a:spcAft>
+                <a:spcPts val="585"/>
+              </a:spcAft>
+            </a:pPr>
+            <a:r>
+              <a:rPr sz="1300" b="0" i="0">
+                <a:solidFill>
+                  <a:srgbClr val="1C1B19"/>
+                </a:solidFill>
+                <a:latin typeface="Source Serif 4"/>
+              </a:rPr>
+              <a:t/>
+            </a:r>
+          </a:p>
+          <a:p>
+            <a:pPr algn="l">
+              <a:spcAft>
+                <a:spcPts val="585"/>
+              </a:spcAft>
+            </a:pPr>
+            <a:r>
+              <a:rPr sz="1500" b="1" i="0">
+                <a:solidFill>
+                  <a:srgbClr val="1C1B19"/>
+                </a:solidFill>
+                <a:latin typeface="Source Serif 4"/>
+              </a:rPr>
+              <a:t>Students of color are not the lesson.</a:t>
+            </a:r>
+          </a:p>
+          <a:p>
+            <a:pPr algn="l">
+              <a:spcAft>
+                <a:spcPts val="585"/>
+              </a:spcAft>
+            </a:pPr>
+            <a:r>
+              <a:rPr sz="1300" b="0" i="0">
+                <a:solidFill>
+                  <a:srgbClr val="1C1B19"/>
+                </a:solidFill>
+                <a:latin typeface="Source Serif 4"/>
+              </a:rPr>
+              <a:t>Never ask a student to describe their headwinds or speak for a group, and don't let the room turn toward them. Tallies stay private. No privilege walk or any activity that lines students up by advantage: it ranks kids in front of each other.</a:t>
+            </a:r>
+          </a:p>
+          <a:p>
+            <a:pPr algn="l">
+              <a:spcAft>
+                <a:spcPts val="585"/>
+              </a:spcAft>
+            </a:pPr>
+            <a:r>
+              <a:rPr sz="1300" b="0" i="0">
+                <a:solidFill>
+                  <a:srgbClr val="1C1B19"/>
+                </a:solidFill>
+                <a:latin typeface="Source Serif 4"/>
+              </a:rPr>
+              <a:t/>
+            </a:r>
+          </a:p>
+        </p:txBody>
+      </p:sp>
+      <p:sp>
+        <p:nvSpPr>
+          <p:cNvPr id="6" name="TextBox 5"/>
+          <p:cNvSpPr txBox="1"/>
+          <p:nvPr/>
+        </p:nvSpPr>
+        <p:spPr>
+          <a:xfrm>
+            <a:off x="6217920" y="1463040"/>
+            <a:ext cx="5394960" cy="4937760"/>
+          </a:xfrm>
+          <a:prstGeom prst="rect">
+            <a:avLst/>
+          </a:prstGeom>
+          <a:noFill/>
+        </p:spPr>
+        <p:txBody>
+          <a:bodyPr wrap="square" anchor="t" lIns="0" rIns="0" tIns="0" bIns="0">
+            <a:spAutoFit/>
+          </a:bodyPr>
+          <a:lstStyle/>
+          <a:p>
+            <a:pPr algn="l">
+              <a:spcAft>
+                <a:spcPts val="585"/>
+              </a:spcAft>
+            </a:pPr>
+            <a:r>
+              <a:rPr sz="1500" b="1" i="0">
+                <a:solidFill>
+                  <a:srgbClr val="1C1B19"/>
+                </a:solidFill>
+                <a:latin typeface="Source Serif 4"/>
+              </a:rPr>
+              <a:t>Say "not your fault" more than once.</a:t>
+            </a:r>
+          </a:p>
+          <a:p>
+            <a:pPr algn="l">
+              <a:spcAft>
+                <a:spcPts val="585"/>
+              </a:spcAft>
+            </a:pPr>
+            <a:r>
+              <a:rPr sz="1300" b="0" i="0">
+                <a:solidFill>
+                  <a:srgbClr val="1C1B19"/>
+                </a:solidFill>
+                <a:latin typeface="Source Serif 4"/>
+              </a:rPr>
+              <a:t>Separate blame from responsibility out loud, early and again at the end. Defensiveness drops when students hear they aren't being accused.</a:t>
+            </a:r>
+          </a:p>
+          <a:p>
+            <a:pPr algn="l">
+              <a:spcAft>
+                <a:spcPts val="585"/>
+              </a:spcAft>
+            </a:pPr>
+            <a:r>
+              <a:rPr sz="1300" b="0" i="0">
+                <a:solidFill>
+                  <a:srgbClr val="1C1B19"/>
+                </a:solidFill>
+                <a:latin typeface="Source Serif 4"/>
+              </a:rPr>
+              <a:t/>
+            </a:r>
+          </a:p>
+          <a:p>
+            <a:pPr algn="l">
+              <a:spcAft>
+                <a:spcPts val="585"/>
+              </a:spcAft>
+            </a:pPr>
+            <a:r>
+              <a:rPr sz="1500" b="1" i="0">
+                <a:solidFill>
+                  <a:srgbClr val="1C1B19"/>
+                </a:solidFill>
+                <a:latin typeface="Source Serif 4"/>
+              </a:rPr>
+              <a:t>Expect "but I had it hard too."</a:t>
+            </a:r>
+          </a:p>
+          <a:p>
+            <a:pPr algn="l">
+              <a:spcAft>
+                <a:spcPts val="585"/>
+              </a:spcAft>
+            </a:pPr>
+            <a:r>
+              <a:rPr sz="1300" b="0" i="0">
+                <a:solidFill>
+                  <a:srgbClr val="1C1B19"/>
+                </a:solidFill>
+                <a:latin typeface="Source Serif 4"/>
+              </a:rPr>
+              <a:t>Research finds that when white people hear about privilege, many respond by listing their hardships. Treat it as normal, not as an argument to win: "Your headwinds are real. You can have headwinds and tailwinds at the same time."</a:t>
+            </a:r>
+          </a:p>
+          <a:p>
+            <a:pPr algn="l">
+              <a:spcAft>
+                <a:spcPts val="585"/>
+              </a:spcAft>
+            </a:pPr>
+            <a:r>
+              <a:rPr sz="1300" b="0" i="0">
+                <a:solidFill>
+                  <a:srgbClr val="1C1B19"/>
+                </a:solidFill>
+                <a:latin typeface="Source Serif 4"/>
+              </a:rPr>
+              <a:t/>
+            </a:r>
+          </a:p>
+          <a:p>
+            <a:pPr algn="l">
+              <a:spcAft>
+                <a:spcPts val="585"/>
+              </a:spcAft>
+            </a:pPr>
+            <a:r>
+              <a:rPr sz="1500" b="1" i="0">
+                <a:solidFill>
+                  <a:srgbClr val="1C1B19"/>
+                </a:solidFill>
+                <a:latin typeface="Source Serif 4"/>
+              </a:rPr>
+              <a:t>Race and money are different winds.</a:t>
+            </a:r>
+          </a:p>
+          <a:p>
+            <a:pPr algn="l">
+              <a:spcAft>
+                <a:spcPts val="585"/>
+              </a:spcAft>
+            </a:pPr>
+            <a:r>
+              <a:rPr sz="1300" b="0" i="0">
+                <a:solidFill>
+                  <a:srgbClr val="1C1B19"/>
+                </a:solidFill>
+                <a:latin typeface="Source Serif 4"/>
+              </a:rPr>
+              <a:t>One study found that teaching about white privilege on its own made some people less sympathetic toward poor white people. Say clearly that a white student whose family is struggling has real headwinds, and that race and money are separate winds that can blow in different directions.</a:t>
+            </a:r>
+          </a:p>
+          <a:p>
+            <a:pPr algn="l">
+              <a:spcAft>
+                <a:spcPts val="585"/>
+              </a:spcAft>
+            </a:pPr>
+            <a:r>
+              <a:rPr sz="1300" b="0" i="0">
+                <a:solidFill>
+                  <a:srgbClr val="1C1B19"/>
+                </a:solidFill>
+                <a:latin typeface="Source Serif 4"/>
+              </a:rPr>
+              <a:t/>
+            </a:r>
+          </a:p>
+          <a:p>
+            <a:pPr algn="l">
+              <a:spcAft>
+                <a:spcPts val="585"/>
+              </a:spcAft>
+            </a:pPr>
+            <a:r>
+              <a:rPr sz="1500" b="1" i="0">
+                <a:solidFill>
+                  <a:srgbClr val="1C1B19"/>
+                </a:solidFill>
+                <a:latin typeface="Source Serif 4"/>
+              </a:rPr>
+              <a:t>Keep it to everyday moments, not politics.</a:t>
+            </a:r>
+          </a:p>
+          <a:p>
+            <a:pPr algn="l">
+              <a:spcAft>
+                <a:spcPts val="585"/>
+              </a:spcAft>
+            </a:pPr>
+            <a:r>
+              <a:rPr sz="1300" b="0" i="0">
+                <a:solidFill>
+                  <a:srgbClr val="1C1B19"/>
+                </a:solidFill>
+                <a:latin typeface="Source Serif 4"/>
+              </a:rPr>
+              <a:t>If a student says this is political, try: "Today we're looking at everyday moments, like who gets followed in a store. You can disagree with me. I'm asking you to notice." Don't debate policies or parties.</a:t>
+            </a:r>
+          </a:p>
+          <a:p>
+            <a:pPr algn="l">
+              <a:spcAft>
+                <a:spcPts val="585"/>
+              </a:spcAft>
+            </a:pPr>
+            <a:r>
+              <a:rPr sz="1300" b="0" i="0">
+                <a:solidFill>
+                  <a:srgbClr val="1C1B19"/>
+                </a:solidFill>
+                <a:latin typeface="Source Serif 4"/>
+              </a:rPr>
+              <a:t/>
+            </a:r>
+          </a:p>
+          <a:p>
+            <a:pPr algn="l">
+              <a:spcAft>
+                <a:spcPts val="585"/>
+              </a:spcAft>
+            </a:pPr>
+            <a:r>
+              <a:rPr sz="1500" b="1" i="0">
+                <a:solidFill>
+                  <a:srgbClr val="1C1B19"/>
+                </a:solidFill>
+                <a:latin typeface="Source Serif 4"/>
+              </a:rPr>
+              <a:t>Watch for students carrying a lot.</a:t>
+            </a:r>
+          </a:p>
+          <a:p>
+            <a:pPr algn="l">
+              <a:spcAft>
+                <a:spcPts val="585"/>
+              </a:spcAft>
+            </a:pPr>
+            <a:r>
+              <a:rPr sz="1300" b="0" i="0">
+                <a:solidFill>
+                  <a:srgbClr val="1C1B19"/>
+                </a:solidFill>
+                <a:latin typeface="Source Serif 4"/>
+              </a:rPr>
+              <a:t>A student who seems hurt, angry or shut down, or who describes being targeted for who they are, is worth a quiet check-in after advisory and a same-day note to a counselor.</a:t>
+            </a:r>
+          </a:p>
+          <a:p>
+            <a:pPr algn="l">
+              <a:spcAft>
+                <a:spcPts val="585"/>
+              </a:spcAft>
+            </a:pPr>
+            <a:r>
+              <a:rPr sz="1300" b="0" i="0">
+                <a:solidFill>
+                  <a:srgbClr val="1C1B19"/>
+                </a:solidFill>
+                <a:latin typeface="Source Serif 4"/>
+              </a:rPr>
+              <a:t/>
+            </a:r>
+          </a:p>
+        </p:txBody>
+      </p:sp>
+    </p:spTree>
+  </p:cSld>
+  <p:clrMapOvr>
+    <a:masterClrMapping/>
+  </p:clrMapOvr>
+</p:sld>
+</file>
+
+<file path=ppt/slides/slide12.xml><?xml version="1.0" encoding="utf-8"?>
+<p:sld xmlns:a="http://schemas.openxmlformats.org/drawingml/2006/main" xmlns:p="http://schemas.openxmlformats.org/presentationml/2006/main" xmlns:r="http://schemas.openxmlformats.org/officeDocument/2006/relationships" show="0">
+  <p:cSld>
+    <p:bg>
+      <p:bgPr>
+        <a:solidFill>
+          <a:srgbClr val="EEEBE4"/>
+        </a:solidFill>
+        <a:effectLst/>
+      </p:bgPr>
+    </p:bg>
+    <p:spTree>
+      <p:nvGrpSpPr>
+        <p:cNvPr id="1" name=""/>
+        <p:cNvGrpSpPr/>
+        <p:nvPr/>
+      </p:nvGrpSpPr>
+      <p:grpSpPr/>
+      <p:sp>
+        <p:nvSpPr>
+          <p:cNvPr id="2" name="Rectangle 1"/>
+          <p:cNvSpPr/>
+          <p:nvPr/>
+        </p:nvSpPr>
+        <p:spPr>
+          <a:xfrm>
+            <a:off x="0" y="0"/>
+            <a:ext cx="12191695" cy="384048"/>
+          </a:xfrm>
+          <a:prstGeom prst="rect">
+            <a:avLst/>
+          </a:prstGeom>
+          <a:solidFill>
+            <a:srgbClr val="0B2D5B"/>
+          </a:solidFill>
+          <a:ln>
+            <a:noFill/>
+          </a:ln>
+          <a:effectLst/>
+        </p:spPr>
+        <p:style>
+          <a:lnRef idx="1">
+            <a:schemeClr val="accent1"/>
+          </a:lnRef>
+          <a:fillRef idx="3">
+            <a:schemeClr val="accent1"/>
+          </a:fillRef>
+          <a:effectRef idx="2">
+            <a:schemeClr val="accent1"/>
+          </a:effectRef>
+          <a:fontRef idx="minor">
+            <a:schemeClr val="lt1"/>
+          </a:fontRef>
+        </p:style>
+        <p:txBody>
+          <a:bodyPr rtlCol="0" anchor="ctr"/>
+          <a:lstStyle/>
+          <a:p>
+            <a:pPr algn="ctr"/>
+          </a:p>
+        </p:txBody>
+      </p:sp>
+      <p:sp>
+        <p:nvSpPr>
+          <p:cNvPr id="3" name="TextBox 2"/>
+          <p:cNvSpPr txBox="1"/>
+          <p:nvPr/>
+        </p:nvSpPr>
+        <p:spPr>
+          <a:xfrm>
+            <a:off x="548640" y="100584"/>
+            <a:ext cx="10972800" cy="274320"/>
+          </a:xfrm>
+          <a:prstGeom prst="rect">
+            <a:avLst/>
+          </a:prstGeom>
+          <a:noFill/>
+        </p:spPr>
+        <p:txBody>
+          <a:bodyPr wrap="square" anchor="t" lIns="0" rIns="0" tIns="0" bIns="0">
+            <a:spAutoFit/>
+          </a:bodyPr>
+          <a:lstStyle/>
+          <a:p>
+            <a:pPr algn="l">
+              <a:spcAft>
+                <a:spcPts val="495"/>
+              </a:spcAft>
+            </a:pPr>
+            <a:r>
+              <a:rPr sz="1100" b="1" i="0">
+                <a:solidFill>
+                  <a:srgbClr val="FFFFFF"/>
+                </a:solidFill>
+                <a:latin typeface="Inter Tight"/>
+              </a:rPr>
+              <a:t>TEACHER PAGE  ·  skipped when you present  ·  Every student in the room</a:t>
+            </a:r>
+          </a:p>
+        </p:txBody>
+      </p:sp>
+      <p:sp>
+        <p:nvSpPr>
+          <p:cNvPr id="4" name="TextBox 3"/>
+          <p:cNvSpPr txBox="1"/>
+          <p:nvPr/>
+        </p:nvSpPr>
+        <p:spPr>
+          <a:xfrm>
+            <a:off x="548640" y="685800"/>
+            <a:ext cx="10972800" cy="640080"/>
+          </a:xfrm>
+          <a:prstGeom prst="rect">
+            <a:avLst/>
+          </a:prstGeom>
+          <a:noFill/>
+        </p:spPr>
+        <p:txBody>
+          <a:bodyPr wrap="square" anchor="t" lIns="0" rIns="0" tIns="0" bIns="0">
+            <a:spAutoFit/>
+          </a:bodyPr>
+          <a:lstStyle/>
+          <a:p>
+            <a:pPr algn="l">
+              <a:spcAft>
+                <a:spcPts val="1350"/>
+              </a:spcAft>
+            </a:pPr>
+            <a:r>
+              <a:rPr sz="3000" b="1" i="0">
+                <a:solidFill>
+                  <a:srgbClr val="1C1B19"/>
+                </a:solidFill>
+                <a:latin typeface="Source Serif 4"/>
+              </a:rPr>
+              <a:t>Every student in the room</a:t>
+            </a:r>
+          </a:p>
+        </p:txBody>
+      </p:sp>
+      <p:sp>
+        <p:nvSpPr>
+          <p:cNvPr id="5" name="TextBox 4"/>
+          <p:cNvSpPr txBox="1"/>
+          <p:nvPr/>
+        </p:nvSpPr>
+        <p:spPr>
+          <a:xfrm>
+            <a:off x="548640" y="1325880"/>
+            <a:ext cx="10972800" cy="365760"/>
+          </a:xfrm>
+          <a:prstGeom prst="rect">
+            <a:avLst/>
+          </a:prstGeom>
+          <a:noFill/>
+        </p:spPr>
+        <p:txBody>
+          <a:bodyPr wrap="square" anchor="t" lIns="0" rIns="0" tIns="0" bIns="0">
+            <a:spAutoFit/>
+          </a:bodyPr>
+          <a:lstStyle/>
+          <a:p>
+            <a:pPr algn="l">
+              <a:spcAft>
+                <a:spcPts val="630"/>
+              </a:spcAft>
+            </a:pPr>
+            <a:r>
+              <a:rPr sz="1400" b="0" i="0">
+                <a:solidFill>
+                  <a:srgbClr val="5D5A54"/>
+                </a:solidFill>
+                <a:latin typeface="Inter Tight"/>
+              </a:rPr>
+              <a:t>Culture, family, identity, ability and money: what to keep in mind for this topic.</a:t>
+            </a:r>
+          </a:p>
+        </p:txBody>
+      </p:sp>
+      <p:sp>
+        <p:nvSpPr>
+          <p:cNvPr id="6" name="TextBox 5"/>
+          <p:cNvSpPr txBox="1"/>
+          <p:nvPr/>
+        </p:nvSpPr>
+        <p:spPr>
+          <a:xfrm>
+            <a:off x="548640" y="1828800"/>
+            <a:ext cx="5394960" cy="4572000"/>
+          </a:xfrm>
+          <a:prstGeom prst="rect">
+            <a:avLst/>
+          </a:prstGeom>
+          <a:noFill/>
+        </p:spPr>
+        <p:txBody>
+          <a:bodyPr wrap="square" anchor="t" lIns="0" rIns="0" tIns="0" bIns="0">
+            <a:spAutoFit/>
+          </a:bodyPr>
+          <a:lstStyle/>
+          <a:p>
+            <a:pPr algn="l">
+              <a:spcAft>
+                <a:spcPts val="585"/>
+              </a:spcAft>
+            </a:pPr>
+            <a:r>
+              <a:rPr sz="1500" b="1" i="0">
+                <a:solidFill>
+                  <a:srgbClr val="1C1B19"/>
+                </a:solidFill>
+                <a:latin typeface="Source Serif 4"/>
+              </a:rPr>
+              <a:t>Students of color.</a:t>
+            </a:r>
+          </a:p>
+          <a:p>
+            <a:pPr algn="l">
+              <a:spcAft>
+                <a:spcPts val="585"/>
+              </a:spcAft>
+            </a:pPr>
+            <a:r>
+              <a:rPr sz="1300" b="0" i="0">
+                <a:solidFill>
+                  <a:srgbClr val="1C1B19"/>
+                </a:solidFill>
+                <a:latin typeface="Source Serif 4"/>
+              </a:rPr>
+              <a:t>Some will feel relief that this is named, some will feel tired of hearing it again, and some won't want attention on it at all. All three are fair. Give them the same choice to stay quiet that everyone else has.</a:t>
+            </a:r>
+          </a:p>
+          <a:p>
+            <a:pPr algn="l">
+              <a:spcAft>
+                <a:spcPts val="585"/>
+              </a:spcAft>
+            </a:pPr>
+            <a:r>
+              <a:rPr sz="1300" b="0" i="0">
+                <a:solidFill>
+                  <a:srgbClr val="1C1B19"/>
+                </a:solidFill>
+                <a:latin typeface="Source Serif 4"/>
+              </a:rPr>
+              <a:t/>
+            </a:r>
+          </a:p>
+          <a:p>
+            <a:pPr algn="l">
+              <a:spcAft>
+                <a:spcPts val="585"/>
+              </a:spcAft>
+            </a:pPr>
+            <a:r>
+              <a:rPr sz="1500" b="1" i="0">
+                <a:solidFill>
+                  <a:srgbClr val="1C1B19"/>
+                </a:solidFill>
+                <a:latin typeface="Source Serif 4"/>
+              </a:rPr>
+              <a:t>White students with real headwinds.</a:t>
+            </a:r>
+          </a:p>
+          <a:p>
+            <a:pPr algn="l">
+              <a:spcAft>
+                <a:spcPts val="585"/>
+              </a:spcAft>
+            </a:pPr>
+            <a:r>
+              <a:rPr sz="1300" b="0" i="0">
+                <a:solidFill>
+                  <a:srgbClr val="1C1B19"/>
+                </a:solidFill>
+                <a:latin typeface="Source Serif 4"/>
+              </a:rPr>
+              <a:t>Poverty, a disability, a family crisis, being LGBTQ+, a parent who's sick. The lesson only works if these are taken seriously alongside race.</a:t>
+            </a:r>
+          </a:p>
+          <a:p>
+            <a:pPr algn="l">
+              <a:spcAft>
+                <a:spcPts val="585"/>
+              </a:spcAft>
+            </a:pPr>
+            <a:r>
+              <a:rPr sz="1300" b="0" i="0">
+                <a:solidFill>
+                  <a:srgbClr val="1C1B19"/>
+                </a:solidFill>
+                <a:latin typeface="Source Serif 4"/>
+              </a:rPr>
+              <a:t/>
+            </a:r>
+          </a:p>
+          <a:p>
+            <a:pPr algn="l">
+              <a:spcAft>
+                <a:spcPts val="585"/>
+              </a:spcAft>
+            </a:pPr>
+            <a:r>
+              <a:rPr sz="1500" b="1" i="0">
+                <a:solidFill>
+                  <a:srgbClr val="1C1B19"/>
+                </a:solidFill>
+                <a:latin typeface="Source Serif 4"/>
+              </a:rPr>
+              <a:t>Who counts as white is complicated.</a:t>
+            </a:r>
+          </a:p>
+          <a:p>
+            <a:pPr algn="l">
+              <a:spcAft>
+                <a:spcPts val="585"/>
+              </a:spcAft>
+            </a:pPr>
+            <a:r>
+              <a:rPr sz="1300" b="0" i="0">
+                <a:solidFill>
+                  <a:srgbClr val="1C1B19"/>
+                </a:solidFill>
+                <a:latin typeface="Source Serif 4"/>
+              </a:rPr>
+              <a:t>Many Jewish, Middle Eastern and North African, Latino and multiracial students have a complicated relationship with the word white, and it can change depending on where they are. Let students name themselves, and don't sort anyone.</a:t>
+            </a:r>
+          </a:p>
+          <a:p>
+            <a:pPr algn="l">
+              <a:spcAft>
+                <a:spcPts val="585"/>
+              </a:spcAft>
+            </a:pPr>
+            <a:r>
+              <a:rPr sz="1300" b="0" i="0">
+                <a:solidFill>
+                  <a:srgbClr val="1C1B19"/>
+                </a:solidFill>
+                <a:latin typeface="Source Serif 4"/>
+              </a:rPr>
+              <a:t/>
+            </a:r>
+          </a:p>
+        </p:txBody>
+      </p:sp>
+      <p:sp>
+        <p:nvSpPr>
+          <p:cNvPr id="7" name="TextBox 6"/>
+          <p:cNvSpPr txBox="1"/>
+          <p:nvPr/>
+        </p:nvSpPr>
+        <p:spPr>
+          <a:xfrm>
+            <a:off x="6217920" y="1828800"/>
+            <a:ext cx="5394960" cy="4572000"/>
+          </a:xfrm>
+          <a:prstGeom prst="rect">
+            <a:avLst/>
+          </a:prstGeom>
+          <a:noFill/>
+        </p:spPr>
+        <p:txBody>
+          <a:bodyPr wrap="square" anchor="t" lIns="0" rIns="0" tIns="0" bIns="0">
+            <a:spAutoFit/>
+          </a:bodyPr>
+          <a:lstStyle/>
+          <a:p>
+            <a:pPr algn="l">
+              <a:spcAft>
+                <a:spcPts val="585"/>
+              </a:spcAft>
+            </a:pPr>
+            <a:r>
+              <a:rPr sz="1500" b="1" i="0">
+                <a:solidFill>
+                  <a:srgbClr val="1C1B19"/>
+                </a:solidFill>
+                <a:latin typeface="Source Serif 4"/>
+              </a:rPr>
+              <a:t>International and immigrant students.</a:t>
+            </a:r>
+          </a:p>
+          <a:p>
+            <a:pPr algn="l">
+              <a:spcAft>
+                <a:spcPts val="585"/>
+              </a:spcAft>
+            </a:pPr>
+            <a:r>
+              <a:rPr sz="1300" b="0" i="0">
+                <a:solidFill>
+                  <a:srgbClr val="1C1B19"/>
+                </a:solidFill>
+                <a:latin typeface="Source Serif 4"/>
+              </a:rPr>
+              <a:t>Race works differently in other countries. A student may be in the majority at home and a minority here, or the other way around. That's a useful thing to notice, not a correction to make.</a:t>
+            </a:r>
+          </a:p>
+          <a:p>
+            <a:pPr algn="l">
+              <a:spcAft>
+                <a:spcPts val="585"/>
+              </a:spcAft>
+            </a:pPr>
+            <a:r>
+              <a:rPr sz="1300" b="0" i="0">
+                <a:solidFill>
+                  <a:srgbClr val="1C1B19"/>
+                </a:solidFill>
+                <a:latin typeface="Source Serif 4"/>
+              </a:rPr>
+              <a:t/>
+            </a:r>
+          </a:p>
+          <a:p>
+            <a:pPr algn="l">
+              <a:spcAft>
+                <a:spcPts val="585"/>
+              </a:spcAft>
+            </a:pPr>
+            <a:r>
+              <a:rPr sz="1500" b="1" i="0">
+                <a:solidFill>
+                  <a:srgbClr val="1C1B19"/>
+                </a:solidFill>
+                <a:latin typeface="Source Serif 4"/>
+              </a:rPr>
+              <a:t>Families disagree about this.</a:t>
+            </a:r>
+          </a:p>
+          <a:p>
+            <a:pPr algn="l">
+              <a:spcAft>
+                <a:spcPts val="585"/>
+              </a:spcAft>
+            </a:pPr>
+            <a:r>
+              <a:rPr sz="1300" b="0" i="0">
+                <a:solidFill>
+                  <a:srgbClr val="1C1B19"/>
+                </a:solidFill>
+                <a:latin typeface="Source Serif 4"/>
+              </a:rPr>
+              <a:t>Students come from homes with different politics and faiths. The lesson asks them to notice everyday moments, not to adopt a view. Respect disagreement, and keep dignity for everyone in the room.</a:t>
+            </a:r>
+          </a:p>
+          <a:p>
+            <a:pPr algn="l">
+              <a:spcAft>
+                <a:spcPts val="585"/>
+              </a:spcAft>
+            </a:pPr>
+            <a:r>
+              <a:rPr sz="1300" b="0" i="0">
+                <a:solidFill>
+                  <a:srgbClr val="1C1B19"/>
+                </a:solidFill>
+                <a:latin typeface="Source Serif 4"/>
+              </a:rPr>
+              <a:t/>
+            </a:r>
+          </a:p>
+          <a:p>
+            <a:pPr algn="l">
+              <a:spcAft>
+                <a:spcPts val="585"/>
+              </a:spcAft>
+            </a:pPr>
+            <a:r>
+              <a:rPr sz="1500" b="1" i="0">
+                <a:solidFill>
+                  <a:srgbClr val="1C1B19"/>
+                </a:solidFill>
+                <a:latin typeface="Source Serif 4"/>
+              </a:rPr>
+              <a:t>Other tailwinds.</a:t>
+            </a:r>
+          </a:p>
+          <a:p>
+            <a:pPr algn="l">
+              <a:spcAft>
+                <a:spcPts val="585"/>
+              </a:spcAft>
+            </a:pPr>
+            <a:r>
+              <a:rPr sz="1300" b="0" i="0">
+                <a:solidFill>
+                  <a:srgbClr val="1C1B19"/>
+                </a:solidFill>
+                <a:latin typeface="Source Serif 4"/>
+              </a:rPr>
+              <a:t>Money, citizenship, English at home, ability, gender, being straight or cisgender, parents who went to college. Name several so the idea is clear, then name race directly so it doesn't get lost.</a:t>
+            </a:r>
+          </a:p>
+          <a:p>
+            <a:pPr algn="l">
+              <a:spcAft>
+                <a:spcPts val="585"/>
+              </a:spcAft>
+            </a:pPr>
+            <a:r>
+              <a:rPr sz="1300" b="0" i="0">
+                <a:solidFill>
+                  <a:srgbClr val="1C1B19"/>
+                </a:solidFill>
+                <a:latin typeface="Source Serif 4"/>
+              </a:rPr>
+              <a:t/>
+            </a:r>
+          </a:p>
+          <a:p>
+            <a:pPr algn="l">
+              <a:spcAft>
+                <a:spcPts val="585"/>
+              </a:spcAft>
+            </a:pPr>
+            <a:r>
+              <a:rPr sz="1500" b="1" i="0">
+                <a:solidFill>
+                  <a:srgbClr val="1C1B19"/>
+                </a:solidFill>
+                <a:latin typeface="Source Serif 4"/>
+              </a:rPr>
+              <a:t>Show who rides at the front.</a:t>
+            </a:r>
+          </a:p>
+          <a:p>
+            <a:pPr algn="l">
+              <a:spcAft>
+                <a:spcPts val="585"/>
+              </a:spcAft>
+            </a:pPr>
+            <a:r>
+              <a:rPr sz="1300" b="0" i="0">
+                <a:solidFill>
+                  <a:srgbClr val="1C1B19"/>
+                </a:solidFill>
+                <a:latin typeface="Source Serif 4"/>
+              </a:rPr>
+              <a:t>If you use the L39ION clip, let it stand as a team at the top of its sport, not as a lesson about hardship. Justin Williams built it to widen who gets to see themselves in cycling.</a:t>
+            </a:r>
+          </a:p>
+          <a:p>
+            <a:pPr algn="l">
+              <a:spcAft>
+                <a:spcPts val="585"/>
+              </a:spcAft>
+            </a:pPr>
+            <a:r>
+              <a:rPr sz="1300" b="0" i="0">
+                <a:solidFill>
+                  <a:srgbClr val="1C1B19"/>
+                </a:solidFill>
+                <a:latin typeface="Source Serif 4"/>
+              </a:rPr>
+              <a:t/>
+            </a:r>
+          </a:p>
+        </p:txBody>
+      </p:sp>
+    </p:spTree>
+  </p:cSld>
+  <p:clrMapOvr>
+    <a:masterClrMapping/>
+  </p:clrMapOvr>
+</p:sld>
+</file>
+
+<file path=ppt/slides/slide13.xml><?xml version="1.0" encoding="utf-8"?>
+<p:sld xmlns:a="http://schemas.openxmlformats.org/drawingml/2006/main" xmlns:p="http://schemas.openxmlformats.org/presentationml/2006/main" xmlns:r="http://schemas.openxmlformats.org/officeDocument/2006/relationships" show="0">
+  <p:cSld>
+    <p:bg>
+      <p:bgPr>
+        <a:solidFill>
+          <a:srgbClr val="EEEBE4"/>
+        </a:solidFill>
+        <a:effectLst/>
+      </p:bgPr>
+    </p:bg>
+    <p:spTree>
+      <p:nvGrpSpPr>
+        <p:cNvPr id="1" name=""/>
+        <p:cNvGrpSpPr/>
+        <p:nvPr/>
+      </p:nvGrpSpPr>
+      <p:grpSpPr/>
+      <p:sp>
+        <p:nvSpPr>
+          <p:cNvPr id="2" name="Rectangle 1"/>
+          <p:cNvSpPr/>
+          <p:nvPr/>
+        </p:nvSpPr>
+        <p:spPr>
+          <a:xfrm>
+            <a:off x="0" y="0"/>
+            <a:ext cx="12191695" cy="384048"/>
+          </a:xfrm>
+          <a:prstGeom prst="rect">
+            <a:avLst/>
+          </a:prstGeom>
+          <a:solidFill>
+            <a:srgbClr val="0B2D5B"/>
+          </a:solidFill>
+          <a:ln>
+            <a:noFill/>
+          </a:ln>
+          <a:effectLst/>
+        </p:spPr>
+        <p:style>
+          <a:lnRef idx="1">
+            <a:schemeClr val="accent1"/>
+          </a:lnRef>
+          <a:fillRef idx="3">
+            <a:schemeClr val="accent1"/>
+          </a:fillRef>
+          <a:effectRef idx="2">
+            <a:schemeClr val="accent1"/>
+          </a:effectRef>
+          <a:fontRef idx="minor">
+            <a:schemeClr val="lt1"/>
+          </a:fontRef>
+        </p:style>
+        <p:txBody>
+          <a:bodyPr rtlCol="0" anchor="ctr"/>
+          <a:lstStyle/>
+          <a:p>
+            <a:pPr algn="ctr"/>
+          </a:p>
+        </p:txBody>
+      </p:sp>
+      <p:sp>
+        <p:nvSpPr>
+          <p:cNvPr id="3" name="TextBox 2"/>
+          <p:cNvSpPr txBox="1"/>
+          <p:nvPr/>
+        </p:nvSpPr>
+        <p:spPr>
+          <a:xfrm>
+            <a:off x="548640" y="100584"/>
+            <a:ext cx="10972800" cy="274320"/>
+          </a:xfrm>
+          <a:prstGeom prst="rect">
+            <a:avLst/>
+          </a:prstGeom>
+          <a:noFill/>
+        </p:spPr>
+        <p:txBody>
+          <a:bodyPr wrap="square" anchor="t" lIns="0" rIns="0" tIns="0" bIns="0">
+            <a:spAutoFit/>
+          </a:bodyPr>
+          <a:lstStyle/>
+          <a:p>
+            <a:pPr algn="l">
+              <a:spcAft>
+                <a:spcPts val="495"/>
+              </a:spcAft>
+            </a:pPr>
+            <a:r>
+              <a:rPr sz="1100" b="1" i="0">
+                <a:solidFill>
+                  <a:srgbClr val="FFFFFF"/>
+                </a:solidFill>
+                <a:latin typeface="Inter Tight"/>
+              </a:rPr>
+              <a:t>TEACHER PAGE  ·  skipped when you present  ·  Background</a:t>
+            </a:r>
+          </a:p>
+        </p:txBody>
+      </p:sp>
+      <p:sp>
+        <p:nvSpPr>
+          <p:cNvPr id="4" name="TextBox 3"/>
+          <p:cNvSpPr txBox="1"/>
+          <p:nvPr/>
+        </p:nvSpPr>
+        <p:spPr>
+          <a:xfrm>
+            <a:off x="548640" y="685800"/>
+            <a:ext cx="10972800" cy="640080"/>
+          </a:xfrm>
+          <a:prstGeom prst="rect">
+            <a:avLst/>
+          </a:prstGeom>
+          <a:noFill/>
+        </p:spPr>
+        <p:txBody>
+          <a:bodyPr wrap="square" anchor="t" lIns="0" rIns="0" tIns="0" bIns="0">
+            <a:spAutoFit/>
+          </a:bodyPr>
+          <a:lstStyle/>
+          <a:p>
+            <a:pPr algn="l">
+              <a:spcAft>
+                <a:spcPts val="1350"/>
+              </a:spcAft>
+            </a:pPr>
+            <a:r>
+              <a:rPr sz="3000" b="1" i="0">
+                <a:solidFill>
+                  <a:srgbClr val="1C1B19"/>
+                </a:solidFill>
+                <a:latin typeface="Source Serif 4"/>
+              </a:rPr>
+              <a:t>What the research says</a:t>
+            </a:r>
+          </a:p>
+        </p:txBody>
+      </p:sp>
+      <p:sp>
+        <p:nvSpPr>
+          <p:cNvPr id="5" name="TextBox 4"/>
+          <p:cNvSpPr txBox="1"/>
+          <p:nvPr/>
+        </p:nvSpPr>
+        <p:spPr>
+          <a:xfrm>
+            <a:off x="548640" y="1463040"/>
+            <a:ext cx="5394960" cy="4937760"/>
+          </a:xfrm>
+          <a:prstGeom prst="rect">
+            <a:avLst/>
+          </a:prstGeom>
+          <a:noFill/>
+        </p:spPr>
+        <p:txBody>
+          <a:bodyPr wrap="square" anchor="t" lIns="0" rIns="0" tIns="0" bIns="0">
+            <a:spAutoFit/>
+          </a:bodyPr>
+          <a:lstStyle/>
+          <a:p>
+            <a:pPr algn="l">
+              <a:spcAft>
+                <a:spcPts val="585"/>
+              </a:spcAft>
+            </a:pPr>
+            <a:r>
+              <a:rPr sz="1300" b="0" i="0">
+                <a:solidFill>
+                  <a:srgbClr val="1C1B19"/>
+                </a:solidFill>
+                <a:latin typeface="Source Serif 4"/>
+              </a:rPr>
+              <a:t>Across seven studies, people saw the obstacles they faced much more readily than the advantages that helped them, and this was explained by obstacles being easier to bring to mind.</a:t>
+            </a:r>
+          </a:p>
+          <a:p>
+            <a:pPr algn="l">
+              <a:spcAft>
+                <a:spcPts val="585"/>
+              </a:spcAft>
+            </a:pPr>
+            <a:r>
+              <a:rPr sz="1050" b="0" i="0">
+                <a:solidFill>
+                  <a:srgbClr val="5D5A54"/>
+                </a:solidFill>
+                <a:latin typeface="Inter Tight"/>
+              </a:rPr>
+              <a:t>Davidai &amp; Gilovich, Journal of Personality and Social Psychology, 2016</a:t>
+            </a:r>
+          </a:p>
+          <a:p>
+            <a:pPr algn="l">
+              <a:spcAft>
+                <a:spcPts val="585"/>
+              </a:spcAft>
+            </a:pPr>
+            <a:r>
+              <a:rPr sz="1300" b="0" i="0">
+                <a:solidFill>
+                  <a:srgbClr val="1C1B19"/>
+                </a:solidFill>
+                <a:latin typeface="Source Serif 4"/>
+              </a:rPr>
+              <a:t>In wind tunnel and computer simulations of a 121-rider peloton, riders in the middle and back faced as little as 5 to 10 percent of the air resistance of a rider alone. Earlier research on small groups found drag reductions of roughly 30 to 50 percent.</a:t>
+            </a:r>
+          </a:p>
+          <a:p>
+            <a:pPr algn="l">
+              <a:spcAft>
+                <a:spcPts val="585"/>
+              </a:spcAft>
+            </a:pPr>
+            <a:r>
+              <a:rPr sz="1050" b="0" i="0">
+                <a:solidFill>
+                  <a:srgbClr val="5D5A54"/>
+                </a:solidFill>
+                <a:latin typeface="Inter Tight"/>
+              </a:rPr>
+              <a:t>Blocken et al., Journal of Wind Engineering and Industrial Aerodynamics, 2018</a:t>
+            </a:r>
+          </a:p>
+          <a:p>
+            <a:pPr algn="l">
+              <a:spcAft>
+                <a:spcPts val="585"/>
+              </a:spcAft>
+            </a:pPr>
+            <a:r>
+              <a:rPr sz="1300" b="0" i="0">
+                <a:solidFill>
+                  <a:srgbClr val="1C1B19"/>
+                </a:solidFill>
+                <a:latin typeface="Source Serif 4"/>
+              </a:rPr>
+              <a:t>Fictional resumes with names common among white Americans received about 50 percent more callbacks than the same resumes with names common among Black Americans.</a:t>
+            </a:r>
+          </a:p>
+          <a:p>
+            <a:pPr algn="l">
+              <a:spcAft>
+                <a:spcPts val="585"/>
+              </a:spcAft>
+            </a:pPr>
+            <a:r>
+              <a:rPr sz="1050" b="0" i="0">
+                <a:solidFill>
+                  <a:srgbClr val="5D5A54"/>
+                </a:solidFill>
+                <a:latin typeface="Inter Tight"/>
+              </a:rPr>
+              <a:t>Bertrand &amp; Mullainathan, American Economic Review, 2004</a:t>
+            </a:r>
+          </a:p>
+        </p:txBody>
+      </p:sp>
+      <p:sp>
+        <p:nvSpPr>
+          <p:cNvPr id="6" name="TextBox 5"/>
+          <p:cNvSpPr txBox="1"/>
+          <p:nvPr/>
+        </p:nvSpPr>
+        <p:spPr>
+          <a:xfrm>
+            <a:off x="6217920" y="1463040"/>
+            <a:ext cx="5394960" cy="4937760"/>
+          </a:xfrm>
+          <a:prstGeom prst="rect">
+            <a:avLst/>
+          </a:prstGeom>
+          <a:noFill/>
+        </p:spPr>
+        <p:txBody>
+          <a:bodyPr wrap="square" anchor="t" lIns="0" rIns="0" tIns="0" bIns="0">
+            <a:spAutoFit/>
+          </a:bodyPr>
+          <a:lstStyle/>
+          <a:p>
+            <a:pPr algn="l">
+              <a:spcAft>
+                <a:spcPts val="585"/>
+              </a:spcAft>
+            </a:pPr>
+            <a:r>
+              <a:rPr sz="1300" b="0" i="0">
+                <a:solidFill>
+                  <a:srgbClr val="1C1B19"/>
+                </a:solidFill>
+                <a:latin typeface="Source Serif 4"/>
+              </a:rPr>
+              <a:t>White participants shown evidence of racial privilege claimed more personal hardships; a short values affirmation reversed this, and affirmed participants acknowledged more personal privilege.</a:t>
+            </a:r>
+          </a:p>
+          <a:p>
+            <a:pPr algn="l">
+              <a:spcAft>
+                <a:spcPts val="585"/>
+              </a:spcAft>
+            </a:pPr>
+            <a:r>
+              <a:rPr sz="1050" b="0" i="0">
+                <a:solidFill>
+                  <a:srgbClr val="5D5A54"/>
+                </a:solidFill>
+                <a:latin typeface="Inter Tight"/>
+              </a:rPr>
+              <a:t>Phillips &amp; Lowery, Journal of Experimental Social Psychology, 2015</a:t>
+            </a:r>
+          </a:p>
+          <a:p>
+            <a:pPr algn="l">
+              <a:spcAft>
+                <a:spcPts val="585"/>
+              </a:spcAft>
+            </a:pPr>
+            <a:r>
+              <a:rPr sz="1300" b="0" i="0">
+                <a:solidFill>
+                  <a:srgbClr val="1C1B19"/>
+                </a:solidFill>
+                <a:latin typeface="Source Serif 4"/>
+              </a:rPr>
+              <a:t>White participants saw inequality as more threatening when it was framed as white advantage than as Black disadvantage; self-affirmation increased their acknowledgment of privilege.</a:t>
+            </a:r>
+          </a:p>
+          <a:p>
+            <a:pPr algn="l">
+              <a:spcAft>
+                <a:spcPts val="585"/>
+              </a:spcAft>
+            </a:pPr>
+            <a:r>
+              <a:rPr sz="1050" b="0" i="0">
+                <a:solidFill>
+                  <a:srgbClr val="5D5A54"/>
+                </a:solidFill>
+                <a:latin typeface="Inter Tight"/>
+              </a:rPr>
+              <a:t>Lowery, Knowles &amp; Unzueta, Personality and Social Psychology Bulletin, 2007</a:t>
+            </a:r>
+          </a:p>
+          <a:p>
+            <a:pPr algn="l">
+              <a:spcAft>
+                <a:spcPts val="585"/>
+              </a:spcAft>
+            </a:pPr>
+            <a:r>
+              <a:rPr sz="1300" b="0" i="0">
+                <a:solidFill>
+                  <a:srgbClr val="1C1B19"/>
+                </a:solidFill>
+                <a:latin typeface="Source Serif 4"/>
+              </a:rPr>
+              <a:t>Among social liberals, reading about white privilege reduced sympathy for a poor white person and increased blame toward him, compared with a poor Black person.</a:t>
+            </a:r>
+          </a:p>
+          <a:p>
+            <a:pPr algn="l">
+              <a:spcAft>
+                <a:spcPts val="585"/>
+              </a:spcAft>
+            </a:pPr>
+            <a:r>
+              <a:rPr sz="1050" b="0" i="0">
+                <a:solidFill>
+                  <a:srgbClr val="5D5A54"/>
+                </a:solidFill>
+                <a:latin typeface="Inter Tight"/>
+              </a:rPr>
+              <a:t>Cooley et al., Journal of Experimental Psychology: General, 2019</a:t>
+            </a:r>
+          </a:p>
+        </p:txBody>
+      </p:sp>
+    </p:spTree>
+  </p:cSld>
+  <p:clrMapOvr>
+    <a:masterClrMapping/>
+  </p:clrMapOvr>
+</p:sld>
+</file>
+
+<file path=ppt/slides/slide2.xml><?xml version="1.0" encoding="utf-8"?>
+<p:sld xmlns:a="http://schemas.openxmlformats.org/drawingml/2006/main" xmlns:p="http://schemas.openxmlformats.org/presentationml/2006/main" xmlns:r="http://schemas.openxmlformats.org/officeDocument/2006/relationships">
+  <p:cSld>
+    <p:bg>
+      <p:bgPr>
+        <a:solidFill>
+          <a:srgbClr val="0B2D5B"/>
+        </a:solidFill>
+        <a:effectLst/>
+      </p:bgPr>
+    </p:bg>
+    <p:spTree>
+      <p:nvGrpSpPr>
+        <p:cNvPr id="1" name=""/>
+        <p:cNvGrpSpPr/>
+        <p:nvPr/>
+      </p:nvGrpSpPr>
+      <p:grpSpPr/>
+      <p:sp>
+        <p:nvSpPr>
+          <p:cNvPr id="2" name="Rectangle 1"/>
+          <p:cNvSpPr/>
+          <p:nvPr/>
+        </p:nvSpPr>
+        <p:spPr>
+          <a:xfrm>
+            <a:off x="548640" y="502920"/>
+            <a:ext cx="457200" cy="54864"/>
+          </a:xfrm>
+          <a:prstGeom prst="rect">
+            <a:avLst/>
+          </a:prstGeom>
+          <a:solidFill>
+            <a:srgbClr val="F47B20"/>
+          </a:solidFill>
+          <a:ln>
+            <a:noFill/>
+          </a:ln>
+          <a:effectLst/>
+        </p:spPr>
+        <p:style>
+          <a:lnRef idx="1">
+            <a:schemeClr val="accent1"/>
+          </a:lnRef>
+          <a:fillRef idx="3">
+            <a:schemeClr val="accent1"/>
+          </a:fillRef>
+          <a:effectRef idx="2">
+            <a:schemeClr val="accent1"/>
+          </a:effectRef>
+          <a:fontRef idx="minor">
+            <a:schemeClr val="lt1"/>
+          </a:fontRef>
+        </p:style>
+        <p:txBody>
+          <a:bodyPr rtlCol="0" anchor="ctr"/>
+          <a:lstStyle/>
+          <a:p>
+            <a:pPr algn="ctr"/>
+          </a:p>
+        </p:txBody>
+      </p:sp>
+      <p:sp>
+        <p:nvSpPr>
+          <p:cNvPr id="3" name="TextBox 2"/>
+          <p:cNvSpPr txBox="1"/>
+          <p:nvPr/>
+        </p:nvSpPr>
+        <p:spPr>
+          <a:xfrm>
+            <a:off x="1143000" y="393192"/>
+            <a:ext cx="8229600" cy="274320"/>
+          </a:xfrm>
+          <a:prstGeom prst="rect">
+            <a:avLst/>
+          </a:prstGeom>
+          <a:noFill/>
+        </p:spPr>
+        <p:txBody>
+          <a:bodyPr wrap="square" anchor="t" lIns="0" rIns="0" tIns="0" bIns="0">
+            <a:spAutoFit/>
+          </a:bodyPr>
+          <a:lstStyle/>
+          <a:p>
+            <a:pPr algn="l">
+              <a:spcAft>
+                <a:spcPts val="540"/>
+              </a:spcAft>
+            </a:pPr>
+            <a:r>
+              <a:rPr sz="1200" b="1" i="0">
+                <a:solidFill>
+                  <a:srgbClr val="5D5A54"/>
+                </a:solidFill>
+                <a:latin typeface="Inter Tight"/>
+              </a:rPr>
+              <a:t>HEADWINDS AND TAILWINDS</a:t>
+            </a:r>
+          </a:p>
+        </p:txBody>
+      </p:sp>
+      <p:sp>
+        <p:nvSpPr>
+          <p:cNvPr id="4" name="TextBox 3"/>
+          <p:cNvSpPr txBox="1"/>
+          <p:nvPr/>
+        </p:nvSpPr>
+        <p:spPr>
+          <a:xfrm>
+            <a:off x="8229600" y="6400800"/>
+            <a:ext cx="3410712" cy="274320"/>
+          </a:xfrm>
+          <a:prstGeom prst="rect">
+            <a:avLst/>
+          </a:prstGeom>
+          <a:noFill/>
+        </p:spPr>
+        <p:txBody>
+          <a:bodyPr wrap="square" anchor="t" lIns="0" rIns="0" tIns="0" bIns="0">
+            <a:spAutoFit/>
+          </a:bodyPr>
+          <a:lstStyle/>
+          <a:p>
+            <a:pPr algn="r">
+              <a:spcAft>
+                <a:spcPts val="450"/>
+              </a:spcAft>
+            </a:pPr>
+            <a:r>
+              <a:rPr sz="1000" b="0" i="0">
+                <a:solidFill>
+                  <a:srgbClr val="5D5A54"/>
+                </a:solidFill>
+                <a:latin typeface="Inter Tight"/>
+              </a:rPr>
+              <a:t>Beaver Counseling</a:t>
+            </a:r>
+          </a:p>
+        </p:txBody>
+      </p:sp>
+      <p:sp>
+        <p:nvSpPr>
+          <p:cNvPr id="5" name="TextBox 4"/>
+          <p:cNvSpPr txBox="1"/>
+          <p:nvPr/>
+        </p:nvSpPr>
+        <p:spPr>
+          <a:xfrm>
+            <a:off x="822960" y="2011680"/>
+            <a:ext cx="10515600" cy="1463040"/>
+          </a:xfrm>
+          <a:prstGeom prst="rect">
+            <a:avLst/>
+          </a:prstGeom>
+          <a:noFill/>
+        </p:spPr>
+        <p:txBody>
+          <a:bodyPr wrap="square" anchor="b" lIns="0" rIns="0" tIns="0" bIns="0">
+            <a:spAutoFit/>
+          </a:bodyPr>
+          <a:lstStyle/>
+          <a:p>
+            <a:pPr algn="l">
+              <a:spcAft>
+                <a:spcPts val="2700"/>
+              </a:spcAft>
+            </a:pPr>
+            <a:r>
+              <a:rPr sz="6000" b="1" i="0">
+                <a:solidFill>
+                  <a:srgbClr val="FFFFFF"/>
+                </a:solidFill>
+                <a:latin typeface="Source Serif 4"/>
+              </a:rPr>
+              <a:t>Headwinds and Tailwinds</a:t>
+            </a:r>
+          </a:p>
+        </p:txBody>
+      </p:sp>
+      <p:sp>
+        <p:nvSpPr>
+          <p:cNvPr id="6" name="TextBox 5"/>
+          <p:cNvSpPr txBox="1"/>
+          <p:nvPr/>
+        </p:nvSpPr>
+        <p:spPr>
+          <a:xfrm>
+            <a:off x="822960" y="3611880"/>
+            <a:ext cx="10515600" cy="914400"/>
+          </a:xfrm>
+          <a:prstGeom prst="rect">
+            <a:avLst/>
+          </a:prstGeom>
+          <a:noFill/>
+        </p:spPr>
+        <p:txBody>
+          <a:bodyPr wrap="square" anchor="t" lIns="0" rIns="0" tIns="0" bIns="0">
+            <a:spAutoFit/>
+          </a:bodyPr>
+          <a:lstStyle/>
+          <a:p>
+            <a:pPr algn="l">
+              <a:spcAft>
+                <a:spcPts val="1080"/>
+              </a:spcAft>
+            </a:pPr>
+            <a:r>
+              <a:rPr sz="2400" b="0" i="1">
+                <a:solidFill>
+                  <a:srgbClr val="E8E4DA"/>
+                </a:solidFill>
+                <a:latin typeface="Source Serif 4"/>
+              </a:rPr>
+              <a:t>Some things push against you. Some push you along. One kind is much easier to see.</a:t>
+            </a:r>
+          </a:p>
+        </p:txBody>
+      </p:sp>
+      <p:sp>
+        <p:nvSpPr>
+          <p:cNvPr id="7" name="TextBox 6"/>
+          <p:cNvSpPr txBox="1"/>
+          <p:nvPr/>
+        </p:nvSpPr>
+        <p:spPr>
+          <a:xfrm>
+            <a:off x="822960" y="6035040"/>
+            <a:ext cx="7315200" cy="365760"/>
+          </a:xfrm>
+          <a:prstGeom prst="rect">
+            <a:avLst/>
+          </a:prstGeom>
+          <a:noFill/>
+        </p:spPr>
+        <p:txBody>
+          <a:bodyPr wrap="square" anchor="t" lIns="0" rIns="0" tIns="0" bIns="0">
+            <a:spAutoFit/>
+          </a:bodyPr>
+          <a:lstStyle/>
+          <a:p>
+            <a:pPr algn="l">
+              <a:spcAft>
+                <a:spcPts val="585"/>
+              </a:spcAft>
+            </a:pPr>
+            <a:r>
+              <a:rPr sz="1300" b="0" i="0">
+                <a:solidFill>
+                  <a:srgbClr val="E8E4DA"/>
+                </a:solidFill>
+                <a:latin typeface="Inter Tight"/>
+              </a:rPr>
+              <a:t>Beaver Upper School · Counseling</a:t>
+            </a:r>
+          </a:p>
+        </p:txBody>
+      </p:sp>
+    </p:spTree>
+  </p:cSld>
+  <p:clrMapOvr>
+    <a:masterClrMapping/>
+  </p:clrMapOvr>
+</p:sld>
+</file>
+
+<file path=ppt/slides/slide3.xml><?xml version="1.0" encoding="utf-8"?>
 <p:sld xmlns:a="http://schemas.openxmlformats.org/drawingml/2006/main" xmlns:p="http://schemas.openxmlformats.org/presentationml/2006/main" xmlns:r="http://schemas.openxmlformats.org/officeDocument/2006/relationships">
   <p:cSld>
     <p:bg>
@@ -4765,7 +6924,7 @@
                 </a:solidFill>
                 <a:latin typeface="Inter Tight"/>
               </a:rPr>
-              <a:t>DRAFTING IN THE PACK</a:t>
+              <a:t>TO START</a:t>
             </a:r>
           </a:p>
         </p:txBody>
@@ -4811,14 +6970,58 @@
       </p:sp>
       <p:sp>
         <p:nvSpPr>
-          <p:cNvPr id="5" name="TextBox 4"/>
+          <p:cNvPr id="5" name="Rectangle 4"/>
+          <p:cNvSpPr/>
+          <p:nvPr/>
+        </p:nvSpPr>
+        <p:spPr>
+          <a:xfrm>
+            <a:off x="822960" y="1371600"/>
+            <a:ext cx="73152" cy="3566160"/>
+          </a:xfrm>
+          <a:prstGeom prst="rect">
+            <a:avLst/>
+          </a:prstGeom>
+          <a:solidFill>
+            <a:srgbClr val="F47B20"/>
+          </a:solidFill>
+          <a:ln>
+            <a:noFill/>
+          </a:ln>
+          <a:effectLst/>
+        </p:spPr>
+        <p:style>
+          <a:lnRef idx="1">
+            <a:schemeClr val="accent1"/>
+          </a:lnRef>
+          <a:fillRef idx="3">
+            <a:schemeClr val="accent1"/>
+          </a:fillRef>
+          <a:effectRef idx="2">
+            <a:schemeClr val="accent1"/>
+          </a:effectRef>
+          <a:fontRef idx="minor">
+            <a:schemeClr val="lt1"/>
+          </a:fontRef>
+        </p:style>
+        <p:txBody>
+          <a:bodyPr rtlCol="0" anchor="ctr"/>
+          <a:lstStyle/>
+          <a:p>
+            <a:pPr algn="ctr"/>
+          </a:p>
+        </p:txBody>
+      </p:sp>
+      <p:sp>
+        <p:nvSpPr>
+          <p:cNvPr id="6" name="TextBox 5"/>
           <p:cNvSpPr txBox="1"/>
           <p:nvPr/>
         </p:nvSpPr>
         <p:spPr>
           <a:xfrm>
-            <a:off x="822960" y="1463040"/>
-            <a:ext cx="10515600" cy="3291840"/>
+            <a:off x="1188720" y="1371600"/>
+            <a:ext cx="10058400" cy="3566160"/>
           </a:xfrm>
           <a:prstGeom prst="rect">
             <a:avLst/>
@@ -4833,31 +7036,31 @@
           <a:p>
             <a:pPr algn="l">
               <a:spcAft>
-                <a:spcPts val="2070"/>
-              </a:spcAft>
-            </a:pPr>
-            <a:r>
-              <a:rPr sz="4600" b="1" i="0">
+                <a:spcPts val="1800"/>
+              </a:spcAft>
+            </a:pPr>
+            <a:r>
+              <a:rPr sz="4000" b="0" i="1">
                 <a:solidFill>
                   <a:srgbClr val="1C1B19"/>
                 </a:solidFill>
                 <a:latin typeface="Source Serif 4"/>
               </a:rPr>
-              <a:t>Ride close behind someone and you use about a third less effort. Deep in the pack, you barely feel the wind.</a:t>
-            </a:r>
-          </a:p>
-        </p:txBody>
-      </p:sp>
-      <p:sp>
-        <p:nvSpPr>
-          <p:cNvPr id="6" name="TextBox 5"/>
+              <a:t>Riding into the wind, or with it at your back. What does each feel like?</a:t>
+            </a:r>
+          </a:p>
+        </p:txBody>
+      </p:sp>
+      <p:sp>
+        <p:nvSpPr>
+          <p:cNvPr id="7" name="TextBox 6"/>
           <p:cNvSpPr txBox="1"/>
           <p:nvPr/>
         </p:nvSpPr>
         <p:spPr>
           <a:xfrm>
-            <a:off x="822960" y="4846320"/>
-            <a:ext cx="10515600" cy="1097280"/>
+            <a:off x="1188720" y="5120640"/>
+            <a:ext cx="10058400" cy="914400"/>
           </a:xfrm>
           <a:prstGeom prst="rect">
             <a:avLst/>
@@ -4872,17 +7075,17 @@
           <a:p>
             <a:pPr algn="l">
               <a:spcAft>
-                <a:spcPts val="990"/>
-              </a:spcAft>
-            </a:pPr>
-            <a:r>
-              <a:rPr sz="2200" b="0" i="1">
+                <a:spcPts val="810"/>
+              </a:spcAft>
+            </a:pPr>
+            <a:r>
+              <a:rPr sz="1800" b="0" i="0">
                 <a:solidFill>
                   <a:srgbClr val="5D5A54"/>
                 </a:solidFill>
-                <a:latin typeface="Source Serif 4"/>
-              </a:rPr>
-              <a:t>In the U.S., being white often works like riding in the pack. It doesn't make life easy. It means your skin isn't one of the things making it harder.</a:t>
+                <a:latin typeface="Inter Tight"/>
+              </a:rPr>
+              <a:t>A bike, a run, a swim against the current, walking home in a storm.</a:t>
             </a:r>
           </a:p>
         </p:txBody>
@@ -4895,7 +7098,7 @@
 </p:sld>
 </file>
 
-<file path=ppt/slides/slide11.xml><?xml version="1.0" encoding="utf-8"?>
+<file path=ppt/slides/slide4.xml><?xml version="1.0" encoding="utf-8"?>
 <p:sld xmlns:a="http://schemas.openxmlformats.org/drawingml/2006/main" xmlns:p="http://schemas.openxmlformats.org/presentationml/2006/main" xmlns:r="http://schemas.openxmlformats.org/officeDocument/2006/relationships">
   <p:cSld>
     <p:bg>
@@ -4991,7 +7194,7 @@
                 </a:solidFill>
                 <a:latin typeface="Inter Tight"/>
               </a:rPr>
-              <a:t>TWO WORDS</a:t>
+              <a:t>WHY IT'S HARD TO SEE</a:t>
             </a:r>
           </a:p>
         </p:txBody>
@@ -5043,8 +7246,8 @@
         </p:nvSpPr>
         <p:spPr>
           <a:xfrm>
-            <a:off x="822960" y="1005840"/>
-            <a:ext cx="10515600" cy="914400"/>
+            <a:off x="822960" y="914400"/>
+            <a:ext cx="10515600" cy="365760"/>
           </a:xfrm>
           <a:prstGeom prst="rect">
             <a:avLst/>
@@ -5059,42 +7262,150 @@
           <a:p>
             <a:pPr algn="l">
               <a:spcAft>
-                <a:spcPts val="1530"/>
-              </a:spcAft>
-            </a:pPr>
-            <a:r>
-              <a:rPr sz="3400" b="1" i="0">
+                <a:spcPts val="630"/>
+              </a:spcAft>
+            </a:pPr>
+            <a:r>
+              <a:rPr sz="1400" b="1" i="0">
+                <a:solidFill>
+                  <a:srgbClr val="0B2D5B"/>
+                </a:solidFill>
+                <a:latin typeface="Inter Tight"/>
+              </a:rPr>
+              <a:t>Davidai &amp; Gilovich, 2016</a:t>
+            </a:r>
+          </a:p>
+        </p:txBody>
+      </p:sp>
+      <p:sp>
+        <p:nvSpPr>
+          <p:cNvPr id="6" name="TextBox 5"/>
+          <p:cNvSpPr txBox="1"/>
+          <p:nvPr/>
+        </p:nvSpPr>
+        <p:spPr>
+          <a:xfrm>
+            <a:off x="822960" y="1325880"/>
+            <a:ext cx="10515600" cy="1097280"/>
+          </a:xfrm>
+          <a:prstGeom prst="rect">
+            <a:avLst/>
+          </a:prstGeom>
+          <a:noFill/>
+        </p:spPr>
+        <p:txBody>
+          <a:bodyPr wrap="square" anchor="t" lIns="0" rIns="0" tIns="0" bIns="0">
+            <a:spAutoFit/>
+          </a:bodyPr>
+          <a:lstStyle/>
+          <a:p>
+            <a:pPr algn="l">
+              <a:spcAft>
+                <a:spcPts val="1440"/>
+              </a:spcAft>
+            </a:pPr>
+            <a:r>
+              <a:rPr sz="3200" b="1" i="0">
                 <a:solidFill>
                   <a:srgbClr val="1C1B19"/>
                 </a:solidFill>
                 <a:latin typeface="Source Serif 4"/>
               </a:rPr>
-              <a:t>Blame and responsibility aren't the same.</a:t>
-            </a:r>
-          </a:p>
-        </p:txBody>
-      </p:sp>
-      <p:sp>
-        <p:nvSpPr>
-          <p:cNvPr id="6" name="Rectangle 5"/>
+              <a:t>We notice headwinds more.</a:t>
+            </a:r>
+          </a:p>
+        </p:txBody>
+      </p:sp>
+      <p:sp>
+        <p:nvSpPr>
+          <p:cNvPr id="7" name="TextBox 6"/>
+          <p:cNvSpPr txBox="1"/>
+          <p:nvPr/>
+        </p:nvSpPr>
+        <p:spPr>
+          <a:xfrm>
+            <a:off x="822960" y="2514600"/>
+            <a:ext cx="10515600" cy="2194560"/>
+          </a:xfrm>
+          <a:prstGeom prst="rect">
+            <a:avLst/>
+          </a:prstGeom>
+          <a:noFill/>
+        </p:spPr>
+        <p:txBody>
+          <a:bodyPr wrap="square" anchor="t" lIns="0" rIns="0" tIns="0" bIns="0">
+            <a:spAutoFit/>
+          </a:bodyPr>
+          <a:lstStyle/>
+          <a:p>
+            <a:pPr algn="l">
+              <a:spcAft>
+                <a:spcPts val="855"/>
+              </a:spcAft>
+            </a:pPr>
+            <a:r>
+              <a:rPr sz="1900" b="0" i="0">
+                <a:solidFill>
+                  <a:srgbClr val="1C1B19"/>
+                </a:solidFill>
+                <a:latin typeface="Source Serif 4"/>
+              </a:rPr>
+              <a:t>•  People remember obstacles much more than boosts.</a:t>
+            </a:r>
+          </a:p>
+          <a:p>
+            <a:pPr algn="l">
+              <a:spcAft>
+                <a:spcPts val="855"/>
+              </a:spcAft>
+            </a:pPr>
+            <a:r>
+              <a:rPr sz="1900" b="0" i="0">
+                <a:solidFill>
+                  <a:srgbClr val="1C1B19"/>
+                </a:solidFill>
+                <a:latin typeface="Source Serif 4"/>
+              </a:rPr>
+              <a:t>•  Fans of almost every team think their schedule was hardest.</a:t>
+            </a:r>
+          </a:p>
+          <a:p>
+            <a:pPr algn="l">
+              <a:spcAft>
+                <a:spcPts val="855"/>
+              </a:spcAft>
+            </a:pPr>
+            <a:r>
+              <a:rPr sz="1900" b="0" i="0">
+                <a:solidFill>
+                  <a:srgbClr val="1C1B19"/>
+                </a:solidFill>
+                <a:latin typeface="Source Serif 4"/>
+              </a:rPr>
+              <a:t>•  It's how memory works, not a character flaw.</a:t>
+            </a:r>
+          </a:p>
+        </p:txBody>
+      </p:sp>
+      <p:sp>
+        <p:nvSpPr>
+          <p:cNvPr id="8" name="Rectangle 7"/>
           <p:cNvSpPr/>
           <p:nvPr/>
         </p:nvSpPr>
         <p:spPr>
           <a:xfrm>
-            <a:off x="822960" y="2103120"/>
-            <a:ext cx="5120640" cy="3931920"/>
+            <a:off x="822960" y="4892040"/>
+            <a:ext cx="73152" cy="1097280"/>
           </a:xfrm>
           <a:prstGeom prst="rect">
             <a:avLst/>
           </a:prstGeom>
           <a:solidFill>
-            <a:srgbClr val="FFFFFF"/>
+            <a:srgbClr val="F47B20"/>
           </a:solidFill>
-          <a:ln w="15875">
-            <a:solidFill>
-              <a:srgbClr val="D8D2C6"/>
-            </a:solidFill>
+          <a:ln>
+            <a:noFill/>
           </a:ln>
           <a:effectLst/>
         </p:spPr>
@@ -5122,14 +7433,14 @@
       </p:sp>
       <p:sp>
         <p:nvSpPr>
-          <p:cNvPr id="7" name="TextBox 6"/>
+          <p:cNvPr id="9" name="TextBox 8"/>
           <p:cNvSpPr txBox="1"/>
           <p:nvPr/>
         </p:nvSpPr>
         <p:spPr>
           <a:xfrm>
-            <a:off x="1097280" y="2286000"/>
-            <a:ext cx="4572000" cy="457200"/>
+            <a:off x="1097280" y="4892040"/>
+            <a:ext cx="10241280" cy="1188720"/>
           </a:xfrm>
           <a:prstGeom prst="rect">
             <a:avLst/>
@@ -5144,42 +7455,19 @@
           <a:p>
             <a:pPr algn="l">
               <a:spcAft>
-                <a:spcPts val="585"/>
-              </a:spcAft>
-            </a:pPr>
-            <a:r>
-              <a:rPr sz="1300" b="1" i="0">
-                <a:solidFill>
-                  <a:srgbClr val="0B2D5B"/>
+                <a:spcPts val="855"/>
+              </a:spcAft>
+            </a:pPr>
+            <a:r>
+              <a:rPr sz="1200" b="1" i="0">
+                <a:solidFill>
+                  <a:srgbClr val="F47B20"/>
                 </a:solidFill>
                 <a:latin typeface="Inter Tight"/>
               </a:rPr>
-              <a:t>BLAME</a:t>
-            </a:r>
-          </a:p>
-        </p:txBody>
-      </p:sp>
-      <p:sp>
-        <p:nvSpPr>
-          <p:cNvPr id="8" name="TextBox 7"/>
-          <p:cNvSpPr txBox="1"/>
-          <p:nvPr/>
-        </p:nvSpPr>
-        <p:spPr>
-          <a:xfrm>
-            <a:off x="1097280" y="2788920"/>
-            <a:ext cx="4572000" cy="3108960"/>
-          </a:xfrm>
-          <a:prstGeom prst="rect">
-            <a:avLst/>
-          </a:prstGeom>
-          <a:noFill/>
-        </p:spPr>
-        <p:txBody>
-          <a:bodyPr wrap="square" anchor="t" lIns="0" rIns="0" tIns="0" bIns="0">
-            <a:spAutoFit/>
-          </a:bodyPr>
-          <a:lstStyle/>
+              <a:t>IN CLASS</a:t>
+            </a:r>
+          </a:p>
           <a:p>
             <a:pPr algn="l">
               <a:spcAft>
@@ -5193,227 +7481,7 @@
                 </a:solidFill>
                 <a:latin typeface="Source Serif 4"/>
               </a:rPr>
-              <a:t>About the past</a:t>
-            </a:r>
-          </a:p>
-          <a:p>
-            <a:pPr algn="l">
-              <a:spcAft>
-                <a:spcPts val="855"/>
-              </a:spcAft>
-            </a:pPr>
-            <a:r>
-              <a:rPr sz="1900" b="0" i="0">
-                <a:solidFill>
-                  <a:srgbClr val="1C1B19"/>
-                </a:solidFill>
-                <a:latin typeface="Source Serif 4"/>
-              </a:rPr>
-              <a:t>Something you did wrong</a:t>
-            </a:r>
-          </a:p>
-          <a:p>
-            <a:pPr algn="l">
-              <a:spcAft>
-                <a:spcPts val="855"/>
-              </a:spcAft>
-            </a:pPr>
-            <a:r>
-              <a:rPr sz="1900" b="0" i="0">
-                <a:solidFill>
-                  <a:srgbClr val="1C1B19"/>
-                </a:solidFill>
-                <a:latin typeface="Source Serif 4"/>
-              </a:rPr>
-              <a:t>Leads to guilt or defending yourself</a:t>
-            </a:r>
-          </a:p>
-          <a:p>
-            <a:pPr algn="l">
-              <a:spcAft>
-                <a:spcPts val="855"/>
-              </a:spcAft>
-            </a:pPr>
-            <a:r>
-              <a:rPr sz="1900" b="0" i="0">
-                <a:solidFill>
-                  <a:srgbClr val="1C1B19"/>
-                </a:solidFill>
-                <a:latin typeface="Source Serif 4"/>
-              </a:rPr>
-              <a:t>Nobody here is asking for it</a:t>
-            </a:r>
-          </a:p>
-        </p:txBody>
-      </p:sp>
-      <p:sp>
-        <p:nvSpPr>
-          <p:cNvPr id="9" name="Rectangle 8"/>
-          <p:cNvSpPr/>
-          <p:nvPr/>
-        </p:nvSpPr>
-        <p:spPr>
-          <a:xfrm>
-            <a:off x="6309360" y="2103120"/>
-            <a:ext cx="5120640" cy="3931920"/>
-          </a:xfrm>
-          <a:prstGeom prst="rect">
-            <a:avLst/>
-          </a:prstGeom>
-          <a:solidFill>
-            <a:srgbClr val="FFFFFF"/>
-          </a:solidFill>
-          <a:ln w="15875">
-            <a:solidFill>
-              <a:srgbClr val="D8D2C6"/>
-            </a:solidFill>
-          </a:ln>
-          <a:effectLst/>
-        </p:spPr>
-        <p:style>
-          <a:lnRef idx="1">
-            <a:schemeClr val="accent1"/>
-          </a:lnRef>
-          <a:fillRef idx="3">
-            <a:schemeClr val="accent1"/>
-          </a:fillRef>
-          <a:effectRef idx="2">
-            <a:schemeClr val="accent1"/>
-          </a:effectRef>
-          <a:fontRef idx="minor">
-            <a:schemeClr val="lt1"/>
-          </a:fontRef>
-        </p:style>
-        <p:txBody>
-          <a:bodyPr rtlCol="0" anchor="ctr"/>
-          <a:lstStyle/>
-          <a:p>
-            <a:pPr algn="ctr"/>
-          </a:p>
-        </p:txBody>
-      </p:sp>
-      <p:sp>
-        <p:nvSpPr>
-          <p:cNvPr id="10" name="TextBox 9"/>
-          <p:cNvSpPr txBox="1"/>
-          <p:nvPr/>
-        </p:nvSpPr>
-        <p:spPr>
-          <a:xfrm>
-            <a:off x="6583680" y="2286000"/>
-            <a:ext cx="4572000" cy="457200"/>
-          </a:xfrm>
-          <a:prstGeom prst="rect">
-            <a:avLst/>
-          </a:prstGeom>
-          <a:noFill/>
-        </p:spPr>
-        <p:txBody>
-          <a:bodyPr wrap="square" anchor="t" lIns="0" rIns="0" tIns="0" bIns="0">
-            <a:spAutoFit/>
-          </a:bodyPr>
-          <a:lstStyle/>
-          <a:p>
-            <a:pPr algn="l">
-              <a:spcAft>
-                <a:spcPts val="585"/>
-              </a:spcAft>
-            </a:pPr>
-            <a:r>
-              <a:rPr sz="1300" b="1" i="0">
-                <a:solidFill>
-                  <a:srgbClr val="0B2D5B"/>
-                </a:solidFill>
-                <a:latin typeface="Inter Tight"/>
-              </a:rPr>
-              <a:t>RESPONSIBILITY</a:t>
-            </a:r>
-          </a:p>
-        </p:txBody>
-      </p:sp>
-      <p:sp>
-        <p:nvSpPr>
-          <p:cNvPr id="11" name="TextBox 10"/>
-          <p:cNvSpPr txBox="1"/>
-          <p:nvPr/>
-        </p:nvSpPr>
-        <p:spPr>
-          <a:xfrm>
-            <a:off x="6583680" y="2788920"/>
-            <a:ext cx="4572000" cy="3108960"/>
-          </a:xfrm>
-          <a:prstGeom prst="rect">
-            <a:avLst/>
-          </a:prstGeom>
-          <a:noFill/>
-        </p:spPr>
-        <p:txBody>
-          <a:bodyPr wrap="square" anchor="t" lIns="0" rIns="0" tIns="0" bIns="0">
-            <a:spAutoFit/>
-          </a:bodyPr>
-          <a:lstStyle/>
-          <a:p>
-            <a:pPr algn="l">
-              <a:spcAft>
-                <a:spcPts val="855"/>
-              </a:spcAft>
-            </a:pPr>
-            <a:r>
-              <a:rPr sz="1900" b="0" i="0">
-                <a:solidFill>
-                  <a:srgbClr val="1C1B19"/>
-                </a:solidFill>
-                <a:latin typeface="Source Serif 4"/>
-              </a:rPr>
-              <a:t>About what's next</a:t>
-            </a:r>
-          </a:p>
-          <a:p>
-            <a:pPr algn="l">
-              <a:spcAft>
-                <a:spcPts val="855"/>
-              </a:spcAft>
-            </a:pPr>
-            <a:r>
-              <a:rPr sz="1900" b="0" i="0">
-                <a:solidFill>
-                  <a:srgbClr val="1C1B19"/>
-                </a:solidFill>
-                <a:latin typeface="Source Serif 4"/>
-              </a:rPr>
-              <a:t>Something you choose</a:t>
-            </a:r>
-          </a:p>
-          <a:p>
-            <a:pPr algn="l">
-              <a:spcAft>
-                <a:spcPts val="855"/>
-              </a:spcAft>
-            </a:pPr>
-            <a:r>
-              <a:rPr sz="1900" b="0" i="0">
-                <a:solidFill>
-                  <a:srgbClr val="1C1B19"/>
-                </a:solidFill>
-                <a:latin typeface="Source Serif 4"/>
-              </a:rPr>
-              <a:t>Leads to action</a:t>
-            </a:r>
-          </a:p>
-          <a:p>
-            <a:pPr algn="l">
-              <a:spcAft>
-                <a:spcPts val="855"/>
-              </a:spcAft>
-            </a:pPr>
-            <a:r>
-              <a:rPr sz="1900" b="0" i="0">
-                <a:solidFill>
-                  <a:srgbClr val="1C1B19"/>
-                </a:solidFill>
-                <a:latin typeface="Source Serif 4"/>
-              </a:rPr>
-              <a:t>Yours to decide</a:t>
+              <a:t>Seeing your tailwinds takes practice. That's the whole skill today.</a:t>
             </a:r>
           </a:p>
         </p:txBody>
@@ -5426,7 +7494,7 @@
 </p:sld>
 </file>
 
-<file path=ppt/slides/slide12.xml><?xml version="1.0" encoding="utf-8"?>
+<file path=ppt/slides/slide5.xml><?xml version="1.0" encoding="utf-8"?>
 <p:sld xmlns:a="http://schemas.openxmlformats.org/drawingml/2006/main" xmlns:p="http://schemas.openxmlformats.org/presentationml/2006/main" xmlns:r="http://schemas.openxmlformats.org/officeDocument/2006/relationships">
   <p:cSld>
     <p:bg>
@@ -5522,7 +7590,7 @@
                 </a:solidFill>
                 <a:latin typeface="Inter Tight"/>
               </a:rPr>
-              <a:t>BEFORE YOU GO</a:t>
+              <a:t>EVERYDAY TAILWINDS</a:t>
             </a:r>
           </a:p>
         </p:txBody>
@@ -5574,8 +7642,8 @@
         </p:nvSpPr>
         <p:spPr>
           <a:xfrm>
-            <a:off x="822960" y="1188720"/>
-            <a:ext cx="10515600" cy="914400"/>
+            <a:off x="822960" y="1005840"/>
+            <a:ext cx="10515600" cy="1097280"/>
           </a:xfrm>
           <a:prstGeom prst="rect">
             <a:avLst/>
@@ -5600,7 +7668,7 @@
                 </a:solidFill>
                 <a:latin typeface="Source Serif 4"/>
               </a:rPr>
-              <a:t>Take a turn at the front.</a:t>
+              <a:t>Which of these helped you along without your asking?</a:t>
             </a:r>
           </a:p>
         </p:txBody>
@@ -5613,8 +7681,8 @@
         </p:nvSpPr>
         <p:spPr>
           <a:xfrm>
-            <a:off x="822960" y="2286000"/>
-            <a:ext cx="10515600" cy="1463040"/>
+            <a:off x="822960" y="2057400"/>
+            <a:ext cx="548640" cy="670560"/>
           </a:xfrm>
           <a:prstGeom prst="rect">
             <a:avLst/>
@@ -5629,64 +7697,57 @@
           <a:p>
             <a:pPr algn="l">
               <a:spcAft>
-                <a:spcPts val="1080"/>
-              </a:spcAft>
-            </a:pPr>
-            <a:r>
-              <a:rPr sz="2400" b="0" i="0">
+                <a:spcPts val="1170"/>
+              </a:spcAft>
+            </a:pPr>
+            <a:r>
+              <a:rPr sz="2600" b="1" i="0">
+                <a:solidFill>
+                  <a:srgbClr val="F47B20"/>
+                </a:solidFill>
+                <a:latin typeface="Source Serif 4"/>
+              </a:rPr>
+              <a:t>•</a:t>
+            </a:r>
+          </a:p>
+        </p:txBody>
+      </p:sp>
+      <p:sp>
+        <p:nvSpPr>
+          <p:cNvPr id="7" name="TextBox 6"/>
+          <p:cNvSpPr txBox="1"/>
+          <p:nvPr/>
+        </p:nvSpPr>
+        <p:spPr>
+          <a:xfrm>
+            <a:off x="1463040" y="2093976"/>
+            <a:ext cx="9875520" cy="670560"/>
+          </a:xfrm>
+          <a:prstGeom prst="rect">
+            <a:avLst/>
+          </a:prstGeom>
+          <a:noFill/>
+        </p:spPr>
+        <p:txBody>
+          <a:bodyPr wrap="square" anchor="t" lIns="0" rIns="0" tIns="0" bIns="0">
+            <a:spAutoFit/>
+          </a:bodyPr>
+          <a:lstStyle/>
+          <a:p>
+            <a:pPr algn="l">
+              <a:spcAft>
+                <a:spcPts val="945"/>
+              </a:spcAft>
+            </a:pPr>
+            <a:r>
+              <a:rPr sz="2100" b="1" i="0">
                 <a:solidFill>
                   <a:srgbClr val="1C1B19"/>
                 </a:solidFill>
                 <a:latin typeface="Source Serif 4"/>
               </a:rPr>
-              <a:t>Good riders take turns breaking the wind for the people behind them. Write one way you could this week. Keep the card.</a:t>
-            </a:r>
-          </a:p>
-        </p:txBody>
-      </p:sp>
-      <p:sp>
-        <p:nvSpPr>
-          <p:cNvPr id="7" name="Rectangle 6"/>
-          <p:cNvSpPr/>
-          <p:nvPr/>
-        </p:nvSpPr>
-        <p:spPr>
-          <a:xfrm>
-            <a:off x="822960" y="4023360"/>
-            <a:ext cx="10515600" cy="1371600"/>
-          </a:xfrm>
-          <a:prstGeom prst="rect">
-            <a:avLst/>
-          </a:prstGeom>
-          <a:solidFill>
-            <a:srgbClr val="FFFFFF"/>
-          </a:solidFill>
-          <a:ln w="15875">
-            <a:solidFill>
-              <a:srgbClr val="1C1B19"/>
-            </a:solidFill>
-          </a:ln>
-          <a:effectLst/>
-        </p:spPr>
-        <p:style>
-          <a:lnRef idx="1">
-            <a:schemeClr val="accent1"/>
-          </a:lnRef>
-          <a:fillRef idx="3">
-            <a:schemeClr val="accent1"/>
-          </a:fillRef>
-          <a:effectRef idx="2">
-            <a:schemeClr val="accent1"/>
-          </a:effectRef>
-          <a:fontRef idx="minor">
-            <a:schemeClr val="lt1"/>
-          </a:fontRef>
-        </p:style>
-        <p:txBody>
-          <a:bodyPr rtlCol="0" anchor="ctr"/>
-          <a:lstStyle/>
-          <a:p>
-            <a:pPr algn="ctr"/>
+              <a:t>Speaking English at home</a:t>
+            </a:r>
           </a:p>
         </p:txBody>
       </p:sp>
@@ -5698,8 +7759,8 @@
         </p:nvSpPr>
         <p:spPr>
           <a:xfrm>
-            <a:off x="1097280" y="4206240"/>
-            <a:ext cx="10058400" cy="365760"/>
+            <a:off x="822960" y="2727960"/>
+            <a:ext cx="548640" cy="670560"/>
           </a:xfrm>
           <a:prstGeom prst="rect">
             <a:avLst/>
@@ -5714,17 +7775,17 @@
           <a:p>
             <a:pPr algn="l">
               <a:spcAft>
-                <a:spcPts val="540"/>
-              </a:spcAft>
-            </a:pPr>
-            <a:r>
-              <a:rPr sz="1200" b="1" i="0">
-                <a:solidFill>
-                  <a:srgbClr val="0B2D5B"/>
-                </a:solidFill>
-                <a:latin typeface="Inter Tight"/>
-              </a:rPr>
-              <a:t>STUDENT PAGE</a:t>
+                <a:spcPts val="1170"/>
+              </a:spcAft>
+            </a:pPr>
+            <a:r>
+              <a:rPr sz="2600" b="1" i="0">
+                <a:solidFill>
+                  <a:srgbClr val="F47B20"/>
+                </a:solidFill>
+                <a:latin typeface="Source Serif 4"/>
+              </a:rPr>
+              <a:t>•</a:t>
             </a:r>
           </a:p>
         </p:txBody>
@@ -5737,8 +7798,8 @@
         </p:nvSpPr>
         <p:spPr>
           <a:xfrm>
-            <a:off x="1097280" y="4617720"/>
-            <a:ext cx="10058400" cy="640080"/>
+            <a:off x="1463040" y="2764536"/>
+            <a:ext cx="9875520" cy="670560"/>
           </a:xfrm>
           <a:prstGeom prst="rect">
             <a:avLst/>
@@ -5753,101 +7814,31 @@
           <a:p>
             <a:pPr algn="l">
               <a:spcAft>
-                <a:spcPts val="900"/>
-              </a:spcAft>
-            </a:pPr>
-            <a:r>
-              <a:rPr sz="2000" b="0" i="0">
+                <a:spcPts val="945"/>
+              </a:spcAft>
+            </a:pPr>
+            <a:r>
+              <a:rPr sz="2100" b="1" i="0">
                 <a:solidFill>
                   <a:srgbClr val="1C1B19"/>
                 </a:solidFill>
-                <a:latin typeface="Inter Tight"/>
-              </a:rPr>
-              <a:t>https://rmwtoolkit.github.io/bcds-toolkit/headwinds-and-tailwinds-high-school.html</a:t>
-            </a:r>
-          </a:p>
-        </p:txBody>
-      </p:sp>
-    </p:spTree>
-  </p:cSld>
-  <p:clrMapOvr>
-    <a:masterClrMapping/>
-  </p:clrMapOvr>
-</p:sld>
-</file>
-
-<file path=ppt/slides/slide2.xml><?xml version="1.0" encoding="utf-8"?>
-<p:sld xmlns:a="http://schemas.openxmlformats.org/drawingml/2006/main" xmlns:p="http://schemas.openxmlformats.org/presentationml/2006/main" xmlns:r="http://schemas.openxmlformats.org/officeDocument/2006/relationships" show="0">
-  <p:cSld>
-    <p:bg>
-      <p:bgPr>
-        <a:solidFill>
-          <a:srgbClr val="EEEBE4"/>
-        </a:solidFill>
-        <a:effectLst/>
-      </p:bgPr>
-    </p:bg>
-    <p:spTree>
-      <p:nvGrpSpPr>
-        <p:cNvPr id="1" name=""/>
-        <p:cNvGrpSpPr/>
-        <p:nvPr/>
-      </p:nvGrpSpPr>
-      <p:grpSpPr/>
-      <p:sp>
-        <p:nvSpPr>
-          <p:cNvPr id="2" name="Rectangle 1"/>
-          <p:cNvSpPr/>
-          <p:nvPr/>
-        </p:nvSpPr>
-        <p:spPr>
-          <a:xfrm>
-            <a:off x="0" y="0"/>
-            <a:ext cx="12191695" cy="384048"/>
-          </a:xfrm>
-          <a:prstGeom prst="rect">
-            <a:avLst/>
-          </a:prstGeom>
-          <a:solidFill>
-            <a:srgbClr val="0B2D5B"/>
-          </a:solidFill>
-          <a:ln>
-            <a:noFill/>
-          </a:ln>
-          <a:effectLst/>
-        </p:spPr>
-        <p:style>
-          <a:lnRef idx="1">
-            <a:schemeClr val="accent1"/>
-          </a:lnRef>
-          <a:fillRef idx="3">
-            <a:schemeClr val="accent1"/>
-          </a:fillRef>
-          <a:effectRef idx="2">
-            <a:schemeClr val="accent1"/>
-          </a:effectRef>
-          <a:fontRef idx="minor">
-            <a:schemeClr val="lt1"/>
-          </a:fontRef>
-        </p:style>
-        <p:txBody>
-          <a:bodyPr rtlCol="0" anchor="ctr"/>
-          <a:lstStyle/>
-          <a:p>
-            <a:pPr algn="ctr"/>
-          </a:p>
-        </p:txBody>
-      </p:sp>
-      <p:sp>
-        <p:nvSpPr>
-          <p:cNvPr id="3" name="TextBox 2"/>
+                <a:latin typeface="Source Serif 4"/>
+              </a:rPr>
+              <a:t>A parent who knows how school works</a:t>
+            </a:r>
+          </a:p>
+        </p:txBody>
+      </p:sp>
+      <p:sp>
+        <p:nvSpPr>
+          <p:cNvPr id="10" name="TextBox 9"/>
           <p:cNvSpPr txBox="1"/>
           <p:nvPr/>
         </p:nvSpPr>
         <p:spPr>
           <a:xfrm>
-            <a:off x="548640" y="100584"/>
-            <a:ext cx="10972800" cy="274320"/>
+            <a:off x="822960" y="3398520"/>
+            <a:ext cx="548640" cy="670560"/>
           </a:xfrm>
           <a:prstGeom prst="rect">
             <a:avLst/>
@@ -5862,31 +7853,31 @@
           <a:p>
             <a:pPr algn="l">
               <a:spcAft>
-                <a:spcPts val="495"/>
-              </a:spcAft>
-            </a:pPr>
-            <a:r>
-              <a:rPr sz="1100" b="1" i="0">
-                <a:solidFill>
-                  <a:srgbClr val="FFFFFF"/>
-                </a:solidFill>
-                <a:latin typeface="Inter Tight"/>
-              </a:rPr>
-              <a:t>TEACHER PAGE  ·  skipped when you present  ·  Before you teach</a:t>
-            </a:r>
-          </a:p>
-        </p:txBody>
-      </p:sp>
-      <p:sp>
-        <p:nvSpPr>
-          <p:cNvPr id="4" name="TextBox 3"/>
+                <a:spcPts val="1170"/>
+              </a:spcAft>
+            </a:pPr>
+            <a:r>
+              <a:rPr sz="2600" b="1" i="0">
+                <a:solidFill>
+                  <a:srgbClr val="F47B20"/>
+                </a:solidFill>
+                <a:latin typeface="Source Serif 4"/>
+              </a:rPr>
+              <a:t>•</a:t>
+            </a:r>
+          </a:p>
+        </p:txBody>
+      </p:sp>
+      <p:sp>
+        <p:nvSpPr>
+          <p:cNvPr id="11" name="TextBox 10"/>
           <p:cNvSpPr txBox="1"/>
           <p:nvPr/>
         </p:nvSpPr>
         <p:spPr>
           <a:xfrm>
-            <a:off x="548640" y="685800"/>
-            <a:ext cx="10972800" cy="640080"/>
+            <a:off x="1463040" y="3435096"/>
+            <a:ext cx="9875520" cy="670560"/>
           </a:xfrm>
           <a:prstGeom prst="rect">
             <a:avLst/>
@@ -5901,31 +7892,31 @@
           <a:p>
             <a:pPr algn="l">
               <a:spcAft>
-                <a:spcPts val="1350"/>
-              </a:spcAft>
-            </a:pPr>
-            <a:r>
-              <a:rPr sz="3000" b="1" i="0">
+                <a:spcPts val="945"/>
+              </a:spcAft>
+            </a:pPr>
+            <a:r>
+              <a:rPr sz="2100" b="1" i="0">
                 <a:solidFill>
                   <a:srgbClr val="1C1B19"/>
                 </a:solidFill>
                 <a:latin typeface="Source Serif 4"/>
               </a:rPr>
-              <a:t>Before you teach</a:t>
-            </a:r>
-          </a:p>
-        </p:txBody>
-      </p:sp>
-      <p:sp>
-        <p:nvSpPr>
-          <p:cNvPr id="5" name="TextBox 4"/>
+              <a:t>Money for a tutor, a camp, a trip</a:t>
+            </a:r>
+          </a:p>
+        </p:txBody>
+      </p:sp>
+      <p:sp>
+        <p:nvSpPr>
+          <p:cNvPr id="12" name="TextBox 11"/>
           <p:cNvSpPr txBox="1"/>
           <p:nvPr/>
         </p:nvSpPr>
         <p:spPr>
           <a:xfrm>
-            <a:off x="548640" y="1463040"/>
-            <a:ext cx="5394960" cy="4937760"/>
+            <a:off x="822960" y="4069080"/>
+            <a:ext cx="548640" cy="670560"/>
           </a:xfrm>
           <a:prstGeom prst="rect">
             <a:avLst/>
@@ -5940,159 +7931,31 @@
           <a:p>
             <a:pPr algn="l">
               <a:spcAft>
-                <a:spcPts val="585"/>
-              </a:spcAft>
-            </a:pPr>
-            <a:r>
-              <a:rPr sz="1500" b="1" i="0">
-                <a:solidFill>
-                  <a:srgbClr val="1C1B19"/>
-                </a:solidFill>
-                <a:latin typeface="Source Serif 4"/>
-              </a:rPr>
-              <a:t>Let leadership know before you teach it.</a:t>
-            </a:r>
-          </a:p>
-          <a:p>
-            <a:pPr algn="l">
-              <a:spcAft>
-                <a:spcPts val="585"/>
-              </a:spcAft>
-            </a:pPr>
-            <a:r>
-              <a:rPr sz="1300" b="0" i="0">
-                <a:solidFill>
-                  <a:srgbClr val="1C1B19"/>
-                </a:solidFill>
-                <a:latin typeface="Source Serif 4"/>
-              </a:rPr>
-              <a:t>This is the topic most likely to bring a call from a family. Tell your division head or diversity lead you're teaching it, and when. It helps them answer questions, and it helps you if one comes.</a:t>
-            </a:r>
-          </a:p>
-          <a:p>
-            <a:pPr algn="l">
-              <a:spcAft>
-                <a:spcPts val="585"/>
-              </a:spcAft>
-            </a:pPr>
-            <a:r>
-              <a:rPr sz="1300" b="0" i="0">
-                <a:solidFill>
-                  <a:srgbClr val="1C1B19"/>
-                </a:solidFill>
-                <a:latin typeface="Source Serif 4"/>
-              </a:rPr>
-              <a:t/>
-            </a:r>
-          </a:p>
-          <a:p>
-            <a:pPr algn="l">
-              <a:spcAft>
-                <a:spcPts val="585"/>
-              </a:spcAft>
-            </a:pPr>
-            <a:r>
-              <a:rPr sz="1500" b="1" i="0">
-                <a:solidFill>
-                  <a:srgbClr val="1C1B19"/>
-                </a:solidFill>
-                <a:latin typeface="Source Serif 4"/>
-              </a:rPr>
-              <a:t>Go first, with one of your own tailwinds.</a:t>
-            </a:r>
-          </a:p>
-          <a:p>
-            <a:pPr algn="l">
-              <a:spcAft>
-                <a:spcPts val="585"/>
-              </a:spcAft>
-            </a:pPr>
-            <a:r>
-              <a:rPr sz="1300" b="0" i="0">
-                <a:solidFill>
-                  <a:srgbClr val="1C1B19"/>
-                </a:solidFill>
-                <a:latin typeface="Source Serif 4"/>
-              </a:rPr>
-              <a:t>Something real and low-stakes: a parent who could help with homework, a car at sixteen, never being asked where you're really from. When the adult names a tailwind calmly, students learn it's something you can say out loud without falling apart.</a:t>
-            </a:r>
-          </a:p>
-          <a:p>
-            <a:pPr algn="l">
-              <a:spcAft>
-                <a:spcPts val="585"/>
-              </a:spcAft>
-            </a:pPr>
-            <a:r>
-              <a:rPr sz="1300" b="0" i="0">
-                <a:solidFill>
-                  <a:srgbClr val="1C1B19"/>
-                </a:solidFill>
-                <a:latin typeface="Source Serif 4"/>
-              </a:rPr>
-              <a:t/>
-            </a:r>
-          </a:p>
-          <a:p>
-            <a:pPr algn="l">
-              <a:spcAft>
-                <a:spcPts val="585"/>
-              </a:spcAft>
-            </a:pPr>
-            <a:r>
-              <a:rPr sz="1500" b="1" i="0">
-                <a:solidFill>
-                  <a:srgbClr val="1C1B19"/>
-                </a:solidFill>
-                <a:latin typeface="Source Serif 4"/>
-              </a:rPr>
-              <a:t>Students of color are not the lesson.</a:t>
-            </a:r>
-          </a:p>
-          <a:p>
-            <a:pPr algn="l">
-              <a:spcAft>
-                <a:spcPts val="585"/>
-              </a:spcAft>
-            </a:pPr>
-            <a:r>
-              <a:rPr sz="1300" b="0" i="0">
-                <a:solidFill>
-                  <a:srgbClr val="1C1B19"/>
-                </a:solidFill>
-                <a:latin typeface="Source Serif 4"/>
-              </a:rPr>
-              <a:t>Never ask a student to describe their headwinds or speak for a group, and don't let the room turn toward them. Tallies stay private. No privilege walk or any activity that lines students up by advantage: it ranks kids in front of each other.</a:t>
-            </a:r>
-          </a:p>
-          <a:p>
-            <a:pPr algn="l">
-              <a:spcAft>
-                <a:spcPts val="585"/>
-              </a:spcAft>
-            </a:pPr>
-            <a:r>
-              <a:rPr sz="1300" b="0" i="0">
-                <a:solidFill>
-                  <a:srgbClr val="1C1B19"/>
-                </a:solidFill>
-                <a:latin typeface="Source Serif 4"/>
-              </a:rPr>
-              <a:t/>
-            </a:r>
-          </a:p>
-        </p:txBody>
-      </p:sp>
-      <p:sp>
-        <p:nvSpPr>
-          <p:cNvPr id="6" name="TextBox 5"/>
+                <a:spcPts val="1170"/>
+              </a:spcAft>
+            </a:pPr>
+            <a:r>
+              <a:rPr sz="2600" b="1" i="0">
+                <a:solidFill>
+                  <a:srgbClr val="F47B20"/>
+                </a:solidFill>
+                <a:latin typeface="Source Serif 4"/>
+              </a:rPr>
+              <a:t>•</a:t>
+            </a:r>
+          </a:p>
+        </p:txBody>
+      </p:sp>
+      <p:sp>
+        <p:nvSpPr>
+          <p:cNvPr id="13" name="TextBox 12"/>
           <p:cNvSpPr txBox="1"/>
           <p:nvPr/>
         </p:nvSpPr>
         <p:spPr>
           <a:xfrm>
-            <a:off x="6217920" y="1463040"/>
-            <a:ext cx="5394960" cy="4937760"/>
+            <a:off x="1463040" y="4105656"/>
+            <a:ext cx="9875520" cy="670560"/>
           </a:xfrm>
           <a:prstGeom prst="rect">
             <a:avLst/>
@@ -6107,325 +7970,31 @@
           <a:p>
             <a:pPr algn="l">
               <a:spcAft>
-                <a:spcPts val="585"/>
-              </a:spcAft>
-            </a:pPr>
-            <a:r>
-              <a:rPr sz="1500" b="1" i="0">
+                <a:spcPts val="945"/>
+              </a:spcAft>
+            </a:pPr>
+            <a:r>
+              <a:rPr sz="2100" b="1" i="0">
                 <a:solidFill>
                   <a:srgbClr val="1C1B19"/>
                 </a:solidFill>
                 <a:latin typeface="Source Serif 4"/>
               </a:rPr>
-              <a:t>Say "not your fault" more than once.</a:t>
-            </a:r>
-          </a:p>
-          <a:p>
-            <a:pPr algn="l">
-              <a:spcAft>
-                <a:spcPts val="585"/>
-              </a:spcAft>
-            </a:pPr>
-            <a:r>
-              <a:rPr sz="1300" b="0" i="0">
-                <a:solidFill>
-                  <a:srgbClr val="1C1B19"/>
-                </a:solidFill>
-                <a:latin typeface="Source Serif 4"/>
-              </a:rPr>
-              <a:t>Separate blame from responsibility out loud, early and again at the end. Defensiveness drops when students hear they aren't being accused.</a:t>
-            </a:r>
-          </a:p>
-          <a:p>
-            <a:pPr algn="l">
-              <a:spcAft>
-                <a:spcPts val="585"/>
-              </a:spcAft>
-            </a:pPr>
-            <a:r>
-              <a:rPr sz="1300" b="0" i="0">
-                <a:solidFill>
-                  <a:srgbClr val="1C1B19"/>
-                </a:solidFill>
-                <a:latin typeface="Source Serif 4"/>
-              </a:rPr>
-              <a:t/>
-            </a:r>
-          </a:p>
-          <a:p>
-            <a:pPr algn="l">
-              <a:spcAft>
-                <a:spcPts val="585"/>
-              </a:spcAft>
-            </a:pPr>
-            <a:r>
-              <a:rPr sz="1500" b="1" i="0">
-                <a:solidFill>
-                  <a:srgbClr val="1C1B19"/>
-                </a:solidFill>
-                <a:latin typeface="Source Serif 4"/>
-              </a:rPr>
-              <a:t>Expect "but I had it hard too."</a:t>
-            </a:r>
-          </a:p>
-          <a:p>
-            <a:pPr algn="l">
-              <a:spcAft>
-                <a:spcPts val="585"/>
-              </a:spcAft>
-            </a:pPr>
-            <a:r>
-              <a:rPr sz="1300" b="0" i="0">
-                <a:solidFill>
-                  <a:srgbClr val="1C1B19"/>
-                </a:solidFill>
-                <a:latin typeface="Source Serif 4"/>
-              </a:rPr>
-              <a:t>Research finds that when white people hear about privilege, many respond by listing their hardships. Treat it as normal, not as an argument to win: "Your headwinds are real. You can have headwinds and tailwinds at the same time."</a:t>
-            </a:r>
-          </a:p>
-          <a:p>
-            <a:pPr algn="l">
-              <a:spcAft>
-                <a:spcPts val="585"/>
-              </a:spcAft>
-            </a:pPr>
-            <a:r>
-              <a:rPr sz="1300" b="0" i="0">
-                <a:solidFill>
-                  <a:srgbClr val="1C1B19"/>
-                </a:solidFill>
-                <a:latin typeface="Source Serif 4"/>
-              </a:rPr>
-              <a:t/>
-            </a:r>
-          </a:p>
-          <a:p>
-            <a:pPr algn="l">
-              <a:spcAft>
-                <a:spcPts val="585"/>
-              </a:spcAft>
-            </a:pPr>
-            <a:r>
-              <a:rPr sz="1500" b="1" i="0">
-                <a:solidFill>
-                  <a:srgbClr val="1C1B19"/>
-                </a:solidFill>
-                <a:latin typeface="Source Serif 4"/>
-              </a:rPr>
-              <a:t>Race and money are different winds.</a:t>
-            </a:r>
-          </a:p>
-          <a:p>
-            <a:pPr algn="l">
-              <a:spcAft>
-                <a:spcPts val="585"/>
-              </a:spcAft>
-            </a:pPr>
-            <a:r>
-              <a:rPr sz="1300" b="0" i="0">
-                <a:solidFill>
-                  <a:srgbClr val="1C1B19"/>
-                </a:solidFill>
-                <a:latin typeface="Source Serif 4"/>
-              </a:rPr>
-              <a:t>One study found that teaching about white privilege on its own made some people less sympathetic toward poor white people. Say clearly that a white student whose family is struggling has real headwinds, and that race and money are separate winds that can blow in different directions.</a:t>
-            </a:r>
-          </a:p>
-          <a:p>
-            <a:pPr algn="l">
-              <a:spcAft>
-                <a:spcPts val="585"/>
-              </a:spcAft>
-            </a:pPr>
-            <a:r>
-              <a:rPr sz="1300" b="0" i="0">
-                <a:solidFill>
-                  <a:srgbClr val="1C1B19"/>
-                </a:solidFill>
-                <a:latin typeface="Source Serif 4"/>
-              </a:rPr>
-              <a:t/>
-            </a:r>
-          </a:p>
-          <a:p>
-            <a:pPr algn="l">
-              <a:spcAft>
-                <a:spcPts val="585"/>
-              </a:spcAft>
-            </a:pPr>
-            <a:r>
-              <a:rPr sz="1500" b="1" i="0">
-                <a:solidFill>
-                  <a:srgbClr val="1C1B19"/>
-                </a:solidFill>
-                <a:latin typeface="Source Serif 4"/>
-              </a:rPr>
-              <a:t>Keep it to everyday moments, not politics.</a:t>
-            </a:r>
-          </a:p>
-          <a:p>
-            <a:pPr algn="l">
-              <a:spcAft>
-                <a:spcPts val="585"/>
-              </a:spcAft>
-            </a:pPr>
-            <a:r>
-              <a:rPr sz="1300" b="0" i="0">
-                <a:solidFill>
-                  <a:srgbClr val="1C1B19"/>
-                </a:solidFill>
-                <a:latin typeface="Source Serif 4"/>
-              </a:rPr>
-              <a:t>If a student says this is political, try: "Today we're looking at everyday moments, like who gets followed in a store. You can disagree with me. I'm asking you to notice." Don't debate policies or parties.</a:t>
-            </a:r>
-          </a:p>
-          <a:p>
-            <a:pPr algn="l">
-              <a:spcAft>
-                <a:spcPts val="585"/>
-              </a:spcAft>
-            </a:pPr>
-            <a:r>
-              <a:rPr sz="1300" b="0" i="0">
-                <a:solidFill>
-                  <a:srgbClr val="1C1B19"/>
-                </a:solidFill>
-                <a:latin typeface="Source Serif 4"/>
-              </a:rPr>
-              <a:t/>
-            </a:r>
-          </a:p>
-          <a:p>
-            <a:pPr algn="l">
-              <a:spcAft>
-                <a:spcPts val="585"/>
-              </a:spcAft>
-            </a:pPr>
-            <a:r>
-              <a:rPr sz="1500" b="1" i="0">
-                <a:solidFill>
-                  <a:srgbClr val="1C1B19"/>
-                </a:solidFill>
-                <a:latin typeface="Source Serif 4"/>
-              </a:rPr>
-              <a:t>Watch for students carrying a lot.</a:t>
-            </a:r>
-          </a:p>
-          <a:p>
-            <a:pPr algn="l">
-              <a:spcAft>
-                <a:spcPts val="585"/>
-              </a:spcAft>
-            </a:pPr>
-            <a:r>
-              <a:rPr sz="1300" b="0" i="0">
-                <a:solidFill>
-                  <a:srgbClr val="1C1B19"/>
-                </a:solidFill>
-                <a:latin typeface="Source Serif 4"/>
-              </a:rPr>
-              <a:t>A student who seems hurt, angry or shut down, or who describes being targeted for who they are, is worth a quiet check-in after advisory and a same-day note to a counselor.</a:t>
-            </a:r>
-          </a:p>
-          <a:p>
-            <a:pPr algn="l">
-              <a:spcAft>
-                <a:spcPts val="585"/>
-              </a:spcAft>
-            </a:pPr>
-            <a:r>
-              <a:rPr sz="1300" b="0" i="0">
-                <a:solidFill>
-                  <a:srgbClr val="1C1B19"/>
-                </a:solidFill>
-                <a:latin typeface="Source Serif 4"/>
-              </a:rPr>
-              <a:t/>
-            </a:r>
-          </a:p>
-        </p:txBody>
-      </p:sp>
-    </p:spTree>
-  </p:cSld>
-  <p:clrMapOvr>
-    <a:masterClrMapping/>
-  </p:clrMapOvr>
-</p:sld>
-</file>
-
-<file path=ppt/slides/slide3.xml><?xml version="1.0" encoding="utf-8"?>
-<p:sld xmlns:a="http://schemas.openxmlformats.org/drawingml/2006/main" xmlns:p="http://schemas.openxmlformats.org/presentationml/2006/main" xmlns:r="http://schemas.openxmlformats.org/officeDocument/2006/relationships" show="0">
-  <p:cSld>
-    <p:bg>
-      <p:bgPr>
-        <a:solidFill>
-          <a:srgbClr val="EEEBE4"/>
-        </a:solidFill>
-        <a:effectLst/>
-      </p:bgPr>
-    </p:bg>
-    <p:spTree>
-      <p:nvGrpSpPr>
-        <p:cNvPr id="1" name=""/>
-        <p:cNvGrpSpPr/>
-        <p:nvPr/>
-      </p:nvGrpSpPr>
-      <p:grpSpPr/>
-      <p:sp>
-        <p:nvSpPr>
-          <p:cNvPr id="2" name="Rectangle 1"/>
-          <p:cNvSpPr/>
-          <p:nvPr/>
-        </p:nvSpPr>
-        <p:spPr>
-          <a:xfrm>
-            <a:off x="0" y="0"/>
-            <a:ext cx="12191695" cy="384048"/>
-          </a:xfrm>
-          <a:prstGeom prst="rect">
-            <a:avLst/>
-          </a:prstGeom>
-          <a:solidFill>
-            <a:srgbClr val="0B2D5B"/>
-          </a:solidFill>
-          <a:ln>
-            <a:noFill/>
-          </a:ln>
-          <a:effectLst/>
-        </p:spPr>
-        <p:style>
-          <a:lnRef idx="1">
-            <a:schemeClr val="accent1"/>
-          </a:lnRef>
-          <a:fillRef idx="3">
-            <a:schemeClr val="accent1"/>
-          </a:fillRef>
-          <a:effectRef idx="2">
-            <a:schemeClr val="accent1"/>
-          </a:effectRef>
-          <a:fontRef idx="minor">
-            <a:schemeClr val="lt1"/>
-          </a:fontRef>
-        </p:style>
-        <p:txBody>
-          <a:bodyPr rtlCol="0" anchor="ctr"/>
-          <a:lstStyle/>
-          <a:p>
-            <a:pPr algn="ctr"/>
-          </a:p>
-        </p:txBody>
-      </p:sp>
-      <p:sp>
-        <p:nvSpPr>
-          <p:cNvPr id="3" name="TextBox 2"/>
+              <a:t>A body that fits how buildings are built</a:t>
+            </a:r>
+          </a:p>
+        </p:txBody>
+      </p:sp>
+      <p:sp>
+        <p:nvSpPr>
+          <p:cNvPr id="14" name="TextBox 13"/>
           <p:cNvSpPr txBox="1"/>
           <p:nvPr/>
         </p:nvSpPr>
         <p:spPr>
           <a:xfrm>
-            <a:off x="548640" y="100584"/>
-            <a:ext cx="10972800" cy="274320"/>
+            <a:off x="822960" y="4739640"/>
+            <a:ext cx="548640" cy="670560"/>
           </a:xfrm>
           <a:prstGeom prst="rect">
             <a:avLst/>
@@ -6440,31 +8009,31 @@
           <a:p>
             <a:pPr algn="l">
               <a:spcAft>
-                <a:spcPts val="495"/>
-              </a:spcAft>
-            </a:pPr>
-            <a:r>
-              <a:rPr sz="1100" b="1" i="0">
-                <a:solidFill>
-                  <a:srgbClr val="FFFFFF"/>
-                </a:solidFill>
-                <a:latin typeface="Inter Tight"/>
-              </a:rPr>
-              <a:t>TEACHER PAGE  ·  skipped when you present  ·  Every student in the room</a:t>
-            </a:r>
-          </a:p>
-        </p:txBody>
-      </p:sp>
-      <p:sp>
-        <p:nvSpPr>
-          <p:cNvPr id="4" name="TextBox 3"/>
+                <a:spcPts val="1170"/>
+              </a:spcAft>
+            </a:pPr>
+            <a:r>
+              <a:rPr sz="2600" b="1" i="0">
+                <a:solidFill>
+                  <a:srgbClr val="F47B20"/>
+                </a:solidFill>
+                <a:latin typeface="Source Serif 4"/>
+              </a:rPr>
+              <a:t>•</a:t>
+            </a:r>
+          </a:p>
+        </p:txBody>
+      </p:sp>
+      <p:sp>
+        <p:nvSpPr>
+          <p:cNvPr id="15" name="TextBox 14"/>
           <p:cNvSpPr txBox="1"/>
           <p:nvPr/>
         </p:nvSpPr>
         <p:spPr>
           <a:xfrm>
-            <a:off x="548640" y="685800"/>
-            <a:ext cx="10972800" cy="640080"/>
+            <a:off x="1463040" y="4776216"/>
+            <a:ext cx="9875520" cy="670560"/>
           </a:xfrm>
           <a:prstGeom prst="rect">
             <a:avLst/>
@@ -6479,31 +8048,31 @@
           <a:p>
             <a:pPr algn="l">
               <a:spcAft>
-                <a:spcPts val="1350"/>
-              </a:spcAft>
-            </a:pPr>
-            <a:r>
-              <a:rPr sz="3000" b="1" i="0">
+                <a:spcPts val="945"/>
+              </a:spcAft>
+            </a:pPr>
+            <a:r>
+              <a:rPr sz="2100" b="1" i="0">
                 <a:solidFill>
                   <a:srgbClr val="1C1B19"/>
                 </a:solidFill>
                 <a:latin typeface="Source Serif 4"/>
               </a:rPr>
-              <a:t>Every student in the room</a:t>
-            </a:r>
-          </a:p>
-        </p:txBody>
-      </p:sp>
-      <p:sp>
-        <p:nvSpPr>
-          <p:cNvPr id="5" name="TextBox 4"/>
+              <a:t>Being straight or cisgender</a:t>
+            </a:r>
+          </a:p>
+        </p:txBody>
+      </p:sp>
+      <p:sp>
+        <p:nvSpPr>
+          <p:cNvPr id="16" name="TextBox 15"/>
           <p:cNvSpPr txBox="1"/>
           <p:nvPr/>
         </p:nvSpPr>
         <p:spPr>
           <a:xfrm>
-            <a:off x="548640" y="1325880"/>
-            <a:ext cx="10972800" cy="365760"/>
+            <a:off x="822960" y="5410200"/>
+            <a:ext cx="548640" cy="670560"/>
           </a:xfrm>
           <a:prstGeom prst="rect">
             <a:avLst/>
@@ -6518,31 +8087,31 @@
           <a:p>
             <a:pPr algn="l">
               <a:spcAft>
-                <a:spcPts val="630"/>
-              </a:spcAft>
-            </a:pPr>
-            <a:r>
-              <a:rPr sz="1400" b="0" i="0">
-                <a:solidFill>
-                  <a:srgbClr val="5D5A54"/>
-                </a:solidFill>
-                <a:latin typeface="Inter Tight"/>
-              </a:rPr>
-              <a:t>Culture, family, identity, ability and money: what to keep in mind for this topic.</a:t>
-            </a:r>
-          </a:p>
-        </p:txBody>
-      </p:sp>
-      <p:sp>
-        <p:nvSpPr>
-          <p:cNvPr id="6" name="TextBox 5"/>
+                <a:spcPts val="1170"/>
+              </a:spcAft>
+            </a:pPr>
+            <a:r>
+              <a:rPr sz="2600" b="1" i="0">
+                <a:solidFill>
+                  <a:srgbClr val="F47B20"/>
+                </a:solidFill>
+                <a:latin typeface="Source Serif 4"/>
+              </a:rPr>
+              <a:t>•</a:t>
+            </a:r>
+          </a:p>
+        </p:txBody>
+      </p:sp>
+      <p:sp>
+        <p:nvSpPr>
+          <p:cNvPr id="17" name="TextBox 16"/>
           <p:cNvSpPr txBox="1"/>
           <p:nvPr/>
         </p:nvSpPr>
         <p:spPr>
           <a:xfrm>
-            <a:off x="548640" y="1828800"/>
-            <a:ext cx="5394960" cy="4572000"/>
+            <a:off x="1463040" y="5446776"/>
+            <a:ext cx="9875520" cy="670560"/>
           </a:xfrm>
           <a:prstGeom prst="rect">
             <a:avLst/>
@@ -6557,1011 +8126,17 @@
           <a:p>
             <a:pPr algn="l">
               <a:spcAft>
-                <a:spcPts val="585"/>
-              </a:spcAft>
-            </a:pPr>
-            <a:r>
-              <a:rPr sz="1500" b="1" i="0">
+                <a:spcPts val="945"/>
+              </a:spcAft>
+            </a:pPr>
+            <a:r>
+              <a:rPr sz="2100" b="1" i="0">
                 <a:solidFill>
                   <a:srgbClr val="1C1B19"/>
                 </a:solidFill>
                 <a:latin typeface="Source Serif 4"/>
               </a:rPr>
-              <a:t>Students of color.</a:t>
-            </a:r>
-          </a:p>
-          <a:p>
-            <a:pPr algn="l">
-              <a:spcAft>
-                <a:spcPts val="585"/>
-              </a:spcAft>
-            </a:pPr>
-            <a:r>
-              <a:rPr sz="1300" b="0" i="0">
-                <a:solidFill>
-                  <a:srgbClr val="1C1B19"/>
-                </a:solidFill>
-                <a:latin typeface="Source Serif 4"/>
-              </a:rPr>
-              <a:t>Some will feel relief that this is named, some will feel tired of hearing it again, and some won't want attention on it at all. All three are fair. Give them the same choice to stay quiet that everyone else has.</a:t>
-            </a:r>
-          </a:p>
-          <a:p>
-            <a:pPr algn="l">
-              <a:spcAft>
-                <a:spcPts val="585"/>
-              </a:spcAft>
-            </a:pPr>
-            <a:r>
-              <a:rPr sz="1300" b="0" i="0">
-                <a:solidFill>
-                  <a:srgbClr val="1C1B19"/>
-                </a:solidFill>
-                <a:latin typeface="Source Serif 4"/>
-              </a:rPr>
-              <a:t/>
-            </a:r>
-          </a:p>
-          <a:p>
-            <a:pPr algn="l">
-              <a:spcAft>
-                <a:spcPts val="585"/>
-              </a:spcAft>
-            </a:pPr>
-            <a:r>
-              <a:rPr sz="1500" b="1" i="0">
-                <a:solidFill>
-                  <a:srgbClr val="1C1B19"/>
-                </a:solidFill>
-                <a:latin typeface="Source Serif 4"/>
-              </a:rPr>
-              <a:t>White students with real headwinds.</a:t>
-            </a:r>
-          </a:p>
-          <a:p>
-            <a:pPr algn="l">
-              <a:spcAft>
-                <a:spcPts val="585"/>
-              </a:spcAft>
-            </a:pPr>
-            <a:r>
-              <a:rPr sz="1300" b="0" i="0">
-                <a:solidFill>
-                  <a:srgbClr val="1C1B19"/>
-                </a:solidFill>
-                <a:latin typeface="Source Serif 4"/>
-              </a:rPr>
-              <a:t>Poverty, a disability, a family crisis, being LGBTQ+, a parent who's sick. The lesson only works if these are taken seriously alongside race.</a:t>
-            </a:r>
-          </a:p>
-          <a:p>
-            <a:pPr algn="l">
-              <a:spcAft>
-                <a:spcPts val="585"/>
-              </a:spcAft>
-            </a:pPr>
-            <a:r>
-              <a:rPr sz="1300" b="0" i="0">
-                <a:solidFill>
-                  <a:srgbClr val="1C1B19"/>
-                </a:solidFill>
-                <a:latin typeface="Source Serif 4"/>
-              </a:rPr>
-              <a:t/>
-            </a:r>
-          </a:p>
-          <a:p>
-            <a:pPr algn="l">
-              <a:spcAft>
-                <a:spcPts val="585"/>
-              </a:spcAft>
-            </a:pPr>
-            <a:r>
-              <a:rPr sz="1500" b="1" i="0">
-                <a:solidFill>
-                  <a:srgbClr val="1C1B19"/>
-                </a:solidFill>
-                <a:latin typeface="Source Serif 4"/>
-              </a:rPr>
-              <a:t>Who counts as white is complicated.</a:t>
-            </a:r>
-          </a:p>
-          <a:p>
-            <a:pPr algn="l">
-              <a:spcAft>
-                <a:spcPts val="585"/>
-              </a:spcAft>
-            </a:pPr>
-            <a:r>
-              <a:rPr sz="1300" b="0" i="0">
-                <a:solidFill>
-                  <a:srgbClr val="1C1B19"/>
-                </a:solidFill>
-                <a:latin typeface="Source Serif 4"/>
-              </a:rPr>
-              <a:t>Many Jewish, Middle Eastern and North African, Latino and multiracial students have a complicated relationship with the word white, and it can change depending on where they are. Let students name themselves, and don't sort anyone.</a:t>
-            </a:r>
-          </a:p>
-          <a:p>
-            <a:pPr algn="l">
-              <a:spcAft>
-                <a:spcPts val="585"/>
-              </a:spcAft>
-            </a:pPr>
-            <a:r>
-              <a:rPr sz="1300" b="0" i="0">
-                <a:solidFill>
-                  <a:srgbClr val="1C1B19"/>
-                </a:solidFill>
-                <a:latin typeface="Source Serif 4"/>
-              </a:rPr>
-              <a:t/>
-            </a:r>
-          </a:p>
-        </p:txBody>
-      </p:sp>
-      <p:sp>
-        <p:nvSpPr>
-          <p:cNvPr id="7" name="TextBox 6"/>
-          <p:cNvSpPr txBox="1"/>
-          <p:nvPr/>
-        </p:nvSpPr>
-        <p:spPr>
-          <a:xfrm>
-            <a:off x="6217920" y="1828800"/>
-            <a:ext cx="5394960" cy="4572000"/>
-          </a:xfrm>
-          <a:prstGeom prst="rect">
-            <a:avLst/>
-          </a:prstGeom>
-          <a:noFill/>
-        </p:spPr>
-        <p:txBody>
-          <a:bodyPr wrap="square" anchor="t" lIns="0" rIns="0" tIns="0" bIns="0">
-            <a:spAutoFit/>
-          </a:bodyPr>
-          <a:lstStyle/>
-          <a:p>
-            <a:pPr algn="l">
-              <a:spcAft>
-                <a:spcPts val="585"/>
-              </a:spcAft>
-            </a:pPr>
-            <a:r>
-              <a:rPr sz="1500" b="1" i="0">
-                <a:solidFill>
-                  <a:srgbClr val="1C1B19"/>
-                </a:solidFill>
-                <a:latin typeface="Source Serif 4"/>
-              </a:rPr>
-              <a:t>International and immigrant students.</a:t>
-            </a:r>
-          </a:p>
-          <a:p>
-            <a:pPr algn="l">
-              <a:spcAft>
-                <a:spcPts val="585"/>
-              </a:spcAft>
-            </a:pPr>
-            <a:r>
-              <a:rPr sz="1300" b="0" i="0">
-                <a:solidFill>
-                  <a:srgbClr val="1C1B19"/>
-                </a:solidFill>
-                <a:latin typeface="Source Serif 4"/>
-              </a:rPr>
-              <a:t>Race works differently in other countries. A student may be in the majority at home and a minority here, or the other way around. That's a useful thing to notice, not a correction to make.</a:t>
-            </a:r>
-          </a:p>
-          <a:p>
-            <a:pPr algn="l">
-              <a:spcAft>
-                <a:spcPts val="585"/>
-              </a:spcAft>
-            </a:pPr>
-            <a:r>
-              <a:rPr sz="1300" b="0" i="0">
-                <a:solidFill>
-                  <a:srgbClr val="1C1B19"/>
-                </a:solidFill>
-                <a:latin typeface="Source Serif 4"/>
-              </a:rPr>
-              <a:t/>
-            </a:r>
-          </a:p>
-          <a:p>
-            <a:pPr algn="l">
-              <a:spcAft>
-                <a:spcPts val="585"/>
-              </a:spcAft>
-            </a:pPr>
-            <a:r>
-              <a:rPr sz="1500" b="1" i="0">
-                <a:solidFill>
-                  <a:srgbClr val="1C1B19"/>
-                </a:solidFill>
-                <a:latin typeface="Source Serif 4"/>
-              </a:rPr>
-              <a:t>Families disagree about this.</a:t>
-            </a:r>
-          </a:p>
-          <a:p>
-            <a:pPr algn="l">
-              <a:spcAft>
-                <a:spcPts val="585"/>
-              </a:spcAft>
-            </a:pPr>
-            <a:r>
-              <a:rPr sz="1300" b="0" i="0">
-                <a:solidFill>
-                  <a:srgbClr val="1C1B19"/>
-                </a:solidFill>
-                <a:latin typeface="Source Serif 4"/>
-              </a:rPr>
-              <a:t>Students come from homes with different politics and faiths. The lesson asks them to notice everyday moments, not to adopt a view. Respect disagreement, and keep dignity for everyone in the room.</a:t>
-            </a:r>
-          </a:p>
-          <a:p>
-            <a:pPr algn="l">
-              <a:spcAft>
-                <a:spcPts val="585"/>
-              </a:spcAft>
-            </a:pPr>
-            <a:r>
-              <a:rPr sz="1300" b="0" i="0">
-                <a:solidFill>
-                  <a:srgbClr val="1C1B19"/>
-                </a:solidFill>
-                <a:latin typeface="Source Serif 4"/>
-              </a:rPr>
-              <a:t/>
-            </a:r>
-          </a:p>
-          <a:p>
-            <a:pPr algn="l">
-              <a:spcAft>
-                <a:spcPts val="585"/>
-              </a:spcAft>
-            </a:pPr>
-            <a:r>
-              <a:rPr sz="1500" b="1" i="0">
-                <a:solidFill>
-                  <a:srgbClr val="1C1B19"/>
-                </a:solidFill>
-                <a:latin typeface="Source Serif 4"/>
-              </a:rPr>
-              <a:t>Other tailwinds.</a:t>
-            </a:r>
-          </a:p>
-          <a:p>
-            <a:pPr algn="l">
-              <a:spcAft>
-                <a:spcPts val="585"/>
-              </a:spcAft>
-            </a:pPr>
-            <a:r>
-              <a:rPr sz="1300" b="0" i="0">
-                <a:solidFill>
-                  <a:srgbClr val="1C1B19"/>
-                </a:solidFill>
-                <a:latin typeface="Source Serif 4"/>
-              </a:rPr>
-              <a:t>Money, citizenship, English at home, ability, gender, being straight or cisgender, parents who went to college. Name several so the idea is clear, then name race directly so it doesn't get lost.</a:t>
-            </a:r>
-          </a:p>
-          <a:p>
-            <a:pPr algn="l">
-              <a:spcAft>
-                <a:spcPts val="585"/>
-              </a:spcAft>
-            </a:pPr>
-            <a:r>
-              <a:rPr sz="1300" b="0" i="0">
-                <a:solidFill>
-                  <a:srgbClr val="1C1B19"/>
-                </a:solidFill>
-                <a:latin typeface="Source Serif 4"/>
-              </a:rPr>
-              <a:t/>
-            </a:r>
-          </a:p>
-          <a:p>
-            <a:pPr algn="l">
-              <a:spcAft>
-                <a:spcPts val="585"/>
-              </a:spcAft>
-            </a:pPr>
-            <a:r>
-              <a:rPr sz="1500" b="1" i="0">
-                <a:solidFill>
-                  <a:srgbClr val="1C1B19"/>
-                </a:solidFill>
-                <a:latin typeface="Source Serif 4"/>
-              </a:rPr>
-              <a:t>Show who rides at the front.</a:t>
-            </a:r>
-          </a:p>
-          <a:p>
-            <a:pPr algn="l">
-              <a:spcAft>
-                <a:spcPts val="585"/>
-              </a:spcAft>
-            </a:pPr>
-            <a:r>
-              <a:rPr sz="1300" b="0" i="0">
-                <a:solidFill>
-                  <a:srgbClr val="1C1B19"/>
-                </a:solidFill>
-                <a:latin typeface="Source Serif 4"/>
-              </a:rPr>
-              <a:t>If you use the L39ION clip, let it stand as a team at the top of its sport, not as a lesson about hardship. Justin Williams built it to widen who gets to see themselves in cycling.</a:t>
-            </a:r>
-          </a:p>
-          <a:p>
-            <a:pPr algn="l">
-              <a:spcAft>
-                <a:spcPts val="585"/>
-              </a:spcAft>
-            </a:pPr>
-            <a:r>
-              <a:rPr sz="1300" b="0" i="0">
-                <a:solidFill>
-                  <a:srgbClr val="1C1B19"/>
-                </a:solidFill>
-                <a:latin typeface="Source Serif 4"/>
-              </a:rPr>
-              <a:t/>
-            </a:r>
-          </a:p>
-        </p:txBody>
-      </p:sp>
-    </p:spTree>
-  </p:cSld>
-  <p:clrMapOvr>
-    <a:masterClrMapping/>
-  </p:clrMapOvr>
-</p:sld>
-</file>
-
-<file path=ppt/slides/slide4.xml><?xml version="1.0" encoding="utf-8"?>
-<p:sld xmlns:a="http://schemas.openxmlformats.org/drawingml/2006/main" xmlns:p="http://schemas.openxmlformats.org/presentationml/2006/main" xmlns:r="http://schemas.openxmlformats.org/officeDocument/2006/relationships" show="0">
-  <p:cSld>
-    <p:bg>
-      <p:bgPr>
-        <a:solidFill>
-          <a:srgbClr val="EEEBE4"/>
-        </a:solidFill>
-        <a:effectLst/>
-      </p:bgPr>
-    </p:bg>
-    <p:spTree>
-      <p:nvGrpSpPr>
-        <p:cNvPr id="1" name=""/>
-        <p:cNvGrpSpPr/>
-        <p:nvPr/>
-      </p:nvGrpSpPr>
-      <p:grpSpPr/>
-      <p:sp>
-        <p:nvSpPr>
-          <p:cNvPr id="2" name="Rectangle 1"/>
-          <p:cNvSpPr/>
-          <p:nvPr/>
-        </p:nvSpPr>
-        <p:spPr>
-          <a:xfrm>
-            <a:off x="0" y="0"/>
-            <a:ext cx="12191695" cy="384048"/>
-          </a:xfrm>
-          <a:prstGeom prst="rect">
-            <a:avLst/>
-          </a:prstGeom>
-          <a:solidFill>
-            <a:srgbClr val="0B2D5B"/>
-          </a:solidFill>
-          <a:ln>
-            <a:noFill/>
-          </a:ln>
-          <a:effectLst/>
-        </p:spPr>
-        <p:style>
-          <a:lnRef idx="1">
-            <a:schemeClr val="accent1"/>
-          </a:lnRef>
-          <a:fillRef idx="3">
-            <a:schemeClr val="accent1"/>
-          </a:fillRef>
-          <a:effectRef idx="2">
-            <a:schemeClr val="accent1"/>
-          </a:effectRef>
-          <a:fontRef idx="minor">
-            <a:schemeClr val="lt1"/>
-          </a:fontRef>
-        </p:style>
-        <p:txBody>
-          <a:bodyPr rtlCol="0" anchor="ctr"/>
-          <a:lstStyle/>
-          <a:p>
-            <a:pPr algn="ctr"/>
-          </a:p>
-        </p:txBody>
-      </p:sp>
-      <p:sp>
-        <p:nvSpPr>
-          <p:cNvPr id="3" name="TextBox 2"/>
-          <p:cNvSpPr txBox="1"/>
-          <p:nvPr/>
-        </p:nvSpPr>
-        <p:spPr>
-          <a:xfrm>
-            <a:off x="548640" y="100584"/>
-            <a:ext cx="10972800" cy="274320"/>
-          </a:xfrm>
-          <a:prstGeom prst="rect">
-            <a:avLst/>
-          </a:prstGeom>
-          <a:noFill/>
-        </p:spPr>
-        <p:txBody>
-          <a:bodyPr wrap="square" anchor="t" lIns="0" rIns="0" tIns="0" bIns="0">
-            <a:spAutoFit/>
-          </a:bodyPr>
-          <a:lstStyle/>
-          <a:p>
-            <a:pPr algn="l">
-              <a:spcAft>
-                <a:spcPts val="495"/>
-              </a:spcAft>
-            </a:pPr>
-            <a:r>
-              <a:rPr sz="1100" b="1" i="0">
-                <a:solidFill>
-                  <a:srgbClr val="FFFFFF"/>
-                </a:solidFill>
-                <a:latin typeface="Inter Tight"/>
-              </a:rPr>
-              <a:t>TEACHER PAGE  ·  skipped when you present  ·  Background</a:t>
-            </a:r>
-          </a:p>
-        </p:txBody>
-      </p:sp>
-      <p:sp>
-        <p:nvSpPr>
-          <p:cNvPr id="4" name="TextBox 3"/>
-          <p:cNvSpPr txBox="1"/>
-          <p:nvPr/>
-        </p:nvSpPr>
-        <p:spPr>
-          <a:xfrm>
-            <a:off x="548640" y="685800"/>
-            <a:ext cx="10972800" cy="640080"/>
-          </a:xfrm>
-          <a:prstGeom prst="rect">
-            <a:avLst/>
-          </a:prstGeom>
-          <a:noFill/>
-        </p:spPr>
-        <p:txBody>
-          <a:bodyPr wrap="square" anchor="t" lIns="0" rIns="0" tIns="0" bIns="0">
-            <a:spAutoFit/>
-          </a:bodyPr>
-          <a:lstStyle/>
-          <a:p>
-            <a:pPr algn="l">
-              <a:spcAft>
-                <a:spcPts val="1350"/>
-              </a:spcAft>
-            </a:pPr>
-            <a:r>
-              <a:rPr sz="3000" b="1" i="0">
-                <a:solidFill>
-                  <a:srgbClr val="1C1B19"/>
-                </a:solidFill>
-                <a:latin typeface="Source Serif 4"/>
-              </a:rPr>
-              <a:t>What the research says</a:t>
-            </a:r>
-          </a:p>
-        </p:txBody>
-      </p:sp>
-      <p:sp>
-        <p:nvSpPr>
-          <p:cNvPr id="5" name="TextBox 4"/>
-          <p:cNvSpPr txBox="1"/>
-          <p:nvPr/>
-        </p:nvSpPr>
-        <p:spPr>
-          <a:xfrm>
-            <a:off x="548640" y="1463040"/>
-            <a:ext cx="5394960" cy="4937760"/>
-          </a:xfrm>
-          <a:prstGeom prst="rect">
-            <a:avLst/>
-          </a:prstGeom>
-          <a:noFill/>
-        </p:spPr>
-        <p:txBody>
-          <a:bodyPr wrap="square" anchor="t" lIns="0" rIns="0" tIns="0" bIns="0">
-            <a:spAutoFit/>
-          </a:bodyPr>
-          <a:lstStyle/>
-          <a:p>
-            <a:pPr algn="l">
-              <a:spcAft>
-                <a:spcPts val="585"/>
-              </a:spcAft>
-            </a:pPr>
-            <a:r>
-              <a:rPr sz="1300" b="0" i="0">
-                <a:solidFill>
-                  <a:srgbClr val="1C1B19"/>
-                </a:solidFill>
-                <a:latin typeface="Source Serif 4"/>
-              </a:rPr>
-              <a:t>Across seven studies, people saw the obstacles they faced much more readily than the advantages that helped them, and this was explained by obstacles being easier to bring to mind.</a:t>
-            </a:r>
-          </a:p>
-          <a:p>
-            <a:pPr algn="l">
-              <a:spcAft>
-                <a:spcPts val="585"/>
-              </a:spcAft>
-            </a:pPr>
-            <a:r>
-              <a:rPr sz="1050" b="0" i="0">
-                <a:solidFill>
-                  <a:srgbClr val="5D5A54"/>
-                </a:solidFill>
-                <a:latin typeface="Inter Tight"/>
-              </a:rPr>
-              <a:t>Davidai &amp; Gilovich, Journal of Personality and Social Psychology, 2016</a:t>
-            </a:r>
-          </a:p>
-          <a:p>
-            <a:pPr algn="l">
-              <a:spcAft>
-                <a:spcPts val="585"/>
-              </a:spcAft>
-            </a:pPr>
-            <a:r>
-              <a:rPr sz="1300" b="0" i="0">
-                <a:solidFill>
-                  <a:srgbClr val="1C1B19"/>
-                </a:solidFill>
-                <a:latin typeface="Source Serif 4"/>
-              </a:rPr>
-              <a:t>In wind tunnel and computer simulations of a 121-rider peloton, riders in the middle and back faced as little as 5 to 10 percent of the air resistance of a rider alone. Earlier research on small groups found drag reductions of roughly 30 to 50 percent.</a:t>
-            </a:r>
-          </a:p>
-          <a:p>
-            <a:pPr algn="l">
-              <a:spcAft>
-                <a:spcPts val="585"/>
-              </a:spcAft>
-            </a:pPr>
-            <a:r>
-              <a:rPr sz="1050" b="0" i="0">
-                <a:solidFill>
-                  <a:srgbClr val="5D5A54"/>
-                </a:solidFill>
-                <a:latin typeface="Inter Tight"/>
-              </a:rPr>
-              <a:t>Blocken et al., Journal of Wind Engineering and Industrial Aerodynamics, 2018</a:t>
-            </a:r>
-          </a:p>
-          <a:p>
-            <a:pPr algn="l">
-              <a:spcAft>
-                <a:spcPts val="585"/>
-              </a:spcAft>
-            </a:pPr>
-            <a:r>
-              <a:rPr sz="1300" b="0" i="0">
-                <a:solidFill>
-                  <a:srgbClr val="1C1B19"/>
-                </a:solidFill>
-                <a:latin typeface="Source Serif 4"/>
-              </a:rPr>
-              <a:t>Fictional resumes with names common among white Americans received about 50 percent more callbacks than the same resumes with names common among Black Americans.</a:t>
-            </a:r>
-          </a:p>
-          <a:p>
-            <a:pPr algn="l">
-              <a:spcAft>
-                <a:spcPts val="585"/>
-              </a:spcAft>
-            </a:pPr>
-            <a:r>
-              <a:rPr sz="1050" b="0" i="0">
-                <a:solidFill>
-                  <a:srgbClr val="5D5A54"/>
-                </a:solidFill>
-                <a:latin typeface="Inter Tight"/>
-              </a:rPr>
-              <a:t>Bertrand &amp; Mullainathan, American Economic Review, 2004</a:t>
-            </a:r>
-          </a:p>
-        </p:txBody>
-      </p:sp>
-      <p:sp>
-        <p:nvSpPr>
-          <p:cNvPr id="6" name="TextBox 5"/>
-          <p:cNvSpPr txBox="1"/>
-          <p:nvPr/>
-        </p:nvSpPr>
-        <p:spPr>
-          <a:xfrm>
-            <a:off x="6217920" y="1463040"/>
-            <a:ext cx="5394960" cy="4937760"/>
-          </a:xfrm>
-          <a:prstGeom prst="rect">
-            <a:avLst/>
-          </a:prstGeom>
-          <a:noFill/>
-        </p:spPr>
-        <p:txBody>
-          <a:bodyPr wrap="square" anchor="t" lIns="0" rIns="0" tIns="0" bIns="0">
-            <a:spAutoFit/>
-          </a:bodyPr>
-          <a:lstStyle/>
-          <a:p>
-            <a:pPr algn="l">
-              <a:spcAft>
-                <a:spcPts val="585"/>
-              </a:spcAft>
-            </a:pPr>
-            <a:r>
-              <a:rPr sz="1300" b="0" i="0">
-                <a:solidFill>
-                  <a:srgbClr val="1C1B19"/>
-                </a:solidFill>
-                <a:latin typeface="Source Serif 4"/>
-              </a:rPr>
-              <a:t>White participants shown evidence of racial privilege claimed more personal hardships; a short values affirmation reversed this, and affirmed participants acknowledged more personal privilege.</a:t>
-            </a:r>
-          </a:p>
-          <a:p>
-            <a:pPr algn="l">
-              <a:spcAft>
-                <a:spcPts val="585"/>
-              </a:spcAft>
-            </a:pPr>
-            <a:r>
-              <a:rPr sz="1050" b="0" i="0">
-                <a:solidFill>
-                  <a:srgbClr val="5D5A54"/>
-                </a:solidFill>
-                <a:latin typeface="Inter Tight"/>
-              </a:rPr>
-              <a:t>Phillips &amp; Lowery, Journal of Experimental Social Psychology, 2015</a:t>
-            </a:r>
-          </a:p>
-          <a:p>
-            <a:pPr algn="l">
-              <a:spcAft>
-                <a:spcPts val="585"/>
-              </a:spcAft>
-            </a:pPr>
-            <a:r>
-              <a:rPr sz="1300" b="0" i="0">
-                <a:solidFill>
-                  <a:srgbClr val="1C1B19"/>
-                </a:solidFill>
-                <a:latin typeface="Source Serif 4"/>
-              </a:rPr>
-              <a:t>White participants saw inequality as more threatening when it was framed as white advantage than as Black disadvantage; self-affirmation increased their acknowledgment of privilege.</a:t>
-            </a:r>
-          </a:p>
-          <a:p>
-            <a:pPr algn="l">
-              <a:spcAft>
-                <a:spcPts val="585"/>
-              </a:spcAft>
-            </a:pPr>
-            <a:r>
-              <a:rPr sz="1050" b="0" i="0">
-                <a:solidFill>
-                  <a:srgbClr val="5D5A54"/>
-                </a:solidFill>
-                <a:latin typeface="Inter Tight"/>
-              </a:rPr>
-              <a:t>Lowery, Knowles &amp; Unzueta, Personality and Social Psychology Bulletin, 2007</a:t>
-            </a:r>
-          </a:p>
-          <a:p>
-            <a:pPr algn="l">
-              <a:spcAft>
-                <a:spcPts val="585"/>
-              </a:spcAft>
-            </a:pPr>
-            <a:r>
-              <a:rPr sz="1300" b="0" i="0">
-                <a:solidFill>
-                  <a:srgbClr val="1C1B19"/>
-                </a:solidFill>
-                <a:latin typeface="Source Serif 4"/>
-              </a:rPr>
-              <a:t>Among social liberals, reading about white privilege reduced sympathy for a poor white person and increased blame toward him, compared with a poor Black person.</a:t>
-            </a:r>
-          </a:p>
-          <a:p>
-            <a:pPr algn="l">
-              <a:spcAft>
-                <a:spcPts val="585"/>
-              </a:spcAft>
-            </a:pPr>
-            <a:r>
-              <a:rPr sz="1050" b="0" i="0">
-                <a:solidFill>
-                  <a:srgbClr val="5D5A54"/>
-                </a:solidFill>
-                <a:latin typeface="Inter Tight"/>
-              </a:rPr>
-              <a:t>Cooley et al., Journal of Experimental Psychology: General, 2019</a:t>
-            </a:r>
-          </a:p>
-        </p:txBody>
-      </p:sp>
-    </p:spTree>
-  </p:cSld>
-  <p:clrMapOvr>
-    <a:masterClrMapping/>
-  </p:clrMapOvr>
-</p:sld>
-</file>
-
-<file path=ppt/slides/slide5.xml><?xml version="1.0" encoding="utf-8"?>
-<p:sld xmlns:a="http://schemas.openxmlformats.org/drawingml/2006/main" xmlns:p="http://schemas.openxmlformats.org/presentationml/2006/main" xmlns:r="http://schemas.openxmlformats.org/officeDocument/2006/relationships">
-  <p:cSld>
-    <p:bg>
-      <p:bgPr>
-        <a:solidFill>
-          <a:srgbClr val="0B2D5B"/>
-        </a:solidFill>
-        <a:effectLst/>
-      </p:bgPr>
-    </p:bg>
-    <p:spTree>
-      <p:nvGrpSpPr>
-        <p:cNvPr id="1" name=""/>
-        <p:cNvGrpSpPr/>
-        <p:nvPr/>
-      </p:nvGrpSpPr>
-      <p:grpSpPr/>
-      <p:sp>
-        <p:nvSpPr>
-          <p:cNvPr id="2" name="Rectangle 1"/>
-          <p:cNvSpPr/>
-          <p:nvPr/>
-        </p:nvSpPr>
-        <p:spPr>
-          <a:xfrm>
-            <a:off x="548640" y="502920"/>
-            <a:ext cx="457200" cy="54864"/>
-          </a:xfrm>
-          <a:prstGeom prst="rect">
-            <a:avLst/>
-          </a:prstGeom>
-          <a:solidFill>
-            <a:srgbClr val="F47B20"/>
-          </a:solidFill>
-          <a:ln>
-            <a:noFill/>
-          </a:ln>
-          <a:effectLst/>
-        </p:spPr>
-        <p:style>
-          <a:lnRef idx="1">
-            <a:schemeClr val="accent1"/>
-          </a:lnRef>
-          <a:fillRef idx="3">
-            <a:schemeClr val="accent1"/>
-          </a:fillRef>
-          <a:effectRef idx="2">
-            <a:schemeClr val="accent1"/>
-          </a:effectRef>
-          <a:fontRef idx="minor">
-            <a:schemeClr val="lt1"/>
-          </a:fontRef>
-        </p:style>
-        <p:txBody>
-          <a:bodyPr rtlCol="0" anchor="ctr"/>
-          <a:lstStyle/>
-          <a:p>
-            <a:pPr algn="ctr"/>
-          </a:p>
-        </p:txBody>
-      </p:sp>
-      <p:sp>
-        <p:nvSpPr>
-          <p:cNvPr id="3" name="TextBox 2"/>
-          <p:cNvSpPr txBox="1"/>
-          <p:nvPr/>
-        </p:nvSpPr>
-        <p:spPr>
-          <a:xfrm>
-            <a:off x="1143000" y="393192"/>
-            <a:ext cx="8229600" cy="274320"/>
-          </a:xfrm>
-          <a:prstGeom prst="rect">
-            <a:avLst/>
-          </a:prstGeom>
-          <a:noFill/>
-        </p:spPr>
-        <p:txBody>
-          <a:bodyPr wrap="square" anchor="t" lIns="0" rIns="0" tIns="0" bIns="0">
-            <a:spAutoFit/>
-          </a:bodyPr>
-          <a:lstStyle/>
-          <a:p>
-            <a:pPr algn="l">
-              <a:spcAft>
-                <a:spcPts val="540"/>
-              </a:spcAft>
-            </a:pPr>
-            <a:r>
-              <a:rPr sz="1200" b="1" i="0">
-                <a:solidFill>
-                  <a:srgbClr val="5D5A54"/>
-                </a:solidFill>
-                <a:latin typeface="Inter Tight"/>
-              </a:rPr>
-              <a:t>HEADWINDS AND TAILWINDS</a:t>
-            </a:r>
-          </a:p>
-        </p:txBody>
-      </p:sp>
-      <p:sp>
-        <p:nvSpPr>
-          <p:cNvPr id="4" name="TextBox 3"/>
-          <p:cNvSpPr txBox="1"/>
-          <p:nvPr/>
-        </p:nvSpPr>
-        <p:spPr>
-          <a:xfrm>
-            <a:off x="8229600" y="6400800"/>
-            <a:ext cx="3410712" cy="274320"/>
-          </a:xfrm>
-          <a:prstGeom prst="rect">
-            <a:avLst/>
-          </a:prstGeom>
-          <a:noFill/>
-        </p:spPr>
-        <p:txBody>
-          <a:bodyPr wrap="square" anchor="t" lIns="0" rIns="0" tIns="0" bIns="0">
-            <a:spAutoFit/>
-          </a:bodyPr>
-          <a:lstStyle/>
-          <a:p>
-            <a:pPr algn="r">
-              <a:spcAft>
-                <a:spcPts val="450"/>
-              </a:spcAft>
-            </a:pPr>
-            <a:r>
-              <a:rPr sz="1000" b="0" i="0">
-                <a:solidFill>
-                  <a:srgbClr val="5D5A54"/>
-                </a:solidFill>
-                <a:latin typeface="Inter Tight"/>
-              </a:rPr>
-              <a:t>Beaver Counseling</a:t>
-            </a:r>
-          </a:p>
-        </p:txBody>
-      </p:sp>
-      <p:sp>
-        <p:nvSpPr>
-          <p:cNvPr id="5" name="TextBox 4"/>
-          <p:cNvSpPr txBox="1"/>
-          <p:nvPr/>
-        </p:nvSpPr>
-        <p:spPr>
-          <a:xfrm>
-            <a:off x="822960" y="2011680"/>
-            <a:ext cx="10515600" cy="1463040"/>
-          </a:xfrm>
-          <a:prstGeom prst="rect">
-            <a:avLst/>
-          </a:prstGeom>
-          <a:noFill/>
-        </p:spPr>
-        <p:txBody>
-          <a:bodyPr wrap="square" anchor="b" lIns="0" rIns="0" tIns="0" bIns="0">
-            <a:spAutoFit/>
-          </a:bodyPr>
-          <a:lstStyle/>
-          <a:p>
-            <a:pPr algn="l">
-              <a:spcAft>
-                <a:spcPts val="2700"/>
-              </a:spcAft>
-            </a:pPr>
-            <a:r>
-              <a:rPr sz="6000" b="1" i="0">
-                <a:solidFill>
-                  <a:srgbClr val="FFFFFF"/>
-                </a:solidFill>
-                <a:latin typeface="Source Serif 4"/>
-              </a:rPr>
-              <a:t>Headwinds and Tailwinds</a:t>
-            </a:r>
-          </a:p>
-        </p:txBody>
-      </p:sp>
-      <p:sp>
-        <p:nvSpPr>
-          <p:cNvPr id="6" name="TextBox 5"/>
-          <p:cNvSpPr txBox="1"/>
-          <p:nvPr/>
-        </p:nvSpPr>
-        <p:spPr>
-          <a:xfrm>
-            <a:off x="822960" y="3611880"/>
-            <a:ext cx="10515600" cy="914400"/>
-          </a:xfrm>
-          <a:prstGeom prst="rect">
-            <a:avLst/>
-          </a:prstGeom>
-          <a:noFill/>
-        </p:spPr>
-        <p:txBody>
-          <a:bodyPr wrap="square" anchor="t" lIns="0" rIns="0" tIns="0" bIns="0">
-            <a:spAutoFit/>
-          </a:bodyPr>
-          <a:lstStyle/>
-          <a:p>
-            <a:pPr algn="l">
-              <a:spcAft>
-                <a:spcPts val="1080"/>
-              </a:spcAft>
-            </a:pPr>
-            <a:r>
-              <a:rPr sz="2400" b="0" i="1">
-                <a:solidFill>
-                  <a:srgbClr val="E8E4DA"/>
-                </a:solidFill>
-                <a:latin typeface="Source Serif 4"/>
-              </a:rPr>
-              <a:t>Some things push against you. Some push you along. One kind is much easier to see.</a:t>
-            </a:r>
-          </a:p>
-        </p:txBody>
-      </p:sp>
-      <p:sp>
-        <p:nvSpPr>
-          <p:cNvPr id="7" name="TextBox 6"/>
-          <p:cNvSpPr txBox="1"/>
-          <p:nvPr/>
-        </p:nvSpPr>
-        <p:spPr>
-          <a:xfrm>
-            <a:off x="822960" y="6035040"/>
-            <a:ext cx="7315200" cy="365760"/>
-          </a:xfrm>
-          <a:prstGeom prst="rect">
-            <a:avLst/>
-          </a:prstGeom>
-          <a:noFill/>
-        </p:spPr>
-        <p:txBody>
-          <a:bodyPr wrap="square" anchor="t" lIns="0" rIns="0" tIns="0" bIns="0">
-            <a:spAutoFit/>
-          </a:bodyPr>
-          <a:lstStyle/>
-          <a:p>
-            <a:pPr algn="l">
-              <a:spcAft>
-                <a:spcPts val="585"/>
-              </a:spcAft>
-            </a:pPr>
-            <a:r>
-              <a:rPr sz="1300" b="0" i="0">
-                <a:solidFill>
-                  <a:srgbClr val="E8E4DA"/>
-                </a:solidFill>
-                <a:latin typeface="Inter Tight"/>
-              </a:rPr>
-              <a:t>Beaver Upper School · Counseling</a:t>
+              <a:t>A passport from the country you live in</a:t>
             </a:r>
           </a:p>
         </p:txBody>
@@ -7670,7 +8245,7 @@
                 </a:solidFill>
                 <a:latin typeface="Inter Tight"/>
               </a:rPr>
-              <a:t>TO START</a:t>
+              <a:t>WATCH</a:t>
             </a:r>
           </a:p>
         </p:txBody>
@@ -7716,58 +8291,14 @@
       </p:sp>
       <p:sp>
         <p:nvSpPr>
-          <p:cNvPr id="5" name="Rectangle 4"/>
-          <p:cNvSpPr/>
-          <p:nvPr/>
-        </p:nvSpPr>
-        <p:spPr>
-          <a:xfrm>
-            <a:off x="822960" y="1371600"/>
-            <a:ext cx="73152" cy="3566160"/>
-          </a:xfrm>
-          <a:prstGeom prst="rect">
-            <a:avLst/>
-          </a:prstGeom>
-          <a:solidFill>
-            <a:srgbClr val="F47B20"/>
-          </a:solidFill>
-          <a:ln>
-            <a:noFill/>
-          </a:ln>
-          <a:effectLst/>
-        </p:spPr>
-        <p:style>
-          <a:lnRef idx="1">
-            <a:schemeClr val="accent1"/>
-          </a:lnRef>
-          <a:fillRef idx="3">
-            <a:schemeClr val="accent1"/>
-          </a:fillRef>
-          <a:effectRef idx="2">
-            <a:schemeClr val="accent1"/>
-          </a:effectRef>
-          <a:fontRef idx="minor">
-            <a:schemeClr val="lt1"/>
-          </a:fontRef>
-        </p:style>
-        <p:txBody>
-          <a:bodyPr rtlCol="0" anchor="ctr"/>
-          <a:lstStyle/>
-          <a:p>
-            <a:pPr algn="ctr"/>
-          </a:p>
-        </p:txBody>
-      </p:sp>
-      <p:sp>
-        <p:nvSpPr>
-          <p:cNvPr id="6" name="TextBox 5"/>
+          <p:cNvPr id="5" name="TextBox 4"/>
           <p:cNvSpPr txBox="1"/>
           <p:nvPr/>
         </p:nvSpPr>
         <p:spPr>
           <a:xfrm>
-            <a:off x="1188720" y="1371600"/>
-            <a:ext cx="10058400" cy="3566160"/>
+            <a:off x="822960" y="914400"/>
+            <a:ext cx="10515600" cy="822960"/>
           </a:xfrm>
           <a:prstGeom prst="rect">
             <a:avLst/>
@@ -7775,28 +8306,59 @@
           <a:noFill/>
         </p:spPr>
         <p:txBody>
-          <a:bodyPr wrap="square" anchor="ctr" lIns="0" rIns="0" tIns="0" bIns="0">
+          <a:bodyPr wrap="square" anchor="t" lIns="0" rIns="0" tIns="0" bIns="0">
             <a:spAutoFit/>
           </a:bodyPr>
           <a:lstStyle/>
           <a:p>
             <a:pPr algn="l">
               <a:spcAft>
-                <a:spcPts val="1800"/>
-              </a:spcAft>
-            </a:pPr>
-            <a:r>
-              <a:rPr sz="4000" b="0" i="1">
+                <a:spcPts val="1350"/>
+              </a:spcAft>
+            </a:pPr>
+            <a:r>
+              <a:rPr sz="3000" b="1" i="0">
                 <a:solidFill>
                   <a:srgbClr val="1C1B19"/>
                 </a:solidFill>
                 <a:latin typeface="Source Serif 4"/>
               </a:rPr>
-              <a:t>Riding into the wind, or with it at your back. What does each feel like?</a:t>
-            </a:r>
-          </a:p>
-        </p:txBody>
-      </p:sp>
+              <a:t>Riding in the pack</a:t>
+            </a:r>
+          </a:p>
+        </p:txBody>
+      </p:sp>
+      <p:pic>
+        <p:nvPicPr>
+          <p:cNvPr id="6" name="Picture 5" descr="tulsa-tough.jpg">
+            <a:hlinkClick r:id="rId3"/>
+          </p:cNvPr>
+          <p:cNvPicPr>
+            <a:picLocks noChangeAspect="1"/>
+          </p:cNvPicPr>
+          <p:nvPr/>
+        </p:nvPicPr>
+        <p:blipFill>
+          <a:blip r:embed="rId2"/>
+          <a:stretch>
+            <a:fillRect/>
+          </a:stretch>
+        </p:blipFill>
+        <p:spPr>
+          <a:xfrm>
+            <a:off x="822960" y="1828800"/>
+            <a:ext cx="6990080" cy="3931920"/>
+          </a:xfrm>
+          <a:prstGeom prst="rect">
+            <a:avLst/>
+          </a:prstGeom>
+          <a:ln>
+            <a:solidFill>
+              <a:srgbClr val="D8D2C6"/>
+            </a:solidFill>
+          </a:ln>
+        </p:spPr>
+      </p:pic>
       <p:sp>
         <p:nvSpPr>
           <p:cNvPr id="7" name="TextBox 6"/>
@@ -7805,8 +8367,8 @@
         </p:nvSpPr>
         <p:spPr>
           <a:xfrm>
-            <a:off x="1188720" y="5120640"/>
-            <a:ext cx="10058400" cy="914400"/>
+            <a:off x="8178800" y="1828800"/>
+            <a:ext cx="3281375" cy="457200"/>
           </a:xfrm>
           <a:prstGeom prst="rect">
             <a:avLst/>
@@ -7825,13 +8387,121 @@
               </a:spcAft>
             </a:pPr>
             <a:r>
-              <a:rPr sz="1800" b="0" i="0">
-                <a:solidFill>
-                  <a:srgbClr val="5D5A54"/>
+              <a:rPr sz="1800" b="1" i="0">
+                <a:solidFill>
+                  <a:srgbClr val="0B2D5B"/>
                 </a:solidFill>
                 <a:latin typeface="Inter Tight"/>
               </a:rPr>
-              <a:t>A bike, a run, a swim against the current, walking home in a storm.</a:t>
+              <a:t/>
+            </a:r>
+            <a:r>
+              <a:rPr sz="2000" b="1">
+                <a:solidFill>
+                  <a:srgbClr val="0B2D5B"/>
+                </a:solidFill>
+                <a:latin typeface="Inter Tight"/>
+                <a:hlinkClick r:id="rId3"/>
+              </a:rPr>
+              <a:t>▶  Play the whole clip</a:t>
+            </a:r>
+          </a:p>
+          <a:p>
+            <a:r>
+              <a:rPr sz="1200">
+                <a:solidFill>
+                  <a:srgbClr val="1C1B19"/>
+                </a:solidFill>
+                <a:latin typeface="Inter Tight"/>
+              </a:rPr>
+              <a:t>Opens the web lesson and plays all four parts, each starting and stopping on time. Backup, one part at a time on YouTube:</a:t>
+            </a:r>
+          </a:p>
+          <a:p>
+            <a:r>
+              <a:rPr sz="1600" b="1">
+                <a:solidFill>
+                  <a:srgbClr val="0B2D5B"/>
+                </a:solidFill>
+                <a:latin typeface="Inter Tight"/>
+                <a:hlinkClick r:id="rId4"/>
+              </a:rPr>
+              <a:t>Part 1:  2:35 to 4:54</a:t>
+            </a:r>
+          </a:p>
+          <a:p>
+            <a:r>
+              <a:rPr sz="1600" b="1">
+                <a:solidFill>
+                  <a:srgbClr val="0B2D5B"/>
+                </a:solidFill>
+                <a:latin typeface="Inter Tight"/>
+                <a:hlinkClick r:id="rId5"/>
+              </a:rPr>
+              <a:t>Part 2:  7:00 to 7:41</a:t>
+            </a:r>
+          </a:p>
+          <a:p>
+            <a:r>
+              <a:rPr sz="1600" b="1">
+                <a:solidFill>
+                  <a:srgbClr val="0B2D5B"/>
+                </a:solidFill>
+                <a:latin typeface="Inter Tight"/>
+                <a:hlinkClick r:id="rId6"/>
+              </a:rPr>
+              <a:t>Part 3:  12:47 to 14:04</a:t>
+            </a:r>
+          </a:p>
+          <a:p>
+            <a:r>
+              <a:rPr sz="1600" b="1">
+                <a:solidFill>
+                  <a:srgbClr val="0B2D5B"/>
+                </a:solidFill>
+                <a:latin typeface="Inter Tight"/>
+                <a:hlinkClick r:id="rId7"/>
+              </a:rPr>
+              <a:t>Part 4:  21:29 to 21:47</a:t>
+            </a:r>
+          </a:p>
+        </p:txBody>
+      </p:sp>
+      <p:sp>
+        <p:nvSpPr>
+          <p:cNvPr id="8" name="TextBox 7"/>
+          <p:cNvSpPr txBox="1"/>
+          <p:nvPr/>
+        </p:nvSpPr>
+        <p:spPr>
+          <a:xfrm>
+            <a:off x="8178800" y="4846320"/>
+            <a:ext cx="3281375" cy="914400"/>
+          </a:xfrm>
+          <a:prstGeom prst="rect">
+            <a:avLst/>
+          </a:prstGeom>
+          <a:noFill/>
+        </p:spPr>
+        <p:txBody>
+          <a:bodyPr wrap="square" anchor="t" lIns="0" rIns="0" tIns="0" bIns="0">
+            <a:spAutoFit/>
+          </a:bodyPr>
+          <a:lstStyle/>
+          <a:p>
+            <a:pPr algn="l">
+              <a:spcAft>
+                <a:spcPts val="540"/>
+              </a:spcAft>
+            </a:pPr>
+            <a:r>
+              <a:rPr sz="1200" b="0" i="0">
+                <a:solidFill>
+                  <a:srgbClr val="1C1B19"/>
+                </a:solidFill>
+                <a:latin typeface="Inter Tight"/>
+              </a:rPr>
+              <a:t>From Rapha Gone Racing: Tulsa Tough (Rapha Films, 2021), four parts played back to back.</a:t>
             </a:r>
           </a:p>
         </p:txBody>
@@ -7940,7 +8610,7 @@
                 </a:solidFill>
                 <a:latin typeface="Inter Tight"/>
               </a:rPr>
-              <a:t>WHY IT'S HARD TO SEE</a:t>
+              <a:t>DRAFTING IN THE PACK</a:t>
             </a:r>
           </a:p>
         </p:txBody>
@@ -7992,8 +8662,47 @@
         </p:nvSpPr>
         <p:spPr>
           <a:xfrm>
-            <a:off x="822960" y="914400"/>
-            <a:ext cx="10515600" cy="365760"/>
+            <a:off x="822960" y="1463040"/>
+            <a:ext cx="10515600" cy="3291840"/>
+          </a:xfrm>
+          <a:prstGeom prst="rect">
+            <a:avLst/>
+          </a:prstGeom>
+          <a:noFill/>
+        </p:spPr>
+        <p:txBody>
+          <a:bodyPr wrap="square" anchor="ctr" lIns="0" rIns="0" tIns="0" bIns="0">
+            <a:spAutoFit/>
+          </a:bodyPr>
+          <a:lstStyle/>
+          <a:p>
+            <a:pPr algn="l">
+              <a:spcAft>
+                <a:spcPts val="2070"/>
+              </a:spcAft>
+            </a:pPr>
+            <a:r>
+              <a:rPr sz="4600" b="1" i="0">
+                <a:solidFill>
+                  <a:srgbClr val="1C1B19"/>
+                </a:solidFill>
+                <a:latin typeface="Source Serif 4"/>
+              </a:rPr>
+              <a:t>Ride close behind someone and you use about a third less effort. Deep in the pack, you barely feel the wind.</a:t>
+            </a:r>
+          </a:p>
+        </p:txBody>
+      </p:sp>
+      <p:sp>
+        <p:nvSpPr>
+          <p:cNvPr id="6" name="TextBox 5"/>
+          <p:cNvSpPr txBox="1"/>
+          <p:nvPr/>
+        </p:nvSpPr>
+        <p:spPr>
+          <a:xfrm>
+            <a:off x="822960" y="4846320"/>
+            <a:ext cx="10515600" cy="1097280"/>
           </a:xfrm>
           <a:prstGeom prst="rect">
             <a:avLst/>
@@ -8008,226 +8717,17 @@
           <a:p>
             <a:pPr algn="l">
               <a:spcAft>
-                <a:spcPts val="630"/>
-              </a:spcAft>
-            </a:pPr>
-            <a:r>
-              <a:rPr sz="1400" b="1" i="0">
-                <a:solidFill>
-                  <a:srgbClr val="0B2D5B"/>
-                </a:solidFill>
-                <a:latin typeface="Inter Tight"/>
-              </a:rPr>
-              <a:t>Davidai &amp; Gilovich, 2016</a:t>
-            </a:r>
-          </a:p>
-        </p:txBody>
-      </p:sp>
-      <p:sp>
-        <p:nvSpPr>
-          <p:cNvPr id="6" name="TextBox 5"/>
-          <p:cNvSpPr txBox="1"/>
-          <p:nvPr/>
-        </p:nvSpPr>
-        <p:spPr>
-          <a:xfrm>
-            <a:off x="822960" y="1325880"/>
-            <a:ext cx="10515600" cy="1097280"/>
-          </a:xfrm>
-          <a:prstGeom prst="rect">
-            <a:avLst/>
-          </a:prstGeom>
-          <a:noFill/>
-        </p:spPr>
-        <p:txBody>
-          <a:bodyPr wrap="square" anchor="t" lIns="0" rIns="0" tIns="0" bIns="0">
-            <a:spAutoFit/>
-          </a:bodyPr>
-          <a:lstStyle/>
-          <a:p>
-            <a:pPr algn="l">
-              <a:spcAft>
-                <a:spcPts val="1440"/>
-              </a:spcAft>
-            </a:pPr>
-            <a:r>
-              <a:rPr sz="3200" b="1" i="0">
-                <a:solidFill>
-                  <a:srgbClr val="1C1B19"/>
-                </a:solidFill>
-                <a:latin typeface="Source Serif 4"/>
-              </a:rPr>
-              <a:t>We notice headwinds more.</a:t>
-            </a:r>
-          </a:p>
-        </p:txBody>
-      </p:sp>
-      <p:sp>
-        <p:nvSpPr>
-          <p:cNvPr id="7" name="TextBox 6"/>
-          <p:cNvSpPr txBox="1"/>
-          <p:nvPr/>
-        </p:nvSpPr>
-        <p:spPr>
-          <a:xfrm>
-            <a:off x="822960" y="2514600"/>
-            <a:ext cx="10515600" cy="2194560"/>
-          </a:xfrm>
-          <a:prstGeom prst="rect">
-            <a:avLst/>
-          </a:prstGeom>
-          <a:noFill/>
-        </p:spPr>
-        <p:txBody>
-          <a:bodyPr wrap="square" anchor="t" lIns="0" rIns="0" tIns="0" bIns="0">
-            <a:spAutoFit/>
-          </a:bodyPr>
-          <a:lstStyle/>
-          <a:p>
-            <a:pPr algn="l">
-              <a:spcAft>
-                <a:spcPts val="855"/>
-              </a:spcAft>
-            </a:pPr>
-            <a:r>
-              <a:rPr sz="1900" b="0" i="0">
-                <a:solidFill>
-                  <a:srgbClr val="1C1B19"/>
-                </a:solidFill>
-                <a:latin typeface="Source Serif 4"/>
-              </a:rPr>
-              <a:t>•  People remember obstacles much more than boosts.</a:t>
-            </a:r>
-          </a:p>
-          <a:p>
-            <a:pPr algn="l">
-              <a:spcAft>
-                <a:spcPts val="855"/>
-              </a:spcAft>
-            </a:pPr>
-            <a:r>
-              <a:rPr sz="1900" b="0" i="0">
-                <a:solidFill>
-                  <a:srgbClr val="1C1B19"/>
-                </a:solidFill>
-                <a:latin typeface="Source Serif 4"/>
-              </a:rPr>
-              <a:t>•  Fans of almost every team think their schedule was hardest.</a:t>
-            </a:r>
-          </a:p>
-          <a:p>
-            <a:pPr algn="l">
-              <a:spcAft>
-                <a:spcPts val="855"/>
-              </a:spcAft>
-            </a:pPr>
-            <a:r>
-              <a:rPr sz="1900" b="0" i="0">
-                <a:solidFill>
-                  <a:srgbClr val="1C1B19"/>
-                </a:solidFill>
-                <a:latin typeface="Source Serif 4"/>
-              </a:rPr>
-              <a:t>•  It's how memory works, not a character flaw.</a:t>
-            </a:r>
-          </a:p>
-        </p:txBody>
-      </p:sp>
-      <p:sp>
-        <p:nvSpPr>
-          <p:cNvPr id="8" name="Rectangle 7"/>
-          <p:cNvSpPr/>
-          <p:nvPr/>
-        </p:nvSpPr>
-        <p:spPr>
-          <a:xfrm>
-            <a:off x="822960" y="4892040"/>
-            <a:ext cx="73152" cy="1097280"/>
-          </a:xfrm>
-          <a:prstGeom prst="rect">
-            <a:avLst/>
-          </a:prstGeom>
-          <a:solidFill>
-            <a:srgbClr val="F47B20"/>
-          </a:solidFill>
-          <a:ln>
-            <a:noFill/>
-          </a:ln>
-          <a:effectLst/>
-        </p:spPr>
-        <p:style>
-          <a:lnRef idx="1">
-            <a:schemeClr val="accent1"/>
-          </a:lnRef>
-          <a:fillRef idx="3">
-            <a:schemeClr val="accent1"/>
-          </a:fillRef>
-          <a:effectRef idx="2">
-            <a:schemeClr val="accent1"/>
-          </a:effectRef>
-          <a:fontRef idx="minor">
-            <a:schemeClr val="lt1"/>
-          </a:fontRef>
-        </p:style>
-        <p:txBody>
-          <a:bodyPr rtlCol="0" anchor="ctr"/>
-          <a:lstStyle/>
-          <a:p>
-            <a:pPr algn="ctr"/>
-          </a:p>
-        </p:txBody>
-      </p:sp>
-      <p:sp>
-        <p:nvSpPr>
-          <p:cNvPr id="9" name="TextBox 8"/>
-          <p:cNvSpPr txBox="1"/>
-          <p:nvPr/>
-        </p:nvSpPr>
-        <p:spPr>
-          <a:xfrm>
-            <a:off x="1097280" y="4892040"/>
-            <a:ext cx="10241280" cy="1188720"/>
-          </a:xfrm>
-          <a:prstGeom prst="rect">
-            <a:avLst/>
-          </a:prstGeom>
-          <a:noFill/>
-        </p:spPr>
-        <p:txBody>
-          <a:bodyPr wrap="square" anchor="t" lIns="0" rIns="0" tIns="0" bIns="0">
-            <a:spAutoFit/>
-          </a:bodyPr>
-          <a:lstStyle/>
-          <a:p>
-            <a:pPr algn="l">
-              <a:spcAft>
-                <a:spcPts val="855"/>
-              </a:spcAft>
-            </a:pPr>
-            <a:r>
-              <a:rPr sz="1200" b="1" i="0">
-                <a:solidFill>
-                  <a:srgbClr val="F47B20"/>
-                </a:solidFill>
-                <a:latin typeface="Inter Tight"/>
-              </a:rPr>
-              <a:t>IN CLASS</a:t>
-            </a:r>
-          </a:p>
-          <a:p>
-            <a:pPr algn="l">
-              <a:spcAft>
-                <a:spcPts val="855"/>
-              </a:spcAft>
-            </a:pPr>
-            <a:r>
-              <a:rPr sz="1900" b="0" i="0">
-                <a:solidFill>
-                  <a:srgbClr val="1C1B19"/>
-                </a:solidFill>
-                <a:latin typeface="Source Serif 4"/>
-              </a:rPr>
-              <a:t>Seeing your tailwinds takes practice. That's the whole skill today.</a:t>
+                <a:spcPts val="990"/>
+              </a:spcAft>
+            </a:pPr>
+            <a:r>
+              <a:rPr sz="2200" b="0" i="1">
+                <a:solidFill>
+                  <a:srgbClr val="5D5A54"/>
+                </a:solidFill>
+                <a:latin typeface="Source Serif 4"/>
+              </a:rPr>
+              <a:t>In the U.S., being white often works like riding in the pack. It doesn't make life easy. It means your skin isn't one of the things making it harder.</a:t>
             </a:r>
           </a:p>
         </p:txBody>
@@ -8336,7 +8836,7 @@
                 </a:solidFill>
                 <a:latin typeface="Inter Tight"/>
               </a:rPr>
-              <a:t>EVERYDAY TAILWINDS</a:t>
+              <a:t>TWO WORDS</a:t>
             </a:r>
           </a:p>
         </p:txBody>
@@ -8389,7 +8889,7 @@
         <p:spPr>
           <a:xfrm>
             <a:off x="822960" y="1005840"/>
-            <a:ext cx="10515600" cy="1097280"/>
+            <a:ext cx="10515600" cy="914400"/>
           </a:xfrm>
           <a:prstGeom prst="rect">
             <a:avLst/>
@@ -8404,31 +8904,77 @@
           <a:p>
             <a:pPr algn="l">
               <a:spcAft>
-                <a:spcPts val="1620"/>
-              </a:spcAft>
-            </a:pPr>
-            <a:r>
-              <a:rPr sz="3600" b="1" i="0">
+                <a:spcPts val="1530"/>
+              </a:spcAft>
+            </a:pPr>
+            <a:r>
+              <a:rPr sz="3400" b="1" i="0">
                 <a:solidFill>
                   <a:srgbClr val="1C1B19"/>
                 </a:solidFill>
                 <a:latin typeface="Source Serif 4"/>
               </a:rPr>
-              <a:t>Which of these helped you along without your asking?</a:t>
-            </a:r>
-          </a:p>
-        </p:txBody>
-      </p:sp>
-      <p:sp>
-        <p:nvSpPr>
-          <p:cNvPr id="6" name="TextBox 5"/>
+              <a:t>Blame and responsibility aren't the same.</a:t>
+            </a:r>
+          </a:p>
+        </p:txBody>
+      </p:sp>
+      <p:sp>
+        <p:nvSpPr>
+          <p:cNvPr id="6" name="Rectangle 5"/>
+          <p:cNvSpPr/>
+          <p:nvPr/>
+        </p:nvSpPr>
+        <p:spPr>
+          <a:xfrm>
+            <a:off x="822960" y="2103120"/>
+            <a:ext cx="5120640" cy="3931920"/>
+          </a:xfrm>
+          <a:prstGeom prst="rect">
+            <a:avLst/>
+          </a:prstGeom>
+          <a:solidFill>
+            <a:srgbClr val="FFFFFF"/>
+          </a:solidFill>
+          <a:ln w="15875">
+            <a:solidFill>
+              <a:srgbClr val="D8D2C6"/>
+            </a:solidFill>
+          </a:ln>
+          <a:effectLst/>
+        </p:spPr>
+        <p:style>
+          <a:lnRef idx="1">
+            <a:schemeClr val="accent1"/>
+          </a:lnRef>
+          <a:fillRef idx="3">
+            <a:schemeClr val="accent1"/>
+          </a:fillRef>
+          <a:effectRef idx="2">
+            <a:schemeClr val="accent1"/>
+          </a:effectRef>
+          <a:fontRef idx="minor">
+            <a:schemeClr val="lt1"/>
+          </a:fontRef>
+        </p:style>
+        <p:txBody>
+          <a:bodyPr rtlCol="0" anchor="ctr"/>
+          <a:lstStyle/>
+          <a:p>
+            <a:pPr algn="ctr"/>
+          </a:p>
+        </p:txBody>
+      </p:sp>
+      <p:sp>
+        <p:nvSpPr>
+          <p:cNvPr id="7" name="TextBox 6"/>
           <p:cNvSpPr txBox="1"/>
           <p:nvPr/>
         </p:nvSpPr>
         <p:spPr>
           <a:xfrm>
-            <a:off x="822960" y="2057400"/>
-            <a:ext cx="548640" cy="670560"/>
+            <a:off x="1097280" y="2286000"/>
+            <a:ext cx="4572000" cy="457200"/>
           </a:xfrm>
           <a:prstGeom prst="rect">
             <a:avLst/>
@@ -8443,31 +8989,31 @@
           <a:p>
             <a:pPr algn="l">
               <a:spcAft>
-                <a:spcPts val="1170"/>
-              </a:spcAft>
-            </a:pPr>
-            <a:r>
-              <a:rPr sz="2600" b="1" i="0">
-                <a:solidFill>
-                  <a:srgbClr val="F47B20"/>
-                </a:solidFill>
-                <a:latin typeface="Source Serif 4"/>
-              </a:rPr>
-              <a:t>•</a:t>
-            </a:r>
-          </a:p>
-        </p:txBody>
-      </p:sp>
-      <p:sp>
-        <p:nvSpPr>
-          <p:cNvPr id="7" name="TextBox 6"/>
+                <a:spcPts val="585"/>
+              </a:spcAft>
+            </a:pPr>
+            <a:r>
+              <a:rPr sz="1300" b="1" i="0">
+                <a:solidFill>
+                  <a:srgbClr val="0B2D5B"/>
+                </a:solidFill>
+                <a:latin typeface="Inter Tight"/>
+              </a:rPr>
+              <a:t>BLAME</a:t>
+            </a:r>
+          </a:p>
+        </p:txBody>
+      </p:sp>
+      <p:sp>
+        <p:nvSpPr>
+          <p:cNvPr id="8" name="TextBox 7"/>
           <p:cNvSpPr txBox="1"/>
           <p:nvPr/>
         </p:nvSpPr>
         <p:spPr>
           <a:xfrm>
-            <a:off x="1463040" y="2093976"/>
-            <a:ext cx="9875520" cy="670560"/>
+            <a:off x="1097280" y="2788920"/>
+            <a:ext cx="4572000" cy="3108960"/>
           </a:xfrm>
           <a:prstGeom prst="rect">
             <a:avLst/>
@@ -8482,31 +9028,125 @@
           <a:p>
             <a:pPr algn="l">
               <a:spcAft>
-                <a:spcPts val="945"/>
-              </a:spcAft>
-            </a:pPr>
-            <a:r>
-              <a:rPr sz="2100" b="1" i="0">
+                <a:spcPts val="855"/>
+              </a:spcAft>
+            </a:pPr>
+            <a:r>
+              <a:rPr sz="1900" b="0" i="0">
                 <a:solidFill>
                   <a:srgbClr val="1C1B19"/>
                 </a:solidFill>
                 <a:latin typeface="Source Serif 4"/>
               </a:rPr>
-              <a:t>Speaking English at home</a:t>
-            </a:r>
-          </a:p>
-        </p:txBody>
-      </p:sp>
-      <p:sp>
-        <p:nvSpPr>
-          <p:cNvPr id="8" name="TextBox 7"/>
+              <a:t>About the past</a:t>
+            </a:r>
+          </a:p>
+          <a:p>
+            <a:pPr algn="l">
+              <a:spcAft>
+                <a:spcPts val="855"/>
+              </a:spcAft>
+            </a:pPr>
+            <a:r>
+              <a:rPr sz="1900" b="0" i="0">
+                <a:solidFill>
+                  <a:srgbClr val="1C1B19"/>
+                </a:solidFill>
+                <a:latin typeface="Source Serif 4"/>
+              </a:rPr>
+              <a:t>Something you did wrong</a:t>
+            </a:r>
+          </a:p>
+          <a:p>
+            <a:pPr algn="l">
+              <a:spcAft>
+                <a:spcPts val="855"/>
+              </a:spcAft>
+            </a:pPr>
+            <a:r>
+              <a:rPr sz="1900" b="0" i="0">
+                <a:solidFill>
+                  <a:srgbClr val="1C1B19"/>
+                </a:solidFill>
+                <a:latin typeface="Source Serif 4"/>
+              </a:rPr>
+              <a:t>Leads to guilt or defending yourself</a:t>
+            </a:r>
+          </a:p>
+          <a:p>
+            <a:pPr algn="l">
+              <a:spcAft>
+                <a:spcPts val="855"/>
+              </a:spcAft>
+            </a:pPr>
+            <a:r>
+              <a:rPr sz="1900" b="0" i="0">
+                <a:solidFill>
+                  <a:srgbClr val="1C1B19"/>
+                </a:solidFill>
+                <a:latin typeface="Source Serif 4"/>
+              </a:rPr>
+              <a:t>Nobody here is asking for it</a:t>
+            </a:r>
+          </a:p>
+        </p:txBody>
+      </p:sp>
+      <p:sp>
+        <p:nvSpPr>
+          <p:cNvPr id="9" name="Rectangle 8"/>
+          <p:cNvSpPr/>
+          <p:nvPr/>
+        </p:nvSpPr>
+        <p:spPr>
+          <a:xfrm>
+            <a:off x="6309360" y="2103120"/>
+            <a:ext cx="5120640" cy="3931920"/>
+          </a:xfrm>
+          <a:prstGeom prst="rect">
+            <a:avLst/>
+          </a:prstGeom>
+          <a:solidFill>
+            <a:srgbClr val="FFFFFF"/>
+          </a:solidFill>
+          <a:ln w="15875">
+            <a:solidFill>
+              <a:srgbClr val="D8D2C6"/>
+            </a:solidFill>
+          </a:ln>
+          <a:effectLst/>
+        </p:spPr>
+        <p:style>
+          <a:lnRef idx="1">
+            <a:schemeClr val="accent1"/>
+          </a:lnRef>
+          <a:fillRef idx="3">
+            <a:schemeClr val="accent1"/>
+          </a:fillRef>
+          <a:effectRef idx="2">
+            <a:schemeClr val="accent1"/>
+          </a:effectRef>
+          <a:fontRef idx="minor">
+            <a:schemeClr val="lt1"/>
+          </a:fontRef>
+        </p:style>
+        <p:txBody>
+          <a:bodyPr rtlCol="0" anchor="ctr"/>
+          <a:lstStyle/>
+          <a:p>
+            <a:pPr algn="ctr"/>
+          </a:p>
+        </p:txBody>
+      </p:sp>
+      <p:sp>
+        <p:nvSpPr>
+          <p:cNvPr id="10" name="TextBox 9"/>
           <p:cNvSpPr txBox="1"/>
           <p:nvPr/>
         </p:nvSpPr>
         <p:spPr>
           <a:xfrm>
-            <a:off x="822960" y="2727960"/>
-            <a:ext cx="548640" cy="670560"/>
+            <a:off x="6583680" y="2286000"/>
+            <a:ext cx="4572000" cy="457200"/>
           </a:xfrm>
           <a:prstGeom prst="rect">
             <a:avLst/>
@@ -8521,31 +9161,31 @@
           <a:p>
             <a:pPr algn="l">
               <a:spcAft>
-                <a:spcPts val="1170"/>
-              </a:spcAft>
-            </a:pPr>
-            <a:r>
-              <a:rPr sz="2600" b="1" i="0">
-                <a:solidFill>
-                  <a:srgbClr val="F47B20"/>
-                </a:solidFill>
-                <a:latin typeface="Source Serif 4"/>
-              </a:rPr>
-              <a:t>•</a:t>
-            </a:r>
-          </a:p>
-        </p:txBody>
-      </p:sp>
-      <p:sp>
-        <p:nvSpPr>
-          <p:cNvPr id="9" name="TextBox 8"/>
+                <a:spcPts val="585"/>
+              </a:spcAft>
+            </a:pPr>
+            <a:r>
+              <a:rPr sz="1300" b="1" i="0">
+                <a:solidFill>
+                  <a:srgbClr val="0B2D5B"/>
+                </a:solidFill>
+                <a:latin typeface="Inter Tight"/>
+              </a:rPr>
+              <a:t>RESPONSIBILITY</a:t>
+            </a:r>
+          </a:p>
+        </p:txBody>
+      </p:sp>
+      <p:sp>
+        <p:nvSpPr>
+          <p:cNvPr id="11" name="TextBox 10"/>
           <p:cNvSpPr txBox="1"/>
           <p:nvPr/>
         </p:nvSpPr>
         <p:spPr>
           <a:xfrm>
-            <a:off x="1463040" y="2764536"/>
-            <a:ext cx="9875520" cy="670560"/>
+            <a:off x="6583680" y="2788920"/>
+            <a:ext cx="4572000" cy="3108960"/>
           </a:xfrm>
           <a:prstGeom prst="rect">
             <a:avLst/>
@@ -8560,329 +9200,65 @@
           <a:p>
             <a:pPr algn="l">
               <a:spcAft>
-                <a:spcPts val="945"/>
-              </a:spcAft>
-            </a:pPr>
-            <a:r>
-              <a:rPr sz="2100" b="1" i="0">
+                <a:spcPts val="855"/>
+              </a:spcAft>
+            </a:pPr>
+            <a:r>
+              <a:rPr sz="1900" b="0" i="0">
                 <a:solidFill>
                   <a:srgbClr val="1C1B19"/>
                 </a:solidFill>
                 <a:latin typeface="Source Serif 4"/>
               </a:rPr>
-              <a:t>A parent who knows how school works</a:t>
-            </a:r>
-          </a:p>
-        </p:txBody>
-      </p:sp>
-      <p:sp>
-        <p:nvSpPr>
-          <p:cNvPr id="10" name="TextBox 9"/>
-          <p:cNvSpPr txBox="1"/>
-          <p:nvPr/>
-        </p:nvSpPr>
-        <p:spPr>
-          <a:xfrm>
-            <a:off x="822960" y="3398520"/>
-            <a:ext cx="548640" cy="670560"/>
-          </a:xfrm>
-          <a:prstGeom prst="rect">
-            <a:avLst/>
-          </a:prstGeom>
-          <a:noFill/>
-        </p:spPr>
-        <p:txBody>
-          <a:bodyPr wrap="square" anchor="t" lIns="0" rIns="0" tIns="0" bIns="0">
-            <a:spAutoFit/>
-          </a:bodyPr>
-          <a:lstStyle/>
-          <a:p>
-            <a:pPr algn="l">
-              <a:spcAft>
-                <a:spcPts val="1170"/>
-              </a:spcAft>
-            </a:pPr>
-            <a:r>
-              <a:rPr sz="2600" b="1" i="0">
-                <a:solidFill>
-                  <a:srgbClr val="F47B20"/>
-                </a:solidFill>
-                <a:latin typeface="Source Serif 4"/>
-              </a:rPr>
-              <a:t>•</a:t>
-            </a:r>
-          </a:p>
-        </p:txBody>
-      </p:sp>
-      <p:sp>
-        <p:nvSpPr>
-          <p:cNvPr id="11" name="TextBox 10"/>
-          <p:cNvSpPr txBox="1"/>
-          <p:nvPr/>
-        </p:nvSpPr>
-        <p:spPr>
-          <a:xfrm>
-            <a:off x="1463040" y="3435096"/>
-            <a:ext cx="9875520" cy="670560"/>
-          </a:xfrm>
-          <a:prstGeom prst="rect">
-            <a:avLst/>
-          </a:prstGeom>
-          <a:noFill/>
-        </p:spPr>
-        <p:txBody>
-          <a:bodyPr wrap="square" anchor="t" lIns="0" rIns="0" tIns="0" bIns="0">
-            <a:spAutoFit/>
-          </a:bodyPr>
-          <a:lstStyle/>
-          <a:p>
-            <a:pPr algn="l">
-              <a:spcAft>
-                <a:spcPts val="945"/>
-              </a:spcAft>
-            </a:pPr>
-            <a:r>
-              <a:rPr sz="2100" b="1" i="0">
+              <a:t>About what's next</a:t>
+            </a:r>
+          </a:p>
+          <a:p>
+            <a:pPr algn="l">
+              <a:spcAft>
+                <a:spcPts val="855"/>
+              </a:spcAft>
+            </a:pPr>
+            <a:r>
+              <a:rPr sz="1900" b="0" i="0">
                 <a:solidFill>
                   <a:srgbClr val="1C1B19"/>
                 </a:solidFill>
                 <a:latin typeface="Source Serif 4"/>
               </a:rPr>
-              <a:t>Money for a tutor, a camp, a trip</a:t>
-            </a:r>
-          </a:p>
-        </p:txBody>
-      </p:sp>
-      <p:sp>
-        <p:nvSpPr>
-          <p:cNvPr id="12" name="TextBox 11"/>
-          <p:cNvSpPr txBox="1"/>
-          <p:nvPr/>
-        </p:nvSpPr>
-        <p:spPr>
-          <a:xfrm>
-            <a:off x="822960" y="4069080"/>
-            <a:ext cx="548640" cy="670560"/>
-          </a:xfrm>
-          <a:prstGeom prst="rect">
-            <a:avLst/>
-          </a:prstGeom>
-          <a:noFill/>
-        </p:spPr>
-        <p:txBody>
-          <a:bodyPr wrap="square" anchor="t" lIns="0" rIns="0" tIns="0" bIns="0">
-            <a:spAutoFit/>
-          </a:bodyPr>
-          <a:lstStyle/>
-          <a:p>
-            <a:pPr algn="l">
-              <a:spcAft>
-                <a:spcPts val="1170"/>
-              </a:spcAft>
-            </a:pPr>
-            <a:r>
-              <a:rPr sz="2600" b="1" i="0">
-                <a:solidFill>
-                  <a:srgbClr val="F47B20"/>
-                </a:solidFill>
-                <a:latin typeface="Source Serif 4"/>
-              </a:rPr>
-              <a:t>•</a:t>
-            </a:r>
-          </a:p>
-        </p:txBody>
-      </p:sp>
-      <p:sp>
-        <p:nvSpPr>
-          <p:cNvPr id="13" name="TextBox 12"/>
-          <p:cNvSpPr txBox="1"/>
-          <p:nvPr/>
-        </p:nvSpPr>
-        <p:spPr>
-          <a:xfrm>
-            <a:off x="1463040" y="4105656"/>
-            <a:ext cx="9875520" cy="670560"/>
-          </a:xfrm>
-          <a:prstGeom prst="rect">
-            <a:avLst/>
-          </a:prstGeom>
-          <a:noFill/>
-        </p:spPr>
-        <p:txBody>
-          <a:bodyPr wrap="square" anchor="t" lIns="0" rIns="0" tIns="0" bIns="0">
-            <a:spAutoFit/>
-          </a:bodyPr>
-          <a:lstStyle/>
-          <a:p>
-            <a:pPr algn="l">
-              <a:spcAft>
-                <a:spcPts val="945"/>
-              </a:spcAft>
-            </a:pPr>
-            <a:r>
-              <a:rPr sz="2100" b="1" i="0">
+              <a:t>Something you choose</a:t>
+            </a:r>
+          </a:p>
+          <a:p>
+            <a:pPr algn="l">
+              <a:spcAft>
+                <a:spcPts val="855"/>
+              </a:spcAft>
+            </a:pPr>
+            <a:r>
+              <a:rPr sz="1900" b="0" i="0">
                 <a:solidFill>
                   <a:srgbClr val="1C1B19"/>
                 </a:solidFill>
                 <a:latin typeface="Source Serif 4"/>
               </a:rPr>
-              <a:t>A body that fits how buildings are built</a:t>
-            </a:r>
-          </a:p>
-        </p:txBody>
-      </p:sp>
-      <p:sp>
-        <p:nvSpPr>
-          <p:cNvPr id="14" name="TextBox 13"/>
-          <p:cNvSpPr txBox="1"/>
-          <p:nvPr/>
-        </p:nvSpPr>
-        <p:spPr>
-          <a:xfrm>
-            <a:off x="822960" y="4739640"/>
-            <a:ext cx="548640" cy="670560"/>
-          </a:xfrm>
-          <a:prstGeom prst="rect">
-            <a:avLst/>
-          </a:prstGeom>
-          <a:noFill/>
-        </p:spPr>
-        <p:txBody>
-          <a:bodyPr wrap="square" anchor="t" lIns="0" rIns="0" tIns="0" bIns="0">
-            <a:spAutoFit/>
-          </a:bodyPr>
-          <a:lstStyle/>
-          <a:p>
-            <a:pPr algn="l">
-              <a:spcAft>
-                <a:spcPts val="1170"/>
-              </a:spcAft>
-            </a:pPr>
-            <a:r>
-              <a:rPr sz="2600" b="1" i="0">
-                <a:solidFill>
-                  <a:srgbClr val="F47B20"/>
-                </a:solidFill>
-                <a:latin typeface="Source Serif 4"/>
-              </a:rPr>
-              <a:t>•</a:t>
-            </a:r>
-          </a:p>
-        </p:txBody>
-      </p:sp>
-      <p:sp>
-        <p:nvSpPr>
-          <p:cNvPr id="15" name="TextBox 14"/>
-          <p:cNvSpPr txBox="1"/>
-          <p:nvPr/>
-        </p:nvSpPr>
-        <p:spPr>
-          <a:xfrm>
-            <a:off x="1463040" y="4776216"/>
-            <a:ext cx="9875520" cy="670560"/>
-          </a:xfrm>
-          <a:prstGeom prst="rect">
-            <a:avLst/>
-          </a:prstGeom>
-          <a:noFill/>
-        </p:spPr>
-        <p:txBody>
-          <a:bodyPr wrap="square" anchor="t" lIns="0" rIns="0" tIns="0" bIns="0">
-            <a:spAutoFit/>
-          </a:bodyPr>
-          <a:lstStyle/>
-          <a:p>
-            <a:pPr algn="l">
-              <a:spcAft>
-                <a:spcPts val="945"/>
-              </a:spcAft>
-            </a:pPr>
-            <a:r>
-              <a:rPr sz="2100" b="1" i="0">
+              <a:t>Leads to action</a:t>
+            </a:r>
+          </a:p>
+          <a:p>
+            <a:pPr algn="l">
+              <a:spcAft>
+                <a:spcPts val="855"/>
+              </a:spcAft>
+            </a:pPr>
+            <a:r>
+              <a:rPr sz="1900" b="0" i="0">
                 <a:solidFill>
                   <a:srgbClr val="1C1B19"/>
                 </a:solidFill>
                 <a:latin typeface="Source Serif 4"/>
               </a:rPr>
-              <a:t>Being straight or cisgender</a:t>
-            </a:r>
-          </a:p>
-        </p:txBody>
-      </p:sp>
-      <p:sp>
-        <p:nvSpPr>
-          <p:cNvPr id="16" name="TextBox 15"/>
-          <p:cNvSpPr txBox="1"/>
-          <p:nvPr/>
-        </p:nvSpPr>
-        <p:spPr>
-          <a:xfrm>
-            <a:off x="822960" y="5410200"/>
-            <a:ext cx="548640" cy="670560"/>
-          </a:xfrm>
-          <a:prstGeom prst="rect">
-            <a:avLst/>
-          </a:prstGeom>
-          <a:noFill/>
-        </p:spPr>
-        <p:txBody>
-          <a:bodyPr wrap="square" anchor="t" lIns="0" rIns="0" tIns="0" bIns="0">
-            <a:spAutoFit/>
-          </a:bodyPr>
-          <a:lstStyle/>
-          <a:p>
-            <a:pPr algn="l">
-              <a:spcAft>
-                <a:spcPts val="1170"/>
-              </a:spcAft>
-            </a:pPr>
-            <a:r>
-              <a:rPr sz="2600" b="1" i="0">
-                <a:solidFill>
-                  <a:srgbClr val="F47B20"/>
-                </a:solidFill>
-                <a:latin typeface="Source Serif 4"/>
-              </a:rPr>
-              <a:t>•</a:t>
-            </a:r>
-          </a:p>
-        </p:txBody>
-      </p:sp>
-      <p:sp>
-        <p:nvSpPr>
-          <p:cNvPr id="17" name="TextBox 16"/>
-          <p:cNvSpPr txBox="1"/>
-          <p:nvPr/>
-        </p:nvSpPr>
-        <p:spPr>
-          <a:xfrm>
-            <a:off x="1463040" y="5446776"/>
-            <a:ext cx="9875520" cy="670560"/>
-          </a:xfrm>
-          <a:prstGeom prst="rect">
-            <a:avLst/>
-          </a:prstGeom>
-          <a:noFill/>
-        </p:spPr>
-        <p:txBody>
-          <a:bodyPr wrap="square" anchor="t" lIns="0" rIns="0" tIns="0" bIns="0">
-            <a:spAutoFit/>
-          </a:bodyPr>
-          <a:lstStyle/>
-          <a:p>
-            <a:pPr algn="l">
-              <a:spcAft>
-                <a:spcPts val="945"/>
-              </a:spcAft>
-            </a:pPr>
-            <a:r>
-              <a:rPr sz="2100" b="1" i="0">
-                <a:solidFill>
-                  <a:srgbClr val="1C1B19"/>
-                </a:solidFill>
-                <a:latin typeface="Source Serif 4"/>
-              </a:rPr>
-              <a:t>A passport from the country you live in</a:t>
+              <a:t>Yours to decide</a:t>
             </a:r>
           </a:p>
         </p:txBody>
@@ -8991,7 +9367,7 @@
                 </a:solidFill>
                 <a:latin typeface="Inter Tight"/>
               </a:rPr>
-              <a:t>WATCH</a:t>
+              <a:t>BEFORE YOU GO</a:t>
             </a:r>
           </a:p>
         </p:txBody>
@@ -9043,8 +9419,8 @@
         </p:nvSpPr>
         <p:spPr>
           <a:xfrm>
-            <a:off x="822960" y="914400"/>
-            <a:ext cx="10515600" cy="822960"/>
+            <a:off x="822960" y="1188720"/>
+            <a:ext cx="10515600" cy="914400"/>
           </a:xfrm>
           <a:prstGeom prst="rect">
             <a:avLst/>
@@ -9059,62 +9435,31 @@
           <a:p>
             <a:pPr algn="l">
               <a:spcAft>
-                <a:spcPts val="1350"/>
-              </a:spcAft>
-            </a:pPr>
-            <a:r>
-              <a:rPr sz="3000" b="1" i="0">
+                <a:spcPts val="1620"/>
+              </a:spcAft>
+            </a:pPr>
+            <a:r>
+              <a:rPr sz="3600" b="1" i="0">
                 <a:solidFill>
                   <a:srgbClr val="1C1B19"/>
                 </a:solidFill>
                 <a:latin typeface="Source Serif 4"/>
               </a:rPr>
-              <a:t>Riding in the pack</a:t>
-            </a:r>
-          </a:p>
-        </p:txBody>
-      </p:sp>
-      <p:pic>
-        <p:nvPicPr>
-          <p:cNvPr id="6" name="Picture 5" descr="tulsa-tough.jpg">
-            <a:hlinkClick r:id="rId3"/>
-          </p:cNvPr>
-          <p:cNvPicPr>
-            <a:picLocks noChangeAspect="1"/>
-          </p:cNvPicPr>
-          <p:nvPr/>
-        </p:nvPicPr>
-        <p:blipFill>
-          <a:blip r:embed="rId2"/>
-          <a:stretch>
-            <a:fillRect/>
-          </a:stretch>
-        </p:blipFill>
-        <p:spPr>
-          <a:xfrm>
-            <a:off x="822960" y="1828800"/>
-            <a:ext cx="6990080" cy="3931920"/>
-          </a:xfrm>
-          <a:prstGeom prst="rect">
-            <a:avLst/>
-          </a:prstGeom>
-          <a:ln>
-            <a:solidFill>
-              <a:srgbClr val="D8D2C6"/>
-            </a:solidFill>
-          </a:ln>
-        </p:spPr>
-      </p:pic>
-      <p:sp>
-        <p:nvSpPr>
-          <p:cNvPr id="7" name="TextBox 6"/>
+              <a:t>Take a turn at the front.</a:t>
+            </a:r>
+          </a:p>
+        </p:txBody>
+      </p:sp>
+      <p:sp>
+        <p:nvSpPr>
+          <p:cNvPr id="6" name="TextBox 5"/>
           <p:cNvSpPr txBox="1"/>
           <p:nvPr/>
         </p:nvSpPr>
         <p:spPr>
           <a:xfrm>
-            <a:off x="8178800" y="1828800"/>
-            <a:ext cx="3281375" cy="457200"/>
+            <a:off x="822960" y="2286000"/>
+            <a:ext cx="10515600" cy="1463040"/>
           </a:xfrm>
           <a:prstGeom prst="rect">
             <a:avLst/>
@@ -9129,87 +9474,64 @@
           <a:p>
             <a:pPr algn="l">
               <a:spcAft>
-                <a:spcPts val="810"/>
-              </a:spcAft>
-            </a:pPr>
-            <a:r>
-              <a:rPr sz="1800" b="1" i="0">
-                <a:solidFill>
-                  <a:srgbClr val="0B2D5B"/>
-                </a:solidFill>
-                <a:latin typeface="Inter Tight"/>
-              </a:rPr>
-              <a:t/>
-            </a:r>
-            <a:r>
-              <a:rPr sz="2000" b="1">
-                <a:solidFill>
-                  <a:srgbClr val="0B2D5B"/>
-                </a:solidFill>
-                <a:latin typeface="Inter Tight"/>
-                <a:hlinkClick r:id="rId3"/>
-              </a:rPr>
-              <a:t>▶  Play the whole clip</a:t>
-            </a:r>
-          </a:p>
-          <a:p>
-            <a:r>
-              <a:rPr sz="1200">
+                <a:spcPts val="1080"/>
+              </a:spcAft>
+            </a:pPr>
+            <a:r>
+              <a:rPr sz="2400" b="0" i="0">
                 <a:solidFill>
                   <a:srgbClr val="1C1B19"/>
                 </a:solidFill>
-                <a:latin typeface="Inter Tight"/>
-              </a:rPr>
-              <a:t>Opens the web lesson and plays all four parts, each starting and stopping on time. Backup, one part at a time on YouTube:</a:t>
-            </a:r>
-          </a:p>
-          <a:p>
-            <a:r>
-              <a:rPr sz="1600" b="1">
-                <a:solidFill>
-                  <a:srgbClr val="0B2D5B"/>
-                </a:solidFill>
-                <a:latin typeface="Inter Tight"/>
-                <a:hlinkClick r:id="rId4"/>
-              </a:rPr>
-              <a:t>Part 1:  2:35 to 4:54</a:t>
-            </a:r>
-          </a:p>
-          <a:p>
-            <a:r>
-              <a:rPr sz="1600" b="1">
-                <a:solidFill>
-                  <a:srgbClr val="0B2D5B"/>
-                </a:solidFill>
-                <a:latin typeface="Inter Tight"/>
-                <a:hlinkClick r:id="rId5"/>
-              </a:rPr>
-              <a:t>Part 2:  7:00 to 7:41</a:t>
-            </a:r>
-          </a:p>
-          <a:p>
-            <a:r>
-              <a:rPr sz="1600" b="1">
-                <a:solidFill>
-                  <a:srgbClr val="0B2D5B"/>
-                </a:solidFill>
-                <a:latin typeface="Inter Tight"/>
-                <a:hlinkClick r:id="rId6"/>
-              </a:rPr>
-              <a:t>Part 3:  12:47 to 14:04</a:t>
-            </a:r>
-          </a:p>
-          <a:p>
-            <a:r>
-              <a:rPr sz="1600" b="1">
-                <a:solidFill>
-                  <a:srgbClr val="0B2D5B"/>
-                </a:solidFill>
-                <a:latin typeface="Inter Tight"/>
-                <a:hlinkClick r:id="rId7"/>
-              </a:rPr>
-              <a:t>Part 4:  21:29 to 21:47</a:t>
-            </a:r>
+                <a:latin typeface="Source Serif 4"/>
+              </a:rPr>
+              <a:t>Good riders take turns breaking the wind for the people behind them. Write one way you could this week. Keep the card.</a:t>
+            </a:r>
+          </a:p>
+        </p:txBody>
+      </p:sp>
+      <p:sp>
+        <p:nvSpPr>
+          <p:cNvPr id="7" name="Rectangle 6"/>
+          <p:cNvSpPr/>
+          <p:nvPr/>
+        </p:nvSpPr>
+        <p:spPr>
+          <a:xfrm>
+            <a:off x="822960" y="4023360"/>
+            <a:ext cx="10515600" cy="1371600"/>
+          </a:xfrm>
+          <a:prstGeom prst="rect">
+            <a:avLst/>
+          </a:prstGeom>
+          <a:solidFill>
+            <a:srgbClr val="FFFFFF"/>
+          </a:solidFill>
+          <a:ln w="15875">
+            <a:solidFill>
+              <a:srgbClr val="1C1B19"/>
+            </a:solidFill>
+          </a:ln>
+          <a:effectLst/>
+        </p:spPr>
+        <p:style>
+          <a:lnRef idx="1">
+            <a:schemeClr val="accent1"/>
+          </a:lnRef>
+          <a:fillRef idx="3">
+            <a:schemeClr val="accent1"/>
+          </a:fillRef>
+          <a:effectRef idx="2">
+            <a:schemeClr val="accent1"/>
+          </a:effectRef>
+          <a:fontRef idx="minor">
+            <a:schemeClr val="lt1"/>
+          </a:fontRef>
+        </p:style>
+        <p:txBody>
+          <a:bodyPr rtlCol="0" anchor="ctr"/>
+          <a:lstStyle/>
+          <a:p>
+            <a:pPr algn="ctr"/>
           </a:p>
         </p:txBody>
       </p:sp>
@@ -9221,8 +9543,8 @@
         </p:nvSpPr>
         <p:spPr>
           <a:xfrm>
-            <a:off x="8178800" y="4846320"/>
-            <a:ext cx="3281375" cy="914400"/>
+            <a:off x="1097280" y="4206240"/>
+            <a:ext cx="10058400" cy="365760"/>
           </a:xfrm>
           <a:prstGeom prst="rect">
             <a:avLst/>
@@ -9241,13 +9563,52 @@
               </a:spcAft>
             </a:pPr>
             <a:r>
-              <a:rPr sz="1200" b="0" i="0">
+              <a:rPr sz="1200" b="1" i="0">
+                <a:solidFill>
+                  <a:srgbClr val="0B2D5B"/>
+                </a:solidFill>
+                <a:latin typeface="Inter Tight"/>
+              </a:rPr>
+              <a:t>STUDENT PAGE</a:t>
+            </a:r>
+          </a:p>
+        </p:txBody>
+      </p:sp>
+      <p:sp>
+        <p:nvSpPr>
+          <p:cNvPr id="9" name="TextBox 8"/>
+          <p:cNvSpPr txBox="1"/>
+          <p:nvPr/>
+        </p:nvSpPr>
+        <p:spPr>
+          <a:xfrm>
+            <a:off x="1097280" y="4617720"/>
+            <a:ext cx="10058400" cy="640080"/>
+          </a:xfrm>
+          <a:prstGeom prst="rect">
+            <a:avLst/>
+          </a:prstGeom>
+          <a:noFill/>
+        </p:spPr>
+        <p:txBody>
+          <a:bodyPr wrap="square" anchor="t" lIns="0" rIns="0" tIns="0" bIns="0">
+            <a:spAutoFit/>
+          </a:bodyPr>
+          <a:lstStyle/>
+          <a:p>
+            <a:pPr algn="l">
+              <a:spcAft>
+                <a:spcPts val="900"/>
+              </a:spcAft>
+            </a:pPr>
+            <a:r>
+              <a:rPr sz="2000" b="0" i="0">
                 <a:solidFill>
                   <a:srgbClr val="1C1B19"/>
                 </a:solidFill>
                 <a:latin typeface="Inter Tight"/>
               </a:rPr>
-              <a:t>From Rapha Gone Racing: Tulsa Tough (Rapha Films, 2021), four parts played back to back.</a:t>
+              <a:t>https://rmwtoolkit.github.io/bcds-toolkit/headwinds-and-tailwinds-high-school.html</a:t>
             </a:r>
           </a:p>
         </p:txBody>

--- a/decks/headwinds-and-tailwinds-lesson-v2.pptx
+++ b/decks/headwinds-and-tailwinds-lesson-v2.pptx
@@ -4369,7 +4369,7 @@
                 </a:solidFill>
                 <a:latin typeface="Source Serif 4"/>
               </a:rPr>
-              <a:t>Students learn why advantages are harder to notice than obstacles, name a few of their own tailwinds privately, and choose one way to use one well. Let your division head know you're teaching it, test the video clip beforehand, and say "not your fault" more than once.</a:t>
+              <a:t>Students learn why advantages are harder to notice than obstacles, name a few of their own tailwinds privately, and choose one way to use one well. Test the video clip beforehand, and say "not your fault" more than once.</a:t>
             </a:r>
           </a:p>
           <a:p>
@@ -5204,7 +5204,7 @@
                 </a:solidFill>
                 <a:latin typeface="Source Serif 4"/>
               </a:rPr>
-              <a:t>Let leadership know before you teach it.</a:t>
+              <a:t>Go first, with one of your own tailwinds.</a:t>
             </a:r>
           </a:p>
           <a:p>
@@ -5220,7 +5220,7 @@
                 </a:solidFill>
                 <a:latin typeface="Source Serif 4"/>
               </a:rPr>
-              <a:t>This is the topic most likely to bring a call from a family. Tell your division head or diversity lead you're teaching it, and when. It helps them answer questions, and it helps you if one comes.</a:t>
+              <a:t>Something real and low-stakes: a parent who could help with homework, a car at sixteen, never being asked where you're really from. When the adult names a tailwind calmly, students learn it's something you can say out loud without falling apart.</a:t>
             </a:r>
           </a:p>
           <a:p>
@@ -5252,7 +5252,7 @@
                 </a:solidFill>
                 <a:latin typeface="Source Serif 4"/>
               </a:rPr>
-              <a:t>Go first, with one of your own tailwinds.</a:t>
+              <a:t>Students of color are not the lesson.</a:t>
             </a:r>
           </a:p>
           <a:p>
@@ -5268,7 +5268,7 @@
                 </a:solidFill>
                 <a:latin typeface="Source Serif 4"/>
               </a:rPr>
-              <a:t>Something real and low-stakes: a parent who could help with homework, a car at sixteen, never being asked where you're really from. When the adult names a tailwind calmly, students learn it's something you can say out loud without falling apart.</a:t>
+              <a:t>Never ask a student to describe their headwinds or speak for a group, and don't let the room turn toward them. Tallies stay private. No privilege walk or any activity that lines students up by advantage: it ranks kids in front of each other.</a:t>
             </a:r>
           </a:p>
           <a:p>
@@ -5300,7 +5300,7 @@
                 </a:solidFill>
                 <a:latin typeface="Source Serif 4"/>
               </a:rPr>
-              <a:t>Students of color are not the lesson.</a:t>
+              <a:t>Say "not your fault" more than once.</a:t>
             </a:r>
           </a:p>
           <a:p>
@@ -5316,7 +5316,7 @@
                 </a:solidFill>
                 <a:latin typeface="Source Serif 4"/>
               </a:rPr>
-              <a:t>Never ask a student to describe their headwinds or speak for a group, and don't let the room turn toward them. Tallies stay private. No privilege walk or any activity that lines students up by advantage: it ranks kids in front of each other.</a:t>
+              <a:t>Separate blame from responsibility out loud, early and again at the end. Defensiveness drops when students hear they aren't being accused.</a:t>
             </a:r>
           </a:p>
           <a:p>
@@ -5358,54 +5358,6 @@
             <a:spAutoFit/>
           </a:bodyPr>
           <a:lstStyle/>
-          <a:p>
-            <a:pPr algn="l">
-              <a:spcAft>
-                <a:spcPts val="585"/>
-              </a:spcAft>
-            </a:pPr>
-            <a:r>
-              <a:rPr sz="1500" b="1" i="0">
-                <a:solidFill>
-                  <a:srgbClr val="1C1B19"/>
-                </a:solidFill>
-                <a:latin typeface="Source Serif 4"/>
-              </a:rPr>
-              <a:t>Say "not your fault" more than once.</a:t>
-            </a:r>
-          </a:p>
-          <a:p>
-            <a:pPr algn="l">
-              <a:spcAft>
-                <a:spcPts val="585"/>
-              </a:spcAft>
-            </a:pPr>
-            <a:r>
-              <a:rPr sz="1300" b="0" i="0">
-                <a:solidFill>
-                  <a:srgbClr val="1C1B19"/>
-                </a:solidFill>
-                <a:latin typeface="Source Serif 4"/>
-              </a:rPr>
-              <a:t>Separate blame from responsibility out loud, early and again at the end. Defensiveness drops when students hear they aren't being accused.</a:t>
-            </a:r>
-          </a:p>
-          <a:p>
-            <a:pPr algn="l">
-              <a:spcAft>
-                <a:spcPts val="585"/>
-              </a:spcAft>
-            </a:pPr>
-            <a:r>
-              <a:rPr sz="1300" b="0" i="0">
-                <a:solidFill>
-                  <a:srgbClr val="1C1B19"/>
-                </a:solidFill>
-                <a:latin typeface="Source Serif 4"/>
-              </a:rPr>
-              <a:t/>
-            </a:r>
-          </a:p>
           <a:p>
             <a:pPr algn="l">
               <a:spcAft>
@@ -6816,6 +6768,45 @@
                 <a:latin typeface="Inter Tight"/>
               </a:rPr>
               <a:t>Beaver Upper School · Counseling</a:t>
+            </a:r>
+          </a:p>
+        </p:txBody>
+      </p:sp>
+      <p:sp>
+        <p:nvSpPr>
+          <p:cNvPr id="8" name="TextBox 7"/>
+          <p:cNvSpPr txBox="1"/>
+          <p:nvPr/>
+        </p:nvSpPr>
+        <p:spPr>
+          <a:xfrm>
+            <a:off x="6766560" y="5897880"/>
+            <a:ext cx="4846320" cy="640080"/>
+          </a:xfrm>
+          <a:prstGeom prst="rect">
+            <a:avLst/>
+          </a:prstGeom>
+          <a:noFill/>
+        </p:spPr>
+        <p:txBody>
+          <a:bodyPr wrap="square" anchor="t" lIns="0" rIns="0" tIns="0" bIns="0">
+            <a:spAutoFit/>
+          </a:bodyPr>
+          <a:lstStyle/>
+          <a:p>
+            <a:pPr algn="r">
+              <a:spcAft>
+                <a:spcPts val="495"/>
+              </a:spcAft>
+            </a:pPr>
+            <a:r>
+              <a:rPr sz="1100" b="0" i="0">
+                <a:solidFill>
+                  <a:srgbClr val="E8E4DA"/>
+                </a:solidFill>
+                <a:latin typeface="Inter Tight"/>
+              </a:rPr>
+              <a:t>Written by Dr. Rick Wilson, with AI-assisted drafting. Every lesson is reviewed and edited by Dr. Wilson.</a:t>
             </a:r>
           </a:p>
         </p:txBody>
